--- a/submission/he/iHelp-presentation.pptx
+++ b/submission/he/iHelp-presentation.pptx
@@ -3095,7 +3095,7 @@
     <p:bg>
       <p:bgPr>
         <a:solidFill>
-          <a:srgbClr val="10231B"/>
+          <a:srgbClr val="0E1F18"/>
         </a:solidFill>
         <a:effectLst/>
       </p:bgPr>
@@ -3115,8 +3115,8 @@
         </p:nvSpPr>
         <p:spPr>
           <a:xfrm>
-            <a:off x="0" y="2286000"/>
-            <a:ext cx="12191695" cy="2377440"/>
+            <a:off x="0" y="2788920"/>
+            <a:ext cx="12191695" cy="1737360"/>
           </a:xfrm>
           <a:prstGeom prst="rect">
             <a:avLst/>
@@ -3153,20 +3153,20 @@
       </p:sp>
       <p:sp>
         <p:nvSpPr>
-          <p:cNvPr id="3" name="Rectangle 2"/>
+          <p:cNvPr id="3" name="Rounded Rectangle 2"/>
           <p:cNvSpPr/>
           <p:nvPr/>
         </p:nvSpPr>
         <p:spPr>
           <a:xfrm>
-            <a:off x="5394960" y="1051560"/>
-            <a:ext cx="1371600" cy="1371600"/>
-          </a:xfrm>
-          <a:prstGeom prst="rect">
+            <a:off x="5541264" y="1051560"/>
+            <a:ext cx="1097280" cy="1097280"/>
+          </a:xfrm>
+          <a:prstGeom prst="roundRect">
             <a:avLst/>
           </a:prstGeom>
           <a:solidFill>
-            <a:srgbClr val="1A9D72"/>
+            <a:srgbClr val="1FA87A"/>
           </a:solidFill>
           <a:ln>
             <a:noFill/>
@@ -3188,10 +3188,26 @@
           </a:fontRef>
         </p:style>
         <p:txBody>
-          <a:bodyPr rtlCol="0" anchor="ctr"/>
-          <a:lstStyle/>
-          <a:p>
-            <a:pPr algn="ctr"/>
+          <a:bodyPr rtlCol="0" anchor="ctr" wrap="square" lIns="25400" rIns="25400" tIns="25400" bIns="25400"/>
+          <a:lstStyle/>
+          <a:p>
+            <a:pPr algn="ctr" rtl="0">
+              <a:spcBef>
+                <a:spcPts val="0"/>
+              </a:spcBef>
+              <a:spcAft>
+                <a:spcPts val="0"/>
+              </a:spcAft>
+            </a:pPr>
+            <a:r>
+              <a:rPr sz="5400" b="1">
+                <a:solidFill>
+                  <a:srgbClr val="FFFFFF"/>
+                </a:solidFill>
+                <a:latin typeface="Arial"/>
+              </a:rPr>
+              <a:t>i</a:t>
+            </a:r>
           </a:p>
         </p:txBody>
       </p:sp>
@@ -3203,8 +3219,8 @@
         </p:nvSpPr>
         <p:spPr>
           <a:xfrm>
-            <a:off x="5394960" y="1051560"/>
-            <a:ext cx="1371600" cy="1371600"/>
+            <a:off x="914400" y="2880360"/>
+            <a:ext cx="10332720" cy="822960"/>
           </a:xfrm>
           <a:prstGeom prst="rect">
             <a:avLst/>
@@ -3217,22 +3233,22 @@
           </a:bodyPr>
           <a:lstStyle/>
           <a:p>
-            <a:pPr algn="ctr">
-              <a:spcBef>
-                <a:spcPts val="0"/>
-              </a:spcBef>
-              <a:spcAft>
-                <a:spcPts val="0"/>
-              </a:spcAft>
-            </a:pPr>
-            <a:r>
-              <a:rPr sz="7200" b="1">
+            <a:pPr algn="ctr" rtl="1">
+              <a:spcBef>
+                <a:spcPts val="0"/>
+              </a:spcBef>
+              <a:spcAft>
+                <a:spcPts val="0"/>
+              </a:spcAft>
+            </a:pPr>
+            <a:r>
+              <a:rPr sz="3400" b="1" lang="he-IL">
                 <a:solidFill>
                   <a:srgbClr val="FFFFFF"/>
                 </a:solidFill>
                 <a:latin typeface="Arial"/>
               </a:rPr>
-              <a:t>i</a:t>
+              <a:t>מבקשים עזרה — העוזרים מגיעים אליכם</a:t>
             </a:r>
           </a:p>
         </p:txBody>
@@ -3245,8 +3261,8 @@
         </p:nvSpPr>
         <p:spPr>
           <a:xfrm>
-            <a:off x="914400" y="2514600"/>
-            <a:ext cx="10332720" cy="1097280"/>
+            <a:off x="1371600" y="3794760"/>
+            <a:ext cx="9418320" cy="640080"/>
           </a:xfrm>
           <a:prstGeom prst="rect">
             <a:avLst/>
@@ -3268,13 +3284,13 @@
               </a:spcAft>
             </a:pPr>
             <a:r>
-              <a:rPr sz="4000" b="1">
-                <a:solidFill>
-                  <a:srgbClr val="FFFFFF"/>
-                </a:solidFill>
-                <a:latin typeface="Arial"/>
-              </a:rPr>
-              <a:t>iHelp — מבקשים עזרה, העוזרים מגיעים אליכם</a:t>
+              <a:rPr sz="1700" b="0" lang="he-IL">
+                <a:solidFill>
+                  <a:srgbClr val="D9E8E1"/>
+                </a:solidFill>
+                <a:latin typeface="Arial"/>
+              </a:rPr>
+              <a:t>שוק עזרה הפוך: מפרסמים בקשה אחת, ושכנים מאומתים מתחרים לעזור</a:t>
             </a:r>
           </a:p>
         </p:txBody>
@@ -3287,8 +3303,8 @@
         </p:nvSpPr>
         <p:spPr>
           <a:xfrm>
-            <a:off x="914400" y="3657600"/>
-            <a:ext cx="10332720" cy="640080"/>
+            <a:off x="914400" y="5029200"/>
+            <a:ext cx="10332720" cy="914400"/>
           </a:xfrm>
           <a:prstGeom prst="rect">
             <a:avLst/>
@@ -3301,58 +3317,16 @@
           </a:bodyPr>
           <a:lstStyle/>
           <a:p>
-            <a:pPr algn="ctr" rtl="1">
-              <a:spcBef>
-                <a:spcPts val="0"/>
-              </a:spcBef>
-              <a:spcAft>
-                <a:spcPts val="0"/>
-              </a:spcAft>
-            </a:pPr>
-            <a:r>
-              <a:rPr sz="2000" b="0">
-                <a:solidFill>
-                  <a:srgbClr val="D9E8E1"/>
-                </a:solidFill>
-                <a:latin typeface="Arial"/>
-              </a:rPr>
-              <a:t>שוק עזרה הפוך — מפרסמים בקשה אחת, ושכנים מאומתים מתחרים לעזור</a:t>
-            </a:r>
-          </a:p>
-        </p:txBody>
-      </p:sp>
-      <p:sp>
-        <p:nvSpPr>
-          <p:cNvPr id="7" name="TextBox 6"/>
-          <p:cNvSpPr txBox="1"/>
-          <p:nvPr/>
-        </p:nvSpPr>
-        <p:spPr>
-          <a:xfrm>
-            <a:off x="914400" y="5120640"/>
-            <a:ext cx="10332720" cy="822960"/>
-          </a:xfrm>
-          <a:prstGeom prst="rect">
-            <a:avLst/>
-          </a:prstGeom>
-          <a:noFill/>
-        </p:spPr>
-        <p:txBody>
-          <a:bodyPr wrap="square" anchor="ctr" lIns="50800" rIns="50800" tIns="25400" bIns="25400">
-            <a:spAutoFit/>
-          </a:bodyPr>
-          <a:lstStyle/>
-          <a:p>
-            <a:pPr algn="ctr">
-              <a:spcBef>
-                <a:spcPts val="0"/>
-              </a:spcBef>
-              <a:spcAft>
-                <a:spcPts val="600"/>
-              </a:spcAft>
-            </a:pPr>
-            <a:r>
-              <a:rPr sz="1500" b="0">
+            <a:pPr algn="ctr" rtl="0">
+              <a:spcBef>
+                <a:spcPts val="0"/>
+              </a:spcBef>
+              <a:spcAft>
+                <a:spcPts val="800"/>
+              </a:spcAft>
+            </a:pPr>
+            <a:r>
+              <a:rPr sz="1300" b="0">
                 <a:solidFill>
                   <a:srgbClr val="9AADA4"/>
                 </a:solidFill>
@@ -3362,7 +3336,7 @@
             </a:r>
           </a:p>
           <a:p>
-            <a:pPr algn="ctr">
+            <a:pPr algn="ctr" rtl="0">
               <a:spcBef>
                 <a:spcPts val="0"/>
               </a:spcBef>
@@ -3373,7 +3347,7 @@
             <a:r>
               <a:rPr sz="1500" b="1">
                 <a:solidFill>
-                  <a:srgbClr val="1A9D72"/>
+                  <a:srgbClr val="1FA87A"/>
                 </a:solidFill>
                 <a:latin typeface="Arial"/>
               </a:rPr>
@@ -3396,7 +3370,7 @@
     <p:bg>
       <p:bgPr>
         <a:solidFill>
-          <a:srgbClr val="F6F5EF"/>
+          <a:srgbClr val="F7F6F1"/>
         </a:solidFill>
         <a:effectLst/>
       </p:bgPr>
@@ -3417,7 +3391,7 @@
         <p:spPr>
           <a:xfrm>
             <a:off x="0" y="0"/>
-            <a:ext cx="12191695" cy="118872"/>
+            <a:ext cx="12191695" cy="146304"/>
           </a:xfrm>
           <a:prstGeom prst="rect">
             <a:avLst/>
@@ -3460,8 +3434,8 @@
         </p:nvSpPr>
         <p:spPr>
           <a:xfrm>
-            <a:off x="457200" y="292608"/>
-            <a:ext cx="11247120" cy="365760"/>
+            <a:off x="548640" y="310896"/>
+            <a:ext cx="11064240" cy="365760"/>
           </a:xfrm>
           <a:prstGeom prst="rect">
             <a:avLst/>
@@ -3483,7 +3457,7 @@
               </a:spcAft>
             </a:pPr>
             <a:r>
-              <a:rPr sz="1200" b="1">
+              <a:rPr sz="1200" b="1" lang="he-IL">
                 <a:solidFill>
                   <a:srgbClr val="0F6B4F"/>
                 </a:solidFill>
@@ -3502,8 +3476,8 @@
         </p:nvSpPr>
         <p:spPr>
           <a:xfrm>
-            <a:off x="457200" y="6446520"/>
-            <a:ext cx="1828800" cy="320040"/>
+            <a:off x="548640" y="6419088"/>
+            <a:ext cx="3657600" cy="320040"/>
           </a:xfrm>
           <a:prstGeom prst="rect">
             <a:avLst/>
@@ -3516,7 +3490,7 @@
           </a:bodyPr>
           <a:lstStyle/>
           <a:p>
-            <a:pPr algn="l">
+            <a:pPr algn="l" rtl="0">
               <a:spcBef>
                 <a:spcPts val="0"/>
               </a:spcBef>
@@ -3527,11 +3501,11 @@
             <a:r>
               <a:rPr sz="1000" b="0">
                 <a:solidFill>
-                  <a:srgbClr val="53635B"/>
-                </a:solidFill>
-                <a:latin typeface="Arial"/>
-              </a:rPr>
-              <a:t>iHelp · 10 / 16</a:t>
+                  <a:srgbClr val="5C6B63"/>
+                </a:solidFill>
+                <a:latin typeface="Arial"/>
+              </a:rPr>
+              <a:t>iHelp · 10 / 12</a:t>
             </a:r>
           </a:p>
         </p:txBody>
@@ -3544,8 +3518,8 @@
         </p:nvSpPr>
         <p:spPr>
           <a:xfrm>
-            <a:off x="457200" y="566928"/>
-            <a:ext cx="11247120" cy="822960"/>
+            <a:off x="548640" y="603504"/>
+            <a:ext cx="11064240" cy="914400"/>
           </a:xfrm>
           <a:prstGeom prst="rect">
             <a:avLst/>
@@ -3567,9 +3541,9 @@
               </a:spcAft>
             </a:pPr>
             <a:r>
-              <a:rPr sz="3200" b="1">
-                <a:solidFill>
-                  <a:srgbClr val="10231B"/>
+              <a:rPr sz="3400" b="1" lang="he-IL">
+                <a:solidFill>
+                  <a:srgbClr val="0E1F18"/>
                 </a:solidFill>
                 <a:latin typeface="Arial"/>
               </a:rPr>
@@ -3586,14 +3560,14 @@
         </p:nvSpPr>
         <p:spPr>
           <a:xfrm>
-            <a:off x="457200" y="1371600"/>
-            <a:ext cx="11247120" cy="25400"/>
+            <a:off x="548640" y="1481328"/>
+            <a:ext cx="11064240" cy="31750"/>
           </a:xfrm>
           <a:prstGeom prst="rect">
             <a:avLst/>
           </a:prstGeom>
           <a:solidFill>
-            <a:srgbClr val="DFE0D6"/>
+            <a:srgbClr val="1FA87A"/>
           </a:solidFill>
           <a:ln>
             <a:noFill/>
@@ -3630,8 +3604,8 @@
         </p:nvSpPr>
         <p:spPr>
           <a:xfrm>
-            <a:off x="640080" y="1600200"/>
-            <a:ext cx="10881360" cy="4206240"/>
+            <a:off x="640080" y="1783080"/>
+            <a:ext cx="10881360" cy="3931920"/>
           </a:xfrm>
           <a:prstGeom prst="rect">
             <a:avLst/>
@@ -3639,7 +3613,7 @@
           <a:noFill/>
         </p:spPr>
         <p:txBody>
-          <a:bodyPr wrap="square">
+          <a:bodyPr wrap="square" lIns="50800" rIns="50800">
             <a:spAutoFit/>
           </a:bodyPr>
           <a:lstStyle/>
@@ -3649,26 +3623,26 @@
                 <a:spcPts val="0"/>
               </a:spcBef>
               <a:spcAft>
-                <a:spcPts val="1000"/>
-              </a:spcAft>
-            </a:pPr>
-            <a:r>
-              <a:rPr sz="1600" b="1">
+                <a:spcPts val="1600"/>
+              </a:spcAft>
+            </a:pPr>
+            <a:r>
+              <a:rPr sz="1800" lang="he-IL">
+                <a:solidFill>
+                  <a:srgbClr val="0E1F18"/>
+                </a:solidFill>
+                <a:latin typeface="Arial"/>
+              </a:rPr>
+              <a:t>ארבע שכבות אכיפה, רק האחרונה נאמנת — המסד.  </a:t>
+            </a:r>
+            <a:r>
+              <a:rPr sz="1400" lang="he-IL">
                 <a:solidFill>
                   <a:srgbClr val="0F6B4F"/>
                 </a:solidFill>
                 <a:latin typeface="Arial"/>
               </a:rPr>
-              <a:t>•  </a:t>
-            </a:r>
-            <a:r>
-              <a:rPr sz="1600">
-                <a:solidFill>
-                  <a:srgbClr val="10231B"/>
-                </a:solidFill>
-                <a:latin typeface="Arial"/>
-              </a:rPr>
-              <a:t>ארבע שכבות אכיפה, ורק האחרונה נאמנת: middleware · UI · Server Actions · מסד הנתונים.</a:t>
+              <a:t>●</a:t>
             </a:r>
           </a:p>
           <a:p>
@@ -3677,26 +3651,26 @@
                 <a:spcPts val="0"/>
               </a:spcBef>
               <a:spcAft>
-                <a:spcPts val="1000"/>
-              </a:spcAft>
-            </a:pPr>
-            <a:r>
-              <a:rPr sz="1600" b="1">
+                <a:spcPts val="1600"/>
+              </a:spcAft>
+            </a:pPr>
+            <a:r>
+              <a:rPr sz="1800" lang="he-IL">
+                <a:solidFill>
+                  <a:srgbClr val="0E1F18"/>
+                </a:solidFill>
+                <a:latin typeface="Arial"/>
+              </a:rPr>
+              <a:t>Authentication: Supabase Auth (bcrypt), עוגיות HttpOnly, JWT בכל קריאה.  </a:t>
+            </a:r>
+            <a:r>
+              <a:rPr sz="1400" lang="he-IL">
                 <a:solidFill>
                   <a:srgbClr val="0F6B4F"/>
                 </a:solidFill>
                 <a:latin typeface="Arial"/>
               </a:rPr>
-              <a:t>•  </a:t>
-            </a:r>
-            <a:r>
-              <a:rPr sz="1600">
-                <a:solidFill>
-                  <a:srgbClr val="10231B"/>
-                </a:solidFill>
-                <a:latin typeface="Arial"/>
-              </a:rPr>
-              <a:t>Authentication: Supabase Auth (bcrypt), עוגיות HttpOnly/Secure/SameSite, JWT בכל קריאה.</a:t>
+              <a:t>●</a:t>
             </a:r>
           </a:p>
           <a:p>
@@ -3705,26 +3679,26 @@
                 <a:spcPts val="0"/>
               </a:spcBef>
               <a:spcAft>
-                <a:spcPts val="1000"/>
-              </a:spcAft>
-            </a:pPr>
-            <a:r>
-              <a:rPr sz="1600" b="1">
+                <a:spcPts val="1600"/>
+              </a:spcAft>
+            </a:pPr>
+            <a:r>
+              <a:rPr sz="1800" lang="he-IL">
+                <a:solidFill>
+                  <a:srgbClr val="0E1F18"/>
+                </a:solidFill>
+                <a:latin typeface="Arial"/>
+              </a:rPr>
+              <a:t>מפתח anon פומבי בטוח כי RLS היא הסמכות · service-role באפס שורות קוד.  </a:t>
+            </a:r>
+            <a:r>
+              <a:rPr sz="1400" lang="he-IL">
                 <a:solidFill>
                   <a:srgbClr val="0F6B4F"/>
                 </a:solidFill>
                 <a:latin typeface="Arial"/>
               </a:rPr>
-              <a:t>•  </a:t>
-            </a:r>
-            <a:r>
-              <a:rPr sz="1600">
-                <a:solidFill>
-                  <a:srgbClr val="10231B"/>
-                </a:solidFill>
-                <a:latin typeface="Arial"/>
-              </a:rPr>
-              <a:t>מפתח anon פומבי בטוח — כי RLS היא הסמכות · מפתח service-role באפס שורות קוד.</a:t>
+              <a:t>●</a:t>
             </a:r>
           </a:p>
           <a:p>
@@ -3733,74 +3707,46 @@
                 <a:spcPts val="0"/>
               </a:spcBef>
               <a:spcAft>
-                <a:spcPts val="1000"/>
-              </a:spcAft>
-            </a:pPr>
-            <a:r>
-              <a:rPr sz="1600" b="1">
+                <a:spcPts val="1600"/>
+              </a:spcAft>
+            </a:pPr>
+            <a:r>
+              <a:rPr sz="1800" lang="he-IL">
+                <a:solidFill>
+                  <a:srgbClr val="0E1F18"/>
+                </a:solidFill>
+                <a:latin typeface="Arial"/>
+              </a:rPr>
+              <a:t>XSS · CSRF · SQL injection — כולם מנוטרלים מבנית.  </a:t>
+            </a:r>
+            <a:r>
+              <a:rPr sz="1400" lang="he-IL">
                 <a:solidFill>
                   <a:srgbClr val="0F6B4F"/>
                 </a:solidFill>
                 <a:latin typeface="Arial"/>
               </a:rPr>
-              <a:t>•  </a:t>
-            </a:r>
-            <a:r>
-              <a:rPr sz="1600">
-                <a:solidFill>
-                  <a:srgbClr val="10231B"/>
-                </a:solidFill>
-                <a:latin typeface="Arial"/>
-              </a:rPr>
-              <a:t>XSS (React escaping) · CSRF (Server Actions + SameSite) · SQL injection (בלתי-אפשרי מבנית).</a:t>
-            </a:r>
-          </a:p>
-          <a:p>
-            <a:pPr algn="r" rtl="1">
-              <a:spcBef>
-                <a:spcPts val="0"/>
-              </a:spcBef>
-              <a:spcAft>
-                <a:spcPts val="1000"/>
-              </a:spcAft>
-            </a:pPr>
-            <a:r>
-              <a:rPr sz="1600" b="1">
-                <a:solidFill>
-                  <a:srgbClr val="0F6B4F"/>
-                </a:solidFill>
-                <a:latin typeface="Arial"/>
-              </a:rPr>
-              <a:t>•  </a:t>
-            </a:r>
-            <a:r>
-              <a:rPr sz="1600">
-                <a:solidFill>
-                  <a:srgbClr val="10231B"/>
-                </a:solidFill>
-                <a:latin typeface="Arial"/>
-              </a:rPr>
-              <a:t>רשימת סיכונים כנה (R1–R10) — כולל באג אמיתי שנתפס ותוקן (migration 0013).</a:t>
-            </a:r>
-          </a:p>
-        </p:txBody>
-      </p:sp>
-      <p:sp>
-        <p:nvSpPr>
-          <p:cNvPr id="8" name="Rectangle 7"/>
+              <a:t>●</a:t>
+            </a:r>
+          </a:p>
+        </p:txBody>
+      </p:sp>
+      <p:sp>
+        <p:nvSpPr>
+          <p:cNvPr id="8" name="Rounded Rectangle 7"/>
           <p:cNvSpPr/>
           <p:nvPr/>
         </p:nvSpPr>
         <p:spPr>
           <a:xfrm>
             <a:off x="640080" y="5623560"/>
-            <a:ext cx="10881360" cy="685800"/>
-          </a:xfrm>
-          <a:prstGeom prst="rect">
+            <a:ext cx="10881360" cy="731520"/>
+          </a:xfrm>
+          <a:prstGeom prst="roundRect">
             <a:avLst/>
           </a:prstGeom>
           <a:solidFill>
-            <a:srgbClr val="ECF3EF"/>
+            <a:srgbClr val="EAF2EE"/>
           </a:solidFill>
           <a:ln>
             <a:noFill/>
@@ -3837,8 +3783,8 @@
         </p:nvSpPr>
         <p:spPr>
           <a:xfrm>
-            <a:off x="868680" y="5705856"/>
-            <a:ext cx="10424160" cy="548640"/>
+            <a:off x="914400" y="5705856"/>
+            <a:ext cx="10332720" cy="566928"/>
           </a:xfrm>
           <a:prstGeom prst="rect">
             <a:avLst/>
@@ -3860,13 +3806,13 @@
               </a:spcAft>
             </a:pPr>
             <a:r>
-              <a:rPr sz="1400" b="1">
+              <a:rPr sz="1400" b="1" lang="he-IL">
                 <a:solidFill>
                   <a:srgbClr val="0F6B4F"/>
                 </a:solidFill>
                 <a:latin typeface="Arial"/>
               </a:rPr>
-              <a:t>המפתח שהודבק בצ'אט (secret) — לרוטט אחרי ההגשה. שאר הסודות ב-.env (gitignored).</a:t>
+              <a:t>רשימת סיכונים כנה (R1–R10), כולל באג אמיתי שנתפס ותוקן.</a:t>
             </a:r>
           </a:p>
         </p:txBody>
@@ -3885,7 +3831,7 @@
     <p:bg>
       <p:bgPr>
         <a:solidFill>
-          <a:srgbClr val="F6F5EF"/>
+          <a:srgbClr val="F7F6F1"/>
         </a:solidFill>
         <a:effectLst/>
       </p:bgPr>
@@ -3906,7 +3852,7 @@
         <p:spPr>
           <a:xfrm>
             <a:off x="0" y="0"/>
-            <a:ext cx="12191695" cy="118872"/>
+            <a:ext cx="12191695" cy="146304"/>
           </a:xfrm>
           <a:prstGeom prst="rect">
             <a:avLst/>
@@ -3949,8 +3895,8 @@
         </p:nvSpPr>
         <p:spPr>
           <a:xfrm>
-            <a:off x="457200" y="292608"/>
-            <a:ext cx="11247120" cy="365760"/>
+            <a:off x="548640" y="310896"/>
+            <a:ext cx="11064240" cy="365760"/>
           </a:xfrm>
           <a:prstGeom prst="rect">
             <a:avLst/>
@@ -3972,13 +3918,13 @@
               </a:spcAft>
             </a:pPr>
             <a:r>
-              <a:rPr sz="1200" b="1">
+              <a:rPr sz="1200" b="1" lang="he-IL">
                 <a:solidFill>
                   <a:srgbClr val="0F6B4F"/>
                 </a:solidFill>
                 <a:latin typeface="Arial"/>
               </a:rPr>
-              <a:t>§12 · שיפורים עתידיים</a:t>
+              <a:t>§12 · שיפורים</a:t>
             </a:r>
           </a:p>
         </p:txBody>
@@ -3991,8 +3937,8 @@
         </p:nvSpPr>
         <p:spPr>
           <a:xfrm>
-            <a:off x="457200" y="6446520"/>
-            <a:ext cx="1828800" cy="320040"/>
+            <a:off x="548640" y="6419088"/>
+            <a:ext cx="3657600" cy="320040"/>
           </a:xfrm>
           <a:prstGeom prst="rect">
             <a:avLst/>
@@ -4005,7 +3951,7 @@
           </a:bodyPr>
           <a:lstStyle/>
           <a:p>
-            <a:pPr algn="l">
+            <a:pPr algn="l" rtl="0">
               <a:spcBef>
                 <a:spcPts val="0"/>
               </a:spcBef>
@@ -4016,11 +3962,11 @@
             <a:r>
               <a:rPr sz="1000" b="0">
                 <a:solidFill>
-                  <a:srgbClr val="53635B"/>
-                </a:solidFill>
-                <a:latin typeface="Arial"/>
-              </a:rPr>
-              <a:t>iHelp · 11 / 16</a:t>
+                  <a:srgbClr val="5C6B63"/>
+                </a:solidFill>
+                <a:latin typeface="Arial"/>
+              </a:rPr>
+              <a:t>iHelp · 11 / 12</a:t>
             </a:r>
           </a:p>
         </p:txBody>
@@ -4033,8 +3979,8 @@
         </p:nvSpPr>
         <p:spPr>
           <a:xfrm>
-            <a:off x="457200" y="566928"/>
-            <a:ext cx="11247120" cy="822960"/>
+            <a:off x="548640" y="603504"/>
+            <a:ext cx="11064240" cy="914400"/>
           </a:xfrm>
           <a:prstGeom prst="rect">
             <a:avLst/>
@@ -4056,9 +4002,9 @@
               </a:spcAft>
             </a:pPr>
             <a:r>
-              <a:rPr sz="3200" b="1">
-                <a:solidFill>
-                  <a:srgbClr val="10231B"/>
+              <a:rPr sz="3400" b="1" lang="he-IL">
+                <a:solidFill>
+                  <a:srgbClr val="0E1F18"/>
                 </a:solidFill>
                 <a:latin typeface="Arial"/>
               </a:rPr>
@@ -4075,14 +4021,14 @@
         </p:nvSpPr>
         <p:spPr>
           <a:xfrm>
-            <a:off x="457200" y="1371600"/>
-            <a:ext cx="11247120" cy="25400"/>
+            <a:off x="548640" y="1481328"/>
+            <a:ext cx="11064240" cy="31750"/>
           </a:xfrm>
           <a:prstGeom prst="rect">
             <a:avLst/>
           </a:prstGeom>
           <a:solidFill>
-            <a:srgbClr val="DFE0D6"/>
+            <a:srgbClr val="1FA87A"/>
           </a:solidFill>
           <a:ln>
             <a:noFill/>
@@ -4119,8 +4065,8 @@
         </p:nvSpPr>
         <p:spPr>
           <a:xfrm>
-            <a:off x="640080" y="1600200"/>
-            <a:ext cx="10881360" cy="4206240"/>
+            <a:off x="640080" y="1783080"/>
+            <a:ext cx="10881360" cy="3931920"/>
           </a:xfrm>
           <a:prstGeom prst="rect">
             <a:avLst/>
@@ -4128,7 +4074,7 @@
           <a:noFill/>
         </p:spPr>
         <p:txBody>
-          <a:bodyPr wrap="square">
+          <a:bodyPr wrap="square" lIns="50800" rIns="50800">
             <a:spAutoFit/>
           </a:bodyPr>
           <a:lstStyle/>
@@ -4138,26 +4084,26 @@
                 <a:spcPts val="0"/>
               </a:spcBef>
               <a:spcAft>
-                <a:spcPts val="1300"/>
-              </a:spcAft>
-            </a:pPr>
-            <a:r>
-              <a:rPr sz="1800" b="1">
+                <a:spcPts val="1800"/>
+              </a:spcAft>
+            </a:pPr>
+            <a:r>
+              <a:rPr sz="2000" lang="he-IL">
+                <a:solidFill>
+                  <a:srgbClr val="0E1F18"/>
+                </a:solidFill>
+                <a:latin typeface="Arial"/>
+              </a:rPr>
+              <a:t>צ'אט בתוך האפליקציה בין הצדדים המשובצים.  </a:t>
+            </a:r>
+            <a:r>
+              <a:rPr sz="1600" lang="he-IL">
                 <a:solidFill>
                   <a:srgbClr val="0F6B4F"/>
                 </a:solidFill>
                 <a:latin typeface="Arial"/>
               </a:rPr>
-              <a:t>•  </a:t>
-            </a:r>
-            <a:r>
-              <a:rPr sz="1800">
-                <a:solidFill>
-                  <a:srgbClr val="10231B"/>
-                </a:solidFill>
-                <a:latin typeface="Arial"/>
-              </a:rPr>
-              <a:t>צ'אט בתוך האפליקציה בין הצדדים המשובצים — כרגע מחליפים מספרי טלפון.</a:t>
+              <a:t>●</a:t>
             </a:r>
           </a:p>
           <a:p>
@@ -4166,26 +4112,26 @@
                 <a:spcPts val="0"/>
               </a:spcBef>
               <a:spcAft>
-                <a:spcPts val="1300"/>
-              </a:spcAft>
-            </a:pPr>
-            <a:r>
-              <a:rPr sz="1800" b="1">
+                <a:spcPts val="1800"/>
+              </a:spcAft>
+            </a:pPr>
+            <a:r>
+              <a:rPr sz="2000" lang="he-IL">
+                <a:solidFill>
+                  <a:srgbClr val="0E1F18"/>
+                </a:solidFill>
+                <a:latin typeface="Arial"/>
+              </a:rPr>
+              <a:t>SMS OTP לאימות אמיתי של הטלפון.  </a:t>
+            </a:r>
+            <a:r>
+              <a:rPr sz="1600" lang="he-IL">
                 <a:solidFill>
                   <a:srgbClr val="0F6B4F"/>
                 </a:solidFill>
                 <a:latin typeface="Arial"/>
               </a:rPr>
-              <a:t>•  </a:t>
-            </a:r>
-            <a:r>
-              <a:rPr sz="1800">
-                <a:solidFill>
-                  <a:srgbClr val="10231B"/>
-                </a:solidFill>
-                <a:latin typeface="Arial"/>
-              </a:rPr>
-              <a:t>SMS OTP לאימות אמיתי של הטלפון.</a:t>
+              <a:t>●</a:t>
             </a:r>
           </a:p>
           <a:p>
@@ -4194,26 +4140,26 @@
                 <a:spcPts val="0"/>
               </a:spcBef>
               <a:spcAft>
-                <a:spcPts val="1300"/>
-              </a:spcAft>
-            </a:pPr>
-            <a:r>
-              <a:rPr sz="1800" b="1">
+                <a:spcPts val="1800"/>
+              </a:spcAft>
+            </a:pPr>
+            <a:r>
+              <a:rPr sz="2000" lang="he-IL">
+                <a:solidFill>
+                  <a:srgbClr val="0E1F18"/>
+                </a:solidFill>
+                <a:latin typeface="Arial"/>
+              </a:rPr>
+              <a:t>התראות בתוך האפליקציה — בלי לרענן ידנית.  </a:t>
+            </a:r>
+            <a:r>
+              <a:rPr sz="1600" lang="he-IL">
                 <a:solidFill>
                   <a:srgbClr val="0F6B4F"/>
                 </a:solidFill>
                 <a:latin typeface="Arial"/>
               </a:rPr>
-              <a:t>•  </a:t>
-            </a:r>
-            <a:r>
-              <a:rPr sz="1800">
-                <a:solidFill>
-                  <a:srgbClr val="10231B"/>
-                </a:solidFill>
-                <a:latin typeface="Arial"/>
-              </a:rPr>
-              <a:t>התראות בתוך האפליקציה — כדי לא לרענן ידנית.</a:t>
+              <a:t>●</a:t>
             </a:r>
           </a:p>
           <a:p>
@@ -4222,74 +4168,46 @@
                 <a:spcPts val="0"/>
               </a:spcBef>
               <a:spcAft>
-                <a:spcPts val="1300"/>
-              </a:spcAft>
-            </a:pPr>
-            <a:r>
-              <a:rPr sz="1800" b="1">
+                <a:spcPts val="1800"/>
+              </a:spcAft>
+            </a:pPr>
+            <a:r>
+              <a:rPr sz="2000" lang="he-IL">
+                <a:solidFill>
+                  <a:srgbClr val="0E1F18"/>
+                </a:solidFill>
+                <a:latin typeface="Arial"/>
+              </a:rPr>
+              <a:t>מוניטין גם לצד המבקש — לסגור את סימטריית האמון.  </a:t>
+            </a:r>
+            <a:r>
+              <a:rPr sz="1600" lang="he-IL">
                 <a:solidFill>
                   <a:srgbClr val="0F6B4F"/>
                 </a:solidFill>
                 <a:latin typeface="Arial"/>
               </a:rPr>
-              <a:t>•  </a:t>
-            </a:r>
-            <a:r>
-              <a:rPr sz="1800">
-                <a:solidFill>
-                  <a:srgbClr val="10231B"/>
-                </a:solidFill>
-                <a:latin typeface="Arial"/>
-              </a:rPr>
-              <a:t>מוניטין גם לצד המבקש — לסגור את סימטריית האמון במלואה.</a:t>
-            </a:r>
-          </a:p>
-          <a:p>
-            <a:pPr algn="r" rtl="1">
-              <a:spcBef>
-                <a:spcPts val="0"/>
-              </a:spcBef>
-              <a:spcAft>
-                <a:spcPts val="1300"/>
-              </a:spcAft>
-            </a:pPr>
-            <a:r>
-              <a:rPr sz="1800" b="1">
-                <a:solidFill>
-                  <a:srgbClr val="0F6B4F"/>
-                </a:solidFill>
-                <a:latin typeface="Arial"/>
-              </a:rPr>
-              <a:t>•  </a:t>
-            </a:r>
-            <a:r>
-              <a:rPr sz="1800">
-                <a:solidFill>
-                  <a:srgbClr val="10231B"/>
-                </a:solidFill>
-                <a:latin typeface="Arial"/>
-              </a:rPr>
-              <a:t>כל אלה היו קיצוצים מכוונים כדי לשמור על MVP קטן, נקי ומאובטח.</a:t>
-            </a:r>
-          </a:p>
-        </p:txBody>
-      </p:sp>
-      <p:sp>
-        <p:nvSpPr>
-          <p:cNvPr id="8" name="Rectangle 7"/>
+              <a:t>●</a:t>
+            </a:r>
+          </a:p>
+        </p:txBody>
+      </p:sp>
+      <p:sp>
+        <p:nvSpPr>
+          <p:cNvPr id="8" name="Rounded Rectangle 7"/>
           <p:cNvSpPr/>
           <p:nvPr/>
         </p:nvSpPr>
         <p:spPr>
           <a:xfrm>
             <a:off x="640080" y="5623560"/>
-            <a:ext cx="10881360" cy="685800"/>
-          </a:xfrm>
-          <a:prstGeom prst="rect">
+            <a:ext cx="10881360" cy="731520"/>
+          </a:xfrm>
+          <a:prstGeom prst="roundRect">
             <a:avLst/>
           </a:prstGeom>
           <a:solidFill>
-            <a:srgbClr val="ECF3EF"/>
+            <a:srgbClr val="EAF2EE"/>
           </a:solidFill>
           <a:ln>
             <a:noFill/>
@@ -4326,8 +4244,8 @@
         </p:nvSpPr>
         <p:spPr>
           <a:xfrm>
-            <a:off x="868680" y="5705856"/>
-            <a:ext cx="10424160" cy="548640"/>
+            <a:off x="914400" y="5705856"/>
+            <a:ext cx="10332720" cy="566928"/>
           </a:xfrm>
           <a:prstGeom prst="rect">
             <a:avLst/>
@@ -4349,13 +4267,13 @@
               </a:spcAft>
             </a:pPr>
             <a:r>
-              <a:rPr sz="1400" b="1">
+              <a:rPr sz="1400" b="1" lang="he-IL">
                 <a:solidFill>
                   <a:srgbClr val="0F6B4F"/>
                 </a:solidFill>
                 <a:latin typeface="Arial"/>
               </a:rPr>
-              <a:t>הכול additive — אף שיפור לא דורש לבטל החלטה קיימת.</a:t>
+              <a:t>כל אלה היו קיצוצים מכוונים — MVP קטן, נקי ומאובטח.</a:t>
             </a:r>
           </a:p>
         </p:txBody>
@@ -4395,13 +4313,13 @@
         <p:spPr>
           <a:xfrm>
             <a:off x="0" y="0"/>
-            <a:ext cx="12191695" cy="118872"/>
+            <a:ext cx="12191695" cy="146304"/>
           </a:xfrm>
           <a:prstGeom prst="rect">
             <a:avLst/>
           </a:prstGeom>
           <a:solidFill>
-            <a:srgbClr val="1A9D72"/>
+            <a:srgbClr val="1FA87A"/>
           </a:solidFill>
           <a:ln>
             <a:noFill/>
@@ -4438,8 +4356,8 @@
         </p:nvSpPr>
         <p:spPr>
           <a:xfrm>
-            <a:off x="914400" y="1463040"/>
-            <a:ext cx="10332720" cy="548640"/>
+            <a:off x="914400" y="1417320"/>
+            <a:ext cx="10332720" cy="502920"/>
           </a:xfrm>
           <a:prstGeom prst="rect">
             <a:avLst/>
@@ -4461,7 +4379,7 @@
               </a:spcAft>
             </a:pPr>
             <a:r>
-              <a:rPr sz="1600" b="1">
+              <a:rPr sz="1500" b="1" lang="he-IL">
                 <a:solidFill>
                   <a:srgbClr val="9FD3C2"/>
                 </a:solidFill>
@@ -4480,8 +4398,8 @@
         </p:nvSpPr>
         <p:spPr>
           <a:xfrm>
-            <a:off x="1097280" y="2103120"/>
-            <a:ext cx="9966960" cy="2377440"/>
+            <a:off x="1280160" y="2148840"/>
+            <a:ext cx="9601200" cy="2011680"/>
           </a:xfrm>
           <a:prstGeom prst="rect">
             <a:avLst/>
@@ -4499,36 +4417,17 @@
                 <a:spcPts val="0"/>
               </a:spcBef>
               <a:spcAft>
-                <a:spcPts val="1800"/>
-              </a:spcAft>
-            </a:pPr>
-            <a:r>
-              <a:rPr sz="2600" b="1">
+                <a:spcPts val="2000"/>
+              </a:spcAft>
+            </a:pPr>
+            <a:r>
+              <a:rPr sz="2500" b="1" lang="he-IL">
                 <a:solidFill>
                   <a:srgbClr val="FFFFFF"/>
                 </a:solidFill>
                 <a:latin typeface="Arial"/>
               </a:rPr>
               <a:t>iHelp הופך את החיפוש אחרי עזרה — מפרסמים פעם אחת ושכנים מאומתים מתחרים לעזור לך — וכל שורה בו בנויה כך שמסד הנתונים עצמו אוכף את האמון.</a:t>
-            </a:r>
-          </a:p>
-          <a:p>
-            <a:pPr algn="ctr" rtl="1">
-              <a:spcBef>
-                <a:spcPts val="0"/>
-              </a:spcBef>
-              <a:spcAft>
-                <a:spcPts val="0"/>
-              </a:spcAft>
-            </a:pPr>
-            <a:r>
-              <a:rPr sz="2400" b="1">
-                <a:solidFill>
-                  <a:srgbClr val="9FD3C2"/>
-                </a:solidFill>
-                <a:latin typeface="Arial"/>
-              </a:rPr>
-              <a:t>קטן · נקי · עובד · מאובטח</a:t>
             </a:r>
           </a:p>
         </p:txBody>
@@ -4541,8 +4440,8 @@
         </p:nvSpPr>
         <p:spPr>
           <a:xfrm>
-            <a:off x="914400" y="5212080"/>
-            <a:ext cx="10332720" cy="822960"/>
+            <a:off x="914400" y="4160520"/>
+            <a:ext cx="10332720" cy="640080"/>
           </a:xfrm>
           <a:prstGeom prst="rect">
             <a:avLst/>
@@ -4555,16 +4454,58 @@
           </a:bodyPr>
           <a:lstStyle/>
           <a:p>
-            <a:pPr algn="ctr">
-              <a:spcBef>
-                <a:spcPts val="0"/>
-              </a:spcBef>
-              <a:spcAft>
-                <a:spcPts val="600"/>
-              </a:spcAft>
-            </a:pPr>
-            <a:r>
-              <a:rPr sz="1600" b="1">
+            <a:pPr algn="ctr" rtl="1">
+              <a:spcBef>
+                <a:spcPts val="0"/>
+              </a:spcBef>
+              <a:spcAft>
+                <a:spcPts val="0"/>
+              </a:spcAft>
+            </a:pPr>
+            <a:r>
+              <a:rPr sz="2200" b="1" lang="he-IL">
+                <a:solidFill>
+                  <a:srgbClr val="9FD3C2"/>
+                </a:solidFill>
+                <a:latin typeface="Arial"/>
+              </a:rPr>
+              <a:t>קטן · נקי · עובד · מאובטח</a:t>
+            </a:r>
+          </a:p>
+        </p:txBody>
+      </p:sp>
+      <p:sp>
+        <p:nvSpPr>
+          <p:cNvPr id="6" name="TextBox 5"/>
+          <p:cNvSpPr txBox="1"/>
+          <p:nvPr/>
+        </p:nvSpPr>
+        <p:spPr>
+          <a:xfrm>
+            <a:off x="914400" y="5349240"/>
+            <a:ext cx="10332720" cy="822960"/>
+          </a:xfrm>
+          <a:prstGeom prst="rect">
+            <a:avLst/>
+          </a:prstGeom>
+          <a:noFill/>
+        </p:spPr>
+        <p:txBody>
+          <a:bodyPr wrap="square" anchor="ctr" lIns="50800" rIns="50800" tIns="25400" bIns="25400">
+            <a:spAutoFit/>
+          </a:bodyPr>
+          <a:lstStyle/>
+          <a:p>
+            <a:pPr algn="ctr" rtl="0">
+              <a:spcBef>
+                <a:spcPts val="0"/>
+              </a:spcBef>
+              <a:spcAft>
+                <a:spcPts val="800"/>
+              </a:spcAft>
+            </a:pPr>
+            <a:r>
+              <a:rPr sz="1500" b="1">
                 <a:solidFill>
                   <a:srgbClr val="FFFFFF"/>
                 </a:solidFill>
@@ -4574,16 +4515,16 @@
             </a:r>
           </a:p>
           <a:p>
-            <a:pPr algn="ctr">
-              <a:spcBef>
-                <a:spcPts val="0"/>
-              </a:spcBef>
-              <a:spcAft>
-                <a:spcPts val="0"/>
-              </a:spcAft>
-            </a:pPr>
-            <a:r>
-              <a:rPr sz="2000" b="1">
+            <a:pPr algn="ctr" rtl="1">
+              <a:spcBef>
+                <a:spcPts val="0"/>
+              </a:spcBef>
+              <a:spcAft>
+                <a:spcPts val="0"/>
+              </a:spcAft>
+            </a:pPr>
+            <a:r>
+              <a:rPr sz="2000" b="1" lang="he-IL">
                 <a:solidFill>
                   <a:srgbClr val="FFFFFF"/>
                 </a:solidFill>
@@ -4608,7 +4549,7 @@
     <p:bg>
       <p:bgPr>
         <a:solidFill>
-          <a:srgbClr val="F6F5EF"/>
+          <a:srgbClr val="F7F6F1"/>
         </a:solidFill>
         <a:effectLst/>
       </p:bgPr>
@@ -4629,7 +4570,7 @@
         <p:spPr>
           <a:xfrm>
             <a:off x="0" y="0"/>
-            <a:ext cx="12191695" cy="118872"/>
+            <a:ext cx="12191695" cy="146304"/>
           </a:xfrm>
           <a:prstGeom prst="rect">
             <a:avLst/>
@@ -4672,8 +4613,8 @@
         </p:nvSpPr>
         <p:spPr>
           <a:xfrm>
-            <a:off x="457200" y="292608"/>
-            <a:ext cx="11247120" cy="365760"/>
+            <a:off x="548640" y="310896"/>
+            <a:ext cx="11064240" cy="365760"/>
           </a:xfrm>
           <a:prstGeom prst="rect">
             <a:avLst/>
@@ -4695,13 +4636,13 @@
               </a:spcAft>
             </a:pPr>
             <a:r>
-              <a:rPr sz="1200" b="1">
+              <a:rPr sz="1200" b="1" lang="he-IL">
                 <a:solidFill>
                   <a:srgbClr val="0F6B4F"/>
                 </a:solidFill>
                 <a:latin typeface="Arial"/>
               </a:rPr>
-              <a:t>§1–2 · הבעיה והמוצר</a:t>
+              <a:t>§1–2 · הבעיה</a:t>
             </a:r>
           </a:p>
         </p:txBody>
@@ -4714,8 +4655,8 @@
         </p:nvSpPr>
         <p:spPr>
           <a:xfrm>
-            <a:off x="457200" y="6446520"/>
-            <a:ext cx="1828800" cy="320040"/>
+            <a:off x="548640" y="6419088"/>
+            <a:ext cx="3657600" cy="320040"/>
           </a:xfrm>
           <a:prstGeom prst="rect">
             <a:avLst/>
@@ -4728,7 +4669,7 @@
           </a:bodyPr>
           <a:lstStyle/>
           <a:p>
-            <a:pPr algn="l">
+            <a:pPr algn="l" rtl="0">
               <a:spcBef>
                 <a:spcPts val="0"/>
               </a:spcBef>
@@ -4739,11 +4680,11 @@
             <a:r>
               <a:rPr sz="1000" b="0">
                 <a:solidFill>
-                  <a:srgbClr val="53635B"/>
-                </a:solidFill>
-                <a:latin typeface="Arial"/>
-              </a:rPr>
-              <a:t>iHelp · 2 / 16</a:t>
+                  <a:srgbClr val="5C6B63"/>
+                </a:solidFill>
+                <a:latin typeface="Arial"/>
+              </a:rPr>
+              <a:t>iHelp · 2 / 12</a:t>
             </a:r>
           </a:p>
         </p:txBody>
@@ -4756,8 +4697,8 @@
         </p:nvSpPr>
         <p:spPr>
           <a:xfrm>
-            <a:off x="457200" y="566928"/>
-            <a:ext cx="11247120" cy="822960"/>
+            <a:off x="548640" y="603504"/>
+            <a:ext cx="11064240" cy="914400"/>
           </a:xfrm>
           <a:prstGeom prst="rect">
             <a:avLst/>
@@ -4779,9 +4720,9 @@
               </a:spcAft>
             </a:pPr>
             <a:r>
-              <a:rPr sz="3200" b="1">
-                <a:solidFill>
-                  <a:srgbClr val="10231B"/>
+              <a:rPr sz="3400" b="1" lang="he-IL">
+                <a:solidFill>
+                  <a:srgbClr val="0E1F18"/>
                 </a:solidFill>
                 <a:latin typeface="Arial"/>
               </a:rPr>
@@ -4798,14 +4739,14 @@
         </p:nvSpPr>
         <p:spPr>
           <a:xfrm>
-            <a:off x="457200" y="1371600"/>
-            <a:ext cx="11247120" cy="25400"/>
+            <a:off x="548640" y="1481328"/>
+            <a:ext cx="11064240" cy="31750"/>
           </a:xfrm>
           <a:prstGeom prst="rect">
             <a:avLst/>
           </a:prstGeom>
           <a:solidFill>
-            <a:srgbClr val="DFE0D6"/>
+            <a:srgbClr val="1FA87A"/>
           </a:solidFill>
           <a:ln>
             <a:noFill/>
@@ -4842,8 +4783,8 @@
         </p:nvSpPr>
         <p:spPr>
           <a:xfrm>
-            <a:off x="640080" y="1600200"/>
-            <a:ext cx="10881360" cy="4206240"/>
+            <a:off x="640080" y="1783080"/>
+            <a:ext cx="10881360" cy="3931920"/>
           </a:xfrm>
           <a:prstGeom prst="rect">
             <a:avLst/>
@@ -4851,7 +4792,7 @@
           <a:noFill/>
         </p:spPr>
         <p:txBody>
-          <a:bodyPr wrap="square">
+          <a:bodyPr wrap="square" lIns="50800" rIns="50800">
             <a:spAutoFit/>
           </a:bodyPr>
           <a:lstStyle/>
@@ -4861,26 +4802,26 @@
                 <a:spcPts val="0"/>
               </a:spcBef>
               <a:spcAft>
-                <a:spcPts val="1600"/>
-              </a:spcAft>
-            </a:pPr>
-            <a:r>
-              <a:rPr sz="1900" b="1">
+                <a:spcPts val="2000"/>
+              </a:spcAft>
+            </a:pPr>
+            <a:r>
+              <a:rPr sz="2000" lang="he-IL">
+                <a:solidFill>
+                  <a:srgbClr val="0E1F18"/>
+                </a:solidFill>
+                <a:latin typeface="Arial"/>
+              </a:rPr>
+              <a:t>מחפשים, משווים ומתקשרים לספקים אחד-אחד — הספקים אפילו לא רואים שיש ביקוש.  </a:t>
+            </a:r>
+            <a:r>
+              <a:rPr sz="1600" lang="he-IL">
                 <a:solidFill>
                   <a:srgbClr val="0F6B4F"/>
                 </a:solidFill>
                 <a:latin typeface="Arial"/>
               </a:rPr>
-              <a:t>•  </a:t>
-            </a:r>
-            <a:r>
-              <a:rPr sz="1900">
-                <a:solidFill>
-                  <a:srgbClr val="10231B"/>
-                </a:solidFill>
-                <a:latin typeface="Arial"/>
-              </a:rPr>
-              <a:t>הגילוי איטי וחד-כיווני — מחפשים, משווים, ומתקשרים לספקים אחד-אחד. הספקים אפילו לא רואים שיש ביקוש.</a:t>
+              <a:t>●</a:t>
             </a:r>
           </a:p>
           <a:p>
@@ -4889,26 +4830,26 @@
                 <a:spcPts val="0"/>
               </a:spcBef>
               <a:spcAft>
-                <a:spcPts val="1600"/>
-              </a:spcAft>
-            </a:pPr>
-            <a:r>
-              <a:rPr sz="1900" b="1">
+                <a:spcPts val="2000"/>
+              </a:spcAft>
+            </a:pPr>
+            <a:r>
+              <a:rPr sz="2000" lang="he-IL">
+                <a:solidFill>
+                  <a:srgbClr val="0E1F18"/>
+                </a:solidFill>
+                <a:latin typeface="Arial"/>
+              </a:rPr>
+              <a:t>אמון יקר לבנייה, וצריך לפעול בשני הכיוונים — גם מבקש זדוני מסוכן לעוזר.  </a:t>
+            </a:r>
+            <a:r>
+              <a:rPr sz="1600" lang="he-IL">
                 <a:solidFill>
                   <a:srgbClr val="0F6B4F"/>
                 </a:solidFill>
                 <a:latin typeface="Arial"/>
               </a:rPr>
-              <a:t>•  </a:t>
-            </a:r>
-            <a:r>
-              <a:rPr sz="1900">
-                <a:solidFill>
-                  <a:srgbClr val="10231B"/>
-                </a:solidFill>
-                <a:latin typeface="Arial"/>
-              </a:rPr>
-              <a:t>אמון יקר לבנייה — וצריך לפעול בשני הכיוונים: גם מבקש זדוני מסוכן לעוזר, לא רק להפך.</a:t>
+              <a:t>●</a:t>
             </a:r>
           </a:p>
           <a:p>
@@ -4917,26 +4858,26 @@
                 <a:spcPts val="0"/>
               </a:spcBef>
               <a:spcAft>
-                <a:spcPts val="1600"/>
-              </a:spcAft>
-            </a:pPr>
-            <a:r>
-              <a:rPr sz="1900" b="1">
+                <a:spcPts val="2000"/>
+              </a:spcAft>
+            </a:pPr>
+            <a:r>
+              <a:rPr sz="2000" lang="he-IL">
+                <a:solidFill>
+                  <a:srgbClr val="0E1F18"/>
+                </a:solidFill>
+                <a:latin typeface="Arial"/>
+              </a:rPr>
+              <a:t>הזמינות אטומה — מי פנוי וקרוב עכשיו? אילו בקשות פתוחות בסביבה?  </a:t>
+            </a:r>
+            <a:r>
+              <a:rPr sz="1600" lang="he-IL">
                 <a:solidFill>
                   <a:srgbClr val="0F6B4F"/>
                 </a:solidFill>
                 <a:latin typeface="Arial"/>
               </a:rPr>
-              <a:t>•  </a:t>
-            </a:r>
-            <a:r>
-              <a:rPr sz="1900">
-                <a:solidFill>
-                  <a:srgbClr val="10231B"/>
-                </a:solidFill>
-                <a:latin typeface="Arial"/>
-              </a:rPr>
-              <a:t>הזמינות אטומה — מי פנוי וקרוב עכשיו? אילו בקשות פתוחות בסביבה?</a:t>
+              <a:t>●</a:t>
             </a:r>
           </a:p>
           <a:p>
@@ -4945,46 +4886,46 @@
                 <a:spcPts val="0"/>
               </a:spcBef>
               <a:spcAft>
-                <a:spcPts val="1600"/>
-              </a:spcAft>
-            </a:pPr>
-            <a:r>
-              <a:rPr sz="1900" b="1">
+                <a:spcPts val="2000"/>
+              </a:spcAft>
+            </a:pPr>
+            <a:r>
+              <a:rPr sz="2000" lang="he-IL">
+                <a:solidFill>
+                  <a:srgbClr val="0E1F18"/>
+                </a:solidFill>
+                <a:latin typeface="Arial"/>
+              </a:rPr>
+              <a:t>משימות קטנות ומתאימות להתנדבות נופלות בין הכיסאות.  </a:t>
+            </a:r>
+            <a:r>
+              <a:rPr sz="1600" lang="he-IL">
                 <a:solidFill>
                   <a:srgbClr val="0F6B4F"/>
                 </a:solidFill>
                 <a:latin typeface="Arial"/>
               </a:rPr>
-              <a:t>•  </a:t>
-            </a:r>
-            <a:r>
-              <a:rPr sz="1900">
-                <a:solidFill>
-                  <a:srgbClr val="10231B"/>
-                </a:solidFill>
-                <a:latin typeface="Arial"/>
-              </a:rPr>
-              <a:t>משימות קטנות ומתאימות להתנדבות נופלות בין הכיסאות — יש שכנים מוכנים, אין ערוץ שמחבר.</a:t>
-            </a:r>
-          </a:p>
-        </p:txBody>
-      </p:sp>
-      <p:sp>
-        <p:nvSpPr>
-          <p:cNvPr id="8" name="Rectangle 7"/>
+              <a:t>●</a:t>
+            </a:r>
+          </a:p>
+        </p:txBody>
+      </p:sp>
+      <p:sp>
+        <p:nvSpPr>
+          <p:cNvPr id="8" name="Rounded Rectangle 7"/>
           <p:cNvSpPr/>
           <p:nvPr/>
         </p:nvSpPr>
         <p:spPr>
           <a:xfrm>
             <a:off x="640080" y="5623560"/>
-            <a:ext cx="10881360" cy="685800"/>
-          </a:xfrm>
-          <a:prstGeom prst="rect">
+            <a:ext cx="10881360" cy="731520"/>
+          </a:xfrm>
+          <a:prstGeom prst="roundRect">
             <a:avLst/>
           </a:prstGeom>
           <a:solidFill>
-            <a:srgbClr val="ECF3EF"/>
+            <a:srgbClr val="EAF2EE"/>
           </a:solidFill>
           <a:ln>
             <a:noFill/>
@@ -5021,8 +4962,8 @@
         </p:nvSpPr>
         <p:spPr>
           <a:xfrm>
-            <a:off x="868680" y="5705856"/>
-            <a:ext cx="10424160" cy="548640"/>
+            <a:off x="914400" y="5705856"/>
+            <a:ext cx="10332720" cy="566928"/>
           </a:xfrm>
           <a:prstGeom prst="rect">
             <a:avLst/>
@@ -5044,7 +4985,7 @@
               </a:spcAft>
             </a:pPr>
             <a:r>
-              <a:rPr sz="1400" b="1">
+              <a:rPr sz="1400" b="1" lang="he-IL">
                 <a:solidFill>
                   <a:srgbClr val="0F6B4F"/>
                 </a:solidFill>
@@ -5069,7 +5010,7 @@
     <p:bg>
       <p:bgPr>
         <a:solidFill>
-          <a:srgbClr val="F6F5EF"/>
+          <a:srgbClr val="F7F6F1"/>
         </a:solidFill>
         <a:effectLst/>
       </p:bgPr>
@@ -5090,7 +5031,7 @@
         <p:spPr>
           <a:xfrm>
             <a:off x="0" y="0"/>
-            <a:ext cx="12191695" cy="118872"/>
+            <a:ext cx="12191695" cy="146304"/>
           </a:xfrm>
           <a:prstGeom prst="rect">
             <a:avLst/>
@@ -5133,8 +5074,8 @@
         </p:nvSpPr>
         <p:spPr>
           <a:xfrm>
-            <a:off x="457200" y="292608"/>
-            <a:ext cx="11247120" cy="365760"/>
+            <a:off x="548640" y="310896"/>
+            <a:ext cx="11064240" cy="365760"/>
           </a:xfrm>
           <a:prstGeom prst="rect">
             <a:avLst/>
@@ -5156,13 +5097,13 @@
               </a:spcAft>
             </a:pPr>
             <a:r>
-              <a:rPr sz="1200" b="1">
+              <a:rPr sz="1200" b="1" lang="he-IL">
                 <a:solidFill>
                   <a:srgbClr val="0F6B4F"/>
                 </a:solidFill>
                 <a:latin typeface="Arial"/>
               </a:rPr>
-              <a:t>§1 · מה המוצר</a:t>
+              <a:t>§1 · המוצר</a:t>
             </a:r>
           </a:p>
         </p:txBody>
@@ -5175,8 +5116,8 @@
         </p:nvSpPr>
         <p:spPr>
           <a:xfrm>
-            <a:off x="457200" y="6446520"/>
-            <a:ext cx="1828800" cy="320040"/>
+            <a:off x="548640" y="6419088"/>
+            <a:ext cx="3657600" cy="320040"/>
           </a:xfrm>
           <a:prstGeom prst="rect">
             <a:avLst/>
@@ -5189,7 +5130,7 @@
           </a:bodyPr>
           <a:lstStyle/>
           <a:p>
-            <a:pPr algn="l">
+            <a:pPr algn="l" rtl="0">
               <a:spcBef>
                 <a:spcPts val="0"/>
               </a:spcBef>
@@ -5200,11 +5141,11 @@
             <a:r>
               <a:rPr sz="1000" b="0">
                 <a:solidFill>
-                  <a:srgbClr val="53635B"/>
-                </a:solidFill>
-                <a:latin typeface="Arial"/>
-              </a:rPr>
-              <a:t>iHelp · 3 / 16</a:t>
+                  <a:srgbClr val="5C6B63"/>
+                </a:solidFill>
+                <a:latin typeface="Arial"/>
+              </a:rPr>
+              <a:t>iHelp · 3 / 12</a:t>
             </a:r>
           </a:p>
         </p:txBody>
@@ -5217,8 +5158,8 @@
         </p:nvSpPr>
         <p:spPr>
           <a:xfrm>
-            <a:off x="457200" y="566928"/>
-            <a:ext cx="11247120" cy="822960"/>
+            <a:off x="548640" y="603504"/>
+            <a:ext cx="11064240" cy="914400"/>
           </a:xfrm>
           <a:prstGeom prst="rect">
             <a:avLst/>
@@ -5240,9 +5181,9 @@
               </a:spcAft>
             </a:pPr>
             <a:r>
-              <a:rPr sz="3200" b="1">
-                <a:solidFill>
-                  <a:srgbClr val="10231B"/>
+              <a:rPr sz="3400" b="1" lang="he-IL">
+                <a:solidFill>
+                  <a:srgbClr val="0E1F18"/>
                 </a:solidFill>
                 <a:latin typeface="Arial"/>
               </a:rPr>
@@ -5259,14 +5200,14 @@
         </p:nvSpPr>
         <p:spPr>
           <a:xfrm>
-            <a:off x="457200" y="1371600"/>
-            <a:ext cx="11247120" cy="25400"/>
+            <a:off x="548640" y="1481328"/>
+            <a:ext cx="11064240" cy="31750"/>
           </a:xfrm>
           <a:prstGeom prst="rect">
             <a:avLst/>
           </a:prstGeom>
           <a:solidFill>
-            <a:srgbClr val="DFE0D6"/>
+            <a:srgbClr val="1FA87A"/>
           </a:solidFill>
           <a:ln>
             <a:noFill/>
@@ -5303,8 +5244,8 @@
         </p:nvSpPr>
         <p:spPr>
           <a:xfrm>
-            <a:off x="640080" y="1600200"/>
-            <a:ext cx="10881360" cy="4206240"/>
+            <a:off x="640080" y="1783080"/>
+            <a:ext cx="10881360" cy="3931920"/>
           </a:xfrm>
           <a:prstGeom prst="rect">
             <a:avLst/>
@@ -5312,7 +5253,7 @@
           <a:noFill/>
         </p:spPr>
         <p:txBody>
-          <a:bodyPr wrap="square">
+          <a:bodyPr wrap="square" lIns="50800" rIns="50800">
             <a:spAutoFit/>
           </a:bodyPr>
           <a:lstStyle/>
@@ -5322,26 +5263,26 @@
                 <a:spcPts val="0"/>
               </a:spcBef>
               <a:spcAft>
-                <a:spcPts val="1500"/>
-              </a:spcAft>
-            </a:pPr>
-            <a:r>
-              <a:rPr sz="1900" b="1">
+                <a:spcPts val="1800"/>
+              </a:spcAft>
+            </a:pPr>
+            <a:r>
+              <a:rPr sz="2000" lang="he-IL">
+                <a:solidFill>
+                  <a:srgbClr val="0E1F18"/>
+                </a:solidFill>
+                <a:latin typeface="Arial"/>
+              </a:rPr>
+              <a:t>מבקש מפרסם בקשה אחת — כותרת, תיאור, קטגוריה, תמונות, מיקום.  </a:t>
+            </a:r>
+            <a:r>
+              <a:rPr sz="1600" lang="he-IL">
                 <a:solidFill>
                   <a:srgbClr val="0F6B4F"/>
                 </a:solidFill>
                 <a:latin typeface="Arial"/>
               </a:rPr>
-              <a:t>•  </a:t>
-            </a:r>
-            <a:r>
-              <a:rPr sz="1900">
-                <a:solidFill>
-                  <a:srgbClr val="10231B"/>
-                </a:solidFill>
-                <a:latin typeface="Arial"/>
-              </a:rPr>
-              <a:t>מבקש מפרסם בקשה אחת: כותרת, תיאור, קטגוריה, תמונות ומיקום — ללא בחירת תמחור.</a:t>
+              <a:t>●</a:t>
             </a:r>
           </a:p>
           <a:p>
@@ -5350,26 +5291,26 @@
                 <a:spcPts val="0"/>
               </a:spcBef>
               <a:spcAft>
-                <a:spcPts val="1500"/>
-              </a:spcAft>
-            </a:pPr>
-            <a:r>
-              <a:rPr sz="1900" b="1">
+                <a:spcPts val="1800"/>
+              </a:spcAft>
+            </a:pPr>
+            <a:r>
+              <a:rPr sz="2000" lang="he-IL">
+                <a:solidFill>
+                  <a:srgbClr val="0E1F18"/>
+                </a:solidFill>
+                <a:latin typeface="Arial"/>
+              </a:rPr>
+              <a:t>עוזרים מאומתים מתחרים בהצעות — התמחור שלהם: קבוע / התנדבות / לאחר העבודה.  </a:t>
+            </a:r>
+            <a:r>
+              <a:rPr sz="1600" lang="he-IL">
                 <a:solidFill>
                   <a:srgbClr val="0F6B4F"/>
                 </a:solidFill>
                 <a:latin typeface="Arial"/>
               </a:rPr>
-              <a:t>•  </a:t>
-            </a:r>
-            <a:r>
-              <a:rPr sz="1900">
-                <a:solidFill>
-                  <a:srgbClr val="10231B"/>
-                </a:solidFill>
-                <a:latin typeface="Arial"/>
-              </a:rPr>
-              <a:t>עוזרים מאומתים בסביבה מתחרים בהצעות — התמחור כולו שלהם: מחיר קבוע / התנדבות / מחיר לאחר העבודה.</a:t>
+              <a:t>●</a:t>
             </a:r>
           </a:p>
           <a:p>
@@ -5378,26 +5319,26 @@
                 <a:spcPts val="0"/>
               </a:spcBef>
               <a:spcAft>
-                <a:spcPts val="1500"/>
-              </a:spcAft>
-            </a:pPr>
-            <a:r>
-              <a:rPr sz="1900" b="1">
+                <a:spcPts val="1800"/>
+              </a:spcAft>
+            </a:pPr>
+            <a:r>
+              <a:rPr sz="2000" lang="he-IL">
+                <a:solidFill>
+                  <a:srgbClr val="0E1F18"/>
+                </a:solidFill>
+                <a:latin typeface="Arial"/>
+              </a:rPr>
+              <a:t>המבקש משווה ובוחר הצעה אחת — כל השאר נסגרות אוטומטית.  </a:t>
+            </a:r>
+            <a:r>
+              <a:rPr sz="1600" lang="he-IL">
                 <a:solidFill>
                   <a:srgbClr val="0F6B4F"/>
                 </a:solidFill>
                 <a:latin typeface="Arial"/>
               </a:rPr>
-              <a:t>•  </a:t>
-            </a:r>
-            <a:r>
-              <a:rPr sz="1900">
-                <a:solidFill>
-                  <a:srgbClr val="10231B"/>
-                </a:solidFill>
-                <a:latin typeface="Arial"/>
-              </a:rPr>
-              <a:t>המבקש משווה הצעות (פרופיל, תג, דירוג, מחיר) ובוחר אחת — כל השאר נסגרות אוטומטית.</a:t>
+              <a:t>●</a:t>
             </a:r>
           </a:p>
           <a:p>
@@ -5406,46 +5347,46 @@
                 <a:spcPts val="0"/>
               </a:spcBef>
               <a:spcAft>
-                <a:spcPts val="1500"/>
-              </a:spcAft>
-            </a:pPr>
-            <a:r>
-              <a:rPr sz="1900" b="1">
+                <a:spcPts val="1800"/>
+              </a:spcAft>
+            </a:pPr>
+            <a:r>
+              <a:rPr sz="2000" lang="he-IL">
+                <a:solidFill>
+                  <a:srgbClr val="0E1F18"/>
+                </a:solidFill>
+                <a:latin typeface="Arial"/>
+              </a:rPr>
+              <a:t>שני הצדדים מאשרים סיום, והמבקש מדרג את העוזר.  </a:t>
+            </a:r>
+            <a:r>
+              <a:rPr sz="1600" lang="he-IL">
                 <a:solidFill>
                   <a:srgbClr val="0F6B4F"/>
                 </a:solidFill>
                 <a:latin typeface="Arial"/>
               </a:rPr>
-              <a:t>•  </a:t>
-            </a:r>
-            <a:r>
-              <a:rPr sz="1900">
-                <a:solidFill>
-                  <a:srgbClr val="10231B"/>
-                </a:solidFill>
-                <a:latin typeface="Arial"/>
-              </a:rPr>
-              <a:t>שני הצדדים מאשרים סיום, והמבקש מדרג את העוזר. המוניטין מצטבר.</a:t>
-            </a:r>
-          </a:p>
-        </p:txBody>
-      </p:sp>
-      <p:sp>
-        <p:nvSpPr>
-          <p:cNvPr id="8" name="Rectangle 7"/>
+              <a:t>●</a:t>
+            </a:r>
+          </a:p>
+        </p:txBody>
+      </p:sp>
+      <p:sp>
+        <p:nvSpPr>
+          <p:cNvPr id="8" name="Rounded Rectangle 7"/>
           <p:cNvSpPr/>
           <p:nvPr/>
         </p:nvSpPr>
         <p:spPr>
           <a:xfrm>
             <a:off x="640080" y="5623560"/>
-            <a:ext cx="10881360" cy="685800"/>
-          </a:xfrm>
-          <a:prstGeom prst="rect">
+            <a:ext cx="10881360" cy="731520"/>
+          </a:xfrm>
+          <a:prstGeom prst="roundRect">
             <a:avLst/>
           </a:prstGeom>
           <a:solidFill>
-            <a:srgbClr val="ECF3EF"/>
+            <a:srgbClr val="EAF2EE"/>
           </a:solidFill>
           <a:ln>
             <a:noFill/>
@@ -5482,8 +5423,8 @@
         </p:nvSpPr>
         <p:spPr>
           <a:xfrm>
-            <a:off x="868680" y="5705856"/>
-            <a:ext cx="10424160" cy="548640"/>
+            <a:off x="914400" y="5705856"/>
+            <a:ext cx="10332720" cy="566928"/>
           </a:xfrm>
           <a:prstGeom prst="rect">
             <a:avLst/>
@@ -5505,13 +5446,13 @@
               </a:spcAft>
             </a:pPr>
             <a:r>
-              <a:rPr sz="1400" b="1">
+              <a:rPr sz="1400" b="1" lang="he-IL">
                 <a:solidFill>
                   <a:srgbClr val="0F6B4F"/>
                 </a:solidFill>
                 <a:latin typeface="Arial"/>
               </a:rPr>
-              <a:t>ההיפוך הוא כל הרעיון — וכל כלל נאכף על ידי מסד הנתונים עצמו.</a:t>
+              <a:t>ההיפוך הוא כל הרעיון — וכל כלל נאכף על ידי מסד הנתונים.</a:t>
             </a:r>
           </a:p>
         </p:txBody>
@@ -5530,7 +5471,7 @@
     <p:bg>
       <p:bgPr>
         <a:solidFill>
-          <a:srgbClr val="F6F5EF"/>
+          <a:srgbClr val="F7F6F1"/>
         </a:solidFill>
         <a:effectLst/>
       </p:bgPr>
@@ -5551,7 +5492,7 @@
         <p:spPr>
           <a:xfrm>
             <a:off x="0" y="0"/>
-            <a:ext cx="12191695" cy="118872"/>
+            <a:ext cx="12191695" cy="146304"/>
           </a:xfrm>
           <a:prstGeom prst="rect">
             <a:avLst/>
@@ -5594,8 +5535,8 @@
         </p:nvSpPr>
         <p:spPr>
           <a:xfrm>
-            <a:off x="457200" y="292608"/>
-            <a:ext cx="11247120" cy="365760"/>
+            <a:off x="548640" y="310896"/>
+            <a:ext cx="11064240" cy="365760"/>
           </a:xfrm>
           <a:prstGeom prst="rect">
             <a:avLst/>
@@ -5617,13 +5558,13 @@
               </a:spcAft>
             </a:pPr>
             <a:r>
-              <a:rPr sz="1200" b="1">
+              <a:rPr sz="1200" b="1" lang="he-IL">
                 <a:solidFill>
                   <a:srgbClr val="0F6B4F"/>
                 </a:solidFill>
                 <a:latin typeface="Arial"/>
               </a:rPr>
-              <a:t>§3–4 · משתמשים וערך עסקי</a:t>
+              <a:t>§3–4 · משתמשים וערך</a:t>
             </a:r>
           </a:p>
         </p:txBody>
@@ -5636,8 +5577,8 @@
         </p:nvSpPr>
         <p:spPr>
           <a:xfrm>
-            <a:off x="457200" y="6446520"/>
-            <a:ext cx="1828800" cy="320040"/>
+            <a:off x="548640" y="6419088"/>
+            <a:ext cx="3657600" cy="320040"/>
           </a:xfrm>
           <a:prstGeom prst="rect">
             <a:avLst/>
@@ -5650,7 +5591,7 @@
           </a:bodyPr>
           <a:lstStyle/>
           <a:p>
-            <a:pPr algn="l">
+            <a:pPr algn="l" rtl="0">
               <a:spcBef>
                 <a:spcPts val="0"/>
               </a:spcBef>
@@ -5661,11 +5602,11 @@
             <a:r>
               <a:rPr sz="1000" b="0">
                 <a:solidFill>
-                  <a:srgbClr val="53635B"/>
-                </a:solidFill>
-                <a:latin typeface="Arial"/>
-              </a:rPr>
-              <a:t>iHelp · 4 / 16</a:t>
+                  <a:srgbClr val="5C6B63"/>
+                </a:solidFill>
+                <a:latin typeface="Arial"/>
+              </a:rPr>
+              <a:t>iHelp · 4 / 12</a:t>
             </a:r>
           </a:p>
         </p:txBody>
@@ -5678,8 +5619,8 @@
         </p:nvSpPr>
         <p:spPr>
           <a:xfrm>
-            <a:off x="457200" y="566928"/>
-            <a:ext cx="11247120" cy="822960"/>
+            <a:off x="548640" y="603504"/>
+            <a:ext cx="11064240" cy="914400"/>
           </a:xfrm>
           <a:prstGeom prst="rect">
             <a:avLst/>
@@ -5701,9 +5642,9 @@
               </a:spcAft>
             </a:pPr>
             <a:r>
-              <a:rPr sz="3200" b="1">
-                <a:solidFill>
-                  <a:srgbClr val="10231B"/>
+              <a:rPr sz="3400" b="1" lang="he-IL">
+                <a:solidFill>
+                  <a:srgbClr val="0E1F18"/>
                 </a:solidFill>
                 <a:latin typeface="Arial"/>
               </a:rPr>
@@ -5720,14 +5661,14 @@
         </p:nvSpPr>
         <p:spPr>
           <a:xfrm>
-            <a:off x="457200" y="1371600"/>
-            <a:ext cx="11247120" cy="25400"/>
+            <a:off x="548640" y="1481328"/>
+            <a:ext cx="11064240" cy="31750"/>
           </a:xfrm>
           <a:prstGeom prst="rect">
             <a:avLst/>
           </a:prstGeom>
           <a:solidFill>
-            <a:srgbClr val="DFE0D6"/>
+            <a:srgbClr val="1FA87A"/>
           </a:solidFill>
           <a:ln>
             <a:noFill/>
@@ -5764,8 +5705,8 @@
         </p:nvSpPr>
         <p:spPr>
           <a:xfrm>
-            <a:off x="640080" y="1600200"/>
-            <a:ext cx="10881360" cy="4206240"/>
+            <a:off x="640080" y="1783080"/>
+            <a:ext cx="10881360" cy="3931920"/>
           </a:xfrm>
           <a:prstGeom prst="rect">
             <a:avLst/>
@@ -5773,7 +5714,7 @@
           <a:noFill/>
         </p:spPr>
         <p:txBody>
-          <a:bodyPr wrap="square">
+          <a:bodyPr wrap="square" lIns="50800" rIns="50800">
             <a:spAutoFit/>
           </a:bodyPr>
           <a:lstStyle/>
@@ -5783,26 +5724,26 @@
                 <a:spcPts val="0"/>
               </a:spcBef>
               <a:spcAft>
-                <a:spcPts val="1200"/>
-              </a:spcAft>
-            </a:pPr>
-            <a:r>
-              <a:rPr sz="1800" b="1">
+                <a:spcPts val="1800"/>
+              </a:spcAft>
+            </a:pPr>
+            <a:r>
+              <a:rPr sz="2000" lang="he-IL">
+                <a:solidFill>
+                  <a:srgbClr val="0E1F18"/>
+                </a:solidFill>
+                <a:latin typeface="Arial"/>
+              </a:rPr>
+              <a:t>חשבון אחד, כמה כובעים — ההרשאות לפי שורה, לא לפי חשבון.  </a:t>
+            </a:r>
+            <a:r>
+              <a:rPr sz="1600" lang="he-IL">
                 <a:solidFill>
                   <a:srgbClr val="0F6B4F"/>
                 </a:solidFill>
                 <a:latin typeface="Arial"/>
               </a:rPr>
-              <a:t>•  </a:t>
-            </a:r>
-            <a:r>
-              <a:rPr sz="1800">
-                <a:solidFill>
-                  <a:srgbClr val="10231B"/>
-                </a:solidFill>
-                <a:latin typeface="Arial"/>
-              </a:rPr>
-              <a:t>חשבון אחד, כמה כובעים — אותו אדם מבקש בבוקר ועוזר אחר הצהריים. ההרשאות לפי שורה, לא לפי חשבון.</a:t>
+              <a:t>●</a:t>
             </a:r>
           </a:p>
           <a:p>
@@ -5811,26 +5752,26 @@
                 <a:spcPts val="0"/>
               </a:spcBef>
               <a:spcAft>
-                <a:spcPts val="1200"/>
-              </a:spcAft>
-            </a:pPr>
-            <a:r>
-              <a:rPr sz="1800" b="1">
+                <a:spcPts val="1800"/>
+              </a:spcAft>
+            </a:pPr>
+            <a:r>
+              <a:rPr sz="2000" lang="he-IL">
+                <a:solidFill>
+                  <a:srgbClr val="0E1F18"/>
+                </a:solidFill>
+                <a:latin typeface="Arial"/>
+              </a:rPr>
+              <a:t>שלושה תפקידים: מבקש · עוזר מאומת (תג מקצועי אופציונלי) · מנהל.  </a:t>
+            </a:r>
+            <a:r>
+              <a:rPr sz="1600" lang="he-IL">
                 <a:solidFill>
                   <a:srgbClr val="0F6B4F"/>
                 </a:solidFill>
                 <a:latin typeface="Arial"/>
               </a:rPr>
-              <a:t>•  </a:t>
-            </a:r>
-            <a:r>
-              <a:rPr sz="1800">
-                <a:solidFill>
-                  <a:srgbClr val="10231B"/>
-                </a:solidFill>
-                <a:latin typeface="Arial"/>
-              </a:rPr>
-              <a:t>שלושה תפקידים: מבקש · עוזר מאומת (עם תג מקצועי אופציונלי) · מנהל.</a:t>
+              <a:t>●</a:t>
             </a:r>
           </a:p>
           <a:p>
@@ -5839,26 +5780,26 @@
                 <a:spcPts val="0"/>
               </a:spcBef>
               <a:spcAft>
-                <a:spcPts val="1200"/>
-              </a:spcAft>
-            </a:pPr>
-            <a:r>
-              <a:rPr sz="1800" b="1">
+                <a:spcPts val="1800"/>
+              </a:spcAft>
+            </a:pPr>
+            <a:r>
+              <a:rPr sz="2000" lang="he-IL">
+                <a:solidFill>
+                  <a:srgbClr val="0E1F18"/>
+                </a:solidFill>
+                <a:latin typeface="Arial"/>
+              </a:rPr>
+              <a:t>הלקוח = העוזר המקצועי. iHelp הוא ערוץ lead-generation.  </a:t>
+            </a:r>
+            <a:r>
+              <a:rPr sz="1600" lang="he-IL">
                 <a:solidFill>
                   <a:srgbClr val="0F6B4F"/>
                 </a:solidFill>
                 <a:latin typeface="Arial"/>
               </a:rPr>
-              <a:t>•  </a:t>
-            </a:r>
-            <a:r>
-              <a:rPr sz="1800">
-                <a:solidFill>
-                  <a:srgbClr val="10231B"/>
-                </a:solidFill>
-                <a:latin typeface="Arial"/>
-              </a:rPr>
-              <a:t>הלקוח = העוזר המקצועי. iHelp הוא ערוץ lead-generation — מספק ביקוש מקומי מוכן-לקנייה.</a:t>
+              <a:t>●</a:t>
             </a:r>
           </a:p>
           <a:p>
@@ -5867,74 +5808,46 @@
                 <a:spcPts val="0"/>
               </a:spcBef>
               <a:spcAft>
-                <a:spcPts val="1200"/>
-              </a:spcAft>
-            </a:pPr>
-            <a:r>
-              <a:rPr sz="1800" b="1">
+                <a:spcPts val="1800"/>
+              </a:spcAft>
+            </a:pPr>
+            <a:r>
+              <a:rPr sz="2000" lang="he-IL">
+                <a:solidFill>
+                  <a:srgbClr val="0E1F18"/>
+                </a:solidFill>
+                <a:latin typeface="Arial"/>
+              </a:rPr>
+              <a:t>מבקשים חינמיים בכוונה — חיוב הביקוש היה הורג את הנזילות.  </a:t>
+            </a:r>
+            <a:r>
+              <a:rPr sz="1600" lang="he-IL">
                 <a:solidFill>
                   <a:srgbClr val="0F6B4F"/>
                 </a:solidFill>
                 <a:latin typeface="Arial"/>
               </a:rPr>
-              <a:t>•  </a:t>
-            </a:r>
-            <a:r>
-              <a:rPr sz="1800">
-                <a:solidFill>
-                  <a:srgbClr val="10231B"/>
-                </a:solidFill>
-                <a:latin typeface="Arial"/>
-              </a:rPr>
-              <a:t>מבקשים חינמיים בכוונה — חיוב הביקוש היה הורג את הנזילות שמעניקה ערך להיצע.</a:t>
-            </a:r>
-          </a:p>
-          <a:p>
-            <a:pPr algn="r" rtl="1">
-              <a:spcBef>
-                <a:spcPts val="0"/>
-              </a:spcBef>
-              <a:spcAft>
-                <a:spcPts val="1200"/>
-              </a:spcAft>
-            </a:pPr>
-            <a:r>
-              <a:rPr sz="1800" b="1">
-                <a:solidFill>
-                  <a:srgbClr val="0F6B4F"/>
-                </a:solidFill>
-                <a:latin typeface="Arial"/>
-              </a:rPr>
-              <a:t>•  </a:t>
-            </a:r>
-            <a:r>
-              <a:rPr sz="1800">
-                <a:solidFill>
-                  <a:srgbClr val="10231B"/>
-                </a:solidFill>
-                <a:latin typeface="Arial"/>
-              </a:rPr>
-              <a:t>אמון סימטרי — שני הצדדים עוברים אימות זהות בבדיקת מנהל לפני העסקה הראשונה.</a:t>
-            </a:r>
-          </a:p>
-        </p:txBody>
-      </p:sp>
-      <p:sp>
-        <p:nvSpPr>
-          <p:cNvPr id="8" name="Rectangle 7"/>
+              <a:t>●</a:t>
+            </a:r>
+          </a:p>
+        </p:txBody>
+      </p:sp>
+      <p:sp>
+        <p:nvSpPr>
+          <p:cNvPr id="8" name="Rounded Rectangle 7"/>
           <p:cNvSpPr/>
           <p:nvPr/>
         </p:nvSpPr>
         <p:spPr>
           <a:xfrm>
             <a:off x="640080" y="5623560"/>
-            <a:ext cx="10881360" cy="685800"/>
-          </a:xfrm>
-          <a:prstGeom prst="rect">
+            <a:ext cx="10881360" cy="731520"/>
+          </a:xfrm>
+          <a:prstGeom prst="roundRect">
             <a:avLst/>
           </a:prstGeom>
           <a:solidFill>
-            <a:srgbClr val="ECF3EF"/>
+            <a:srgbClr val="EAF2EE"/>
           </a:solidFill>
           <a:ln>
             <a:noFill/>
@@ -5971,8 +5884,8 @@
         </p:nvSpPr>
         <p:spPr>
           <a:xfrm>
-            <a:off x="868680" y="5705856"/>
-            <a:ext cx="10424160" cy="548640"/>
+            <a:off x="914400" y="5705856"/>
+            <a:ext cx="10332720" cy="566928"/>
           </a:xfrm>
           <a:prstGeom prst="rect">
             <a:avLst/>
@@ -5994,13 +5907,13 @@
               </a:spcAft>
             </a:pPr>
             <a:r>
-              <a:rPr sz="1400" b="1">
+              <a:rPr sz="1400" b="1" lang="he-IL">
                 <a:solidFill>
                   <a:srgbClr val="0F6B4F"/>
                 </a:solidFill>
                 <a:latin typeface="Arial"/>
               </a:rPr>
-              <a:t>הערך העסקי: מודל מונטיזציה עתידי מוכן — בלי להפעיל תשלומים עכשיו.</a:t>
+              <a:t>אמון סימטרי: שני הצדדים עוברים אימות זהות לפני העסקה הראשונה.</a:t>
             </a:r>
           </a:p>
         </p:txBody>
@@ -6019,7 +5932,7 @@
     <p:bg>
       <p:bgPr>
         <a:solidFill>
-          <a:srgbClr val="10231B"/>
+          <a:srgbClr val="0E1F18"/>
         </a:solidFill>
         <a:effectLst/>
       </p:bgPr>
@@ -6040,7 +5953,7 @@
         <p:spPr>
           <a:xfrm>
             <a:off x="0" y="0"/>
-            <a:ext cx="12191695" cy="118872"/>
+            <a:ext cx="12191695" cy="146304"/>
           </a:xfrm>
           <a:prstGeom prst="rect">
             <a:avLst/>
@@ -6083,8 +5996,8 @@
         </p:nvSpPr>
         <p:spPr>
           <a:xfrm>
-            <a:off x="457200" y="292608"/>
-            <a:ext cx="11247120" cy="365760"/>
+            <a:off x="548640" y="310896"/>
+            <a:ext cx="11064240" cy="365760"/>
           </a:xfrm>
           <a:prstGeom prst="rect">
             <a:avLst/>
@@ -6106,13 +6019,13 @@
               </a:spcAft>
             </a:pPr>
             <a:r>
-              <a:rPr sz="1200" b="1">
+              <a:rPr sz="1200" b="1" lang="he-IL">
                 <a:solidFill>
                   <a:srgbClr val="0F6B4F"/>
                 </a:solidFill>
                 <a:latin typeface="Arial"/>
               </a:rPr>
-              <a:t>§8 · התהליכים המרכזיים</a:t>
+              <a:t>§8 · הדגמה</a:t>
             </a:r>
           </a:p>
         </p:txBody>
@@ -6125,8 +6038,8 @@
         </p:nvSpPr>
         <p:spPr>
           <a:xfrm>
-            <a:off x="457200" y="6446520"/>
-            <a:ext cx="1828800" cy="320040"/>
+            <a:off x="548640" y="6419088"/>
+            <a:ext cx="3657600" cy="320040"/>
           </a:xfrm>
           <a:prstGeom prst="rect">
             <a:avLst/>
@@ -6139,7 +6052,7 @@
           </a:bodyPr>
           <a:lstStyle/>
           <a:p>
-            <a:pPr algn="l">
+            <a:pPr algn="l" rtl="0">
               <a:spcBef>
                 <a:spcPts val="0"/>
               </a:spcBef>
@@ -6150,11 +6063,11 @@
             <a:r>
               <a:rPr sz="1000" b="0">
                 <a:solidFill>
-                  <a:srgbClr val="53635B"/>
-                </a:solidFill>
-                <a:latin typeface="Arial"/>
-              </a:rPr>
-              <a:t>iHelp · 5 / 16</a:t>
+                  <a:srgbClr val="5C6B63"/>
+                </a:solidFill>
+                <a:latin typeface="Arial"/>
+              </a:rPr>
+              <a:t>iHelp · 5 / 12</a:t>
             </a:r>
           </a:p>
         </p:txBody>
@@ -6167,8 +6080,8 @@
         </p:nvSpPr>
         <p:spPr>
           <a:xfrm>
-            <a:off x="457200" y="566928"/>
-            <a:ext cx="11247120" cy="822960"/>
+            <a:off x="548640" y="603504"/>
+            <a:ext cx="11064240" cy="914400"/>
           </a:xfrm>
           <a:prstGeom prst="rect">
             <a:avLst/>
@@ -6190,13 +6103,13 @@
               </a:spcAft>
             </a:pPr>
             <a:r>
-              <a:rPr sz="3200" b="1">
+              <a:rPr sz="3400" b="1" lang="he-IL">
                 <a:solidFill>
                   <a:srgbClr val="FFFFFF"/>
                 </a:solidFill>
                 <a:latin typeface="Arial"/>
               </a:rPr>
-              <a:t>הדגמה חיה — לולאת הליבה המלאה</a:t>
+              <a:t>הדגמה חיה — לולאת הליבה</a:t>
             </a:r>
           </a:p>
         </p:txBody>
@@ -6209,14 +6122,14 @@
         </p:nvSpPr>
         <p:spPr>
           <a:xfrm>
-            <a:off x="10698480" y="1600200"/>
-            <a:ext cx="685800" cy="685800"/>
+            <a:off x="548640" y="1481328"/>
+            <a:ext cx="11064240" cy="31750"/>
           </a:xfrm>
           <a:prstGeom prst="rect">
             <a:avLst/>
           </a:prstGeom>
           <a:solidFill>
-            <a:srgbClr val="1A9D72"/>
+            <a:srgbClr val="1FA87A"/>
           </a:solidFill>
           <a:ln>
             <a:noFill/>
@@ -6247,146 +6160,20 @@
       </p:sp>
       <p:sp>
         <p:nvSpPr>
-          <p:cNvPr id="7" name="TextBox 6"/>
-          <p:cNvSpPr txBox="1"/>
-          <p:nvPr/>
-        </p:nvSpPr>
-        <p:spPr>
-          <a:xfrm>
-            <a:off x="10698480" y="1600200"/>
-            <a:ext cx="685800" cy="685800"/>
-          </a:xfrm>
-          <a:prstGeom prst="rect">
-            <a:avLst/>
-          </a:prstGeom>
-          <a:noFill/>
-        </p:spPr>
-        <p:txBody>
-          <a:bodyPr wrap="square" anchor="ctr" lIns="50800" rIns="50800" tIns="25400" bIns="25400">
-            <a:spAutoFit/>
-          </a:bodyPr>
-          <a:lstStyle/>
-          <a:p>
-            <a:pPr algn="ctr">
-              <a:spcBef>
-                <a:spcPts val="0"/>
-              </a:spcBef>
-              <a:spcAft>
-                <a:spcPts val="0"/>
-              </a:spcAft>
-            </a:pPr>
-            <a:r>
-              <a:rPr sz="2600" b="1">
-                <a:solidFill>
-                  <a:srgbClr val="FFFFFF"/>
-                </a:solidFill>
-                <a:latin typeface="Arial"/>
-              </a:rPr>
-              <a:t>1</a:t>
-            </a:r>
-          </a:p>
-        </p:txBody>
-      </p:sp>
-      <p:sp>
-        <p:nvSpPr>
-          <p:cNvPr id="8" name="TextBox 7"/>
-          <p:cNvSpPr txBox="1"/>
-          <p:nvPr/>
-        </p:nvSpPr>
-        <p:spPr>
-          <a:xfrm>
-            <a:off x="548640" y="1581912"/>
-            <a:ext cx="9966960" cy="411480"/>
-          </a:xfrm>
-          <a:prstGeom prst="rect">
-            <a:avLst/>
-          </a:prstGeom>
-          <a:noFill/>
-        </p:spPr>
-        <p:txBody>
-          <a:bodyPr wrap="square" anchor="t" lIns="50800" rIns="50800" tIns="25400" bIns="25400">
-            <a:spAutoFit/>
-          </a:bodyPr>
-          <a:lstStyle/>
-          <a:p>
-            <a:pPr algn="r" rtl="1">
-              <a:spcBef>
-                <a:spcPts val="0"/>
-              </a:spcBef>
-              <a:spcAft>
-                <a:spcPts val="0"/>
-              </a:spcAft>
-            </a:pPr>
-            <a:r>
-              <a:rPr sz="2000" b="1">
-                <a:solidFill>
-                  <a:srgbClr val="FFFFFF"/>
-                </a:solidFill>
-                <a:latin typeface="Arial"/>
-              </a:rPr>
-              <a:t>פרסום בקשה</a:t>
-            </a:r>
-          </a:p>
-        </p:txBody>
-      </p:sp>
-      <p:sp>
-        <p:nvSpPr>
-          <p:cNvPr id="9" name="TextBox 8"/>
-          <p:cNvSpPr txBox="1"/>
-          <p:nvPr/>
-        </p:nvSpPr>
-        <p:spPr>
-          <a:xfrm>
-            <a:off x="548640" y="1984248"/>
-            <a:ext cx="9966960" cy="365760"/>
-          </a:xfrm>
-          <a:prstGeom prst="rect">
-            <a:avLst/>
-          </a:prstGeom>
-          <a:noFill/>
-        </p:spPr>
-        <p:txBody>
-          <a:bodyPr wrap="square" anchor="t" lIns="50800" rIns="50800" tIns="25400" bIns="25400">
-            <a:spAutoFit/>
-          </a:bodyPr>
-          <a:lstStyle/>
-          <a:p>
-            <a:pPr algn="r" rtl="1">
-              <a:spcBef>
-                <a:spcPts val="0"/>
-              </a:spcBef>
-              <a:spcAft>
-                <a:spcPts val="0"/>
-              </a:spcAft>
-            </a:pPr>
-            <a:r>
-              <a:rPr sz="1400" b="0">
-                <a:solidFill>
-                  <a:srgbClr val="B9C7C0"/>
-                </a:solidFill>
-                <a:latin typeface="Arial"/>
-              </a:rPr>
-              <a:t>כותרת, תיאור, קטגוריה, תמונה, מיקום על המפה → סטטוס "פתוחה"</a:t>
-            </a:r>
-          </a:p>
-        </p:txBody>
-      </p:sp>
-      <p:sp>
-        <p:nvSpPr>
-          <p:cNvPr id="10" name="Rectangle 9"/>
+          <p:cNvPr id="7" name="Rounded Rectangle 6"/>
           <p:cNvSpPr/>
           <p:nvPr/>
         </p:nvSpPr>
         <p:spPr>
           <a:xfrm>
-            <a:off x="10698480" y="2532888"/>
-            <a:ext cx="685800" cy="685800"/>
-          </a:xfrm>
-          <a:prstGeom prst="rect">
+            <a:off x="10744200" y="1783080"/>
+            <a:ext cx="658368" cy="658368"/>
+          </a:xfrm>
+          <a:prstGeom prst="roundRect">
             <a:avLst/>
           </a:prstGeom>
           <a:solidFill>
-            <a:srgbClr val="1A9D72"/>
+            <a:srgbClr val="1FA87A"/>
           </a:solidFill>
           <a:ln>
             <a:noFill/>
@@ -6408,65 +6195,39 @@
           </a:fontRef>
         </p:style>
         <p:txBody>
-          <a:bodyPr rtlCol="0" anchor="ctr"/>
-          <a:lstStyle/>
-          <a:p>
-            <a:pPr algn="ctr"/>
-          </a:p>
-        </p:txBody>
-      </p:sp>
-      <p:sp>
-        <p:nvSpPr>
-          <p:cNvPr id="11" name="TextBox 10"/>
+          <a:bodyPr rtlCol="0" anchor="ctr" wrap="square" lIns="25400" rIns="25400" tIns="25400" bIns="25400"/>
+          <a:lstStyle/>
+          <a:p>
+            <a:pPr algn="ctr" rtl="0">
+              <a:spcBef>
+                <a:spcPts val="0"/>
+              </a:spcBef>
+              <a:spcAft>
+                <a:spcPts val="0"/>
+              </a:spcAft>
+            </a:pPr>
+            <a:r>
+              <a:rPr sz="2600" b="1">
+                <a:solidFill>
+                  <a:srgbClr val="FFFFFF"/>
+                </a:solidFill>
+                <a:latin typeface="Arial"/>
+              </a:rPr>
+              <a:t>1</a:t>
+            </a:r>
+          </a:p>
+        </p:txBody>
+      </p:sp>
+      <p:sp>
+        <p:nvSpPr>
+          <p:cNvPr id="8" name="TextBox 7"/>
           <p:cNvSpPr txBox="1"/>
           <p:nvPr/>
         </p:nvSpPr>
         <p:spPr>
           <a:xfrm>
-            <a:off x="10698480" y="2532888"/>
-            <a:ext cx="685800" cy="685800"/>
-          </a:xfrm>
-          <a:prstGeom prst="rect">
-            <a:avLst/>
-          </a:prstGeom>
-          <a:noFill/>
-        </p:spPr>
-        <p:txBody>
-          <a:bodyPr wrap="square" anchor="ctr" lIns="50800" rIns="50800" tIns="25400" bIns="25400">
-            <a:spAutoFit/>
-          </a:bodyPr>
-          <a:lstStyle/>
-          <a:p>
-            <a:pPr algn="ctr">
-              <a:spcBef>
-                <a:spcPts val="0"/>
-              </a:spcBef>
-              <a:spcAft>
-                <a:spcPts val="0"/>
-              </a:spcAft>
-            </a:pPr>
-            <a:r>
-              <a:rPr sz="2600" b="1">
-                <a:solidFill>
-                  <a:srgbClr val="FFFFFF"/>
-                </a:solidFill>
-                <a:latin typeface="Arial"/>
-              </a:rPr>
-              <a:t>2</a:t>
-            </a:r>
-          </a:p>
-        </p:txBody>
-      </p:sp>
-      <p:sp>
-        <p:nvSpPr>
-          <p:cNvPr id="12" name="TextBox 11"/>
-          <p:cNvSpPr txBox="1"/>
-          <p:nvPr/>
-        </p:nvSpPr>
-        <p:spPr>
-          <a:xfrm>
-            <a:off x="548640" y="2514600"/>
-            <a:ext cx="9966960" cy="411480"/>
+            <a:off x="640080" y="1746504"/>
+            <a:ext cx="9921240" cy="411480"/>
           </a:xfrm>
           <a:prstGeom prst="rect">
             <a:avLst/>
@@ -6488,27 +6249,27 @@
               </a:spcAft>
             </a:pPr>
             <a:r>
-              <a:rPr sz="2000" b="1">
+              <a:rPr sz="2000" b="1" lang="he-IL">
                 <a:solidFill>
                   <a:srgbClr val="FFFFFF"/>
                 </a:solidFill>
                 <a:latin typeface="Arial"/>
               </a:rPr>
-              <a:t>הגשת הצעה</a:t>
-            </a:r>
-          </a:p>
-        </p:txBody>
-      </p:sp>
-      <p:sp>
-        <p:nvSpPr>
-          <p:cNvPr id="13" name="TextBox 12"/>
+              <a:t>פרסום בקשה</a:t>
+            </a:r>
+          </a:p>
+        </p:txBody>
+      </p:sp>
+      <p:sp>
+        <p:nvSpPr>
+          <p:cNvPr id="9" name="TextBox 8"/>
           <p:cNvSpPr txBox="1"/>
           <p:nvPr/>
         </p:nvSpPr>
         <p:spPr>
           <a:xfrm>
-            <a:off x="548640" y="2916936"/>
-            <a:ext cx="9966960" cy="365760"/>
+            <a:off x="640080" y="2148840"/>
+            <a:ext cx="9921240" cy="365760"/>
           </a:xfrm>
           <a:prstGeom prst="rect">
             <a:avLst/>
@@ -6530,33 +6291,33 @@
               </a:spcAft>
             </a:pPr>
             <a:r>
-              <a:rPr sz="1400" b="0">
-                <a:solidFill>
-                  <a:srgbClr val="B9C7C0"/>
-                </a:solidFill>
-                <a:latin typeface="Arial"/>
-              </a:rPr>
-              <a:t>עוזר בוחר עמדת תמחור (קבוע ₪120) — הצעה אטומה, לא רואה מתחרים</a:t>
-            </a:r>
-          </a:p>
-        </p:txBody>
-      </p:sp>
-      <p:sp>
-        <p:nvSpPr>
-          <p:cNvPr id="14" name="Rectangle 13"/>
+              <a:rPr sz="1400" b="0" lang="he-IL">
+                <a:solidFill>
+                  <a:srgbClr val="D9E8E1"/>
+                </a:solidFill>
+                <a:latin typeface="Arial"/>
+              </a:rPr>
+              <a:t>כותרת, תיאור, תמונה, מיקום → סטטוס "פתוחה"</a:t>
+            </a:r>
+          </a:p>
+        </p:txBody>
+      </p:sp>
+      <p:sp>
+        <p:nvSpPr>
+          <p:cNvPr id="10" name="Rounded Rectangle 9"/>
           <p:cNvSpPr/>
           <p:nvPr/>
         </p:nvSpPr>
         <p:spPr>
           <a:xfrm>
-            <a:off x="10698480" y="3465576"/>
-            <a:ext cx="685800" cy="685800"/>
-          </a:xfrm>
-          <a:prstGeom prst="rect">
+            <a:off x="10744200" y="2679191"/>
+            <a:ext cx="658368" cy="658368"/>
+          </a:xfrm>
+          <a:prstGeom prst="roundRect">
             <a:avLst/>
           </a:prstGeom>
           <a:solidFill>
-            <a:srgbClr val="1A9D72"/>
+            <a:srgbClr val="1FA87A"/>
           </a:solidFill>
           <a:ln>
             <a:noFill/>
@@ -6578,65 +6339,39 @@
           </a:fontRef>
         </p:style>
         <p:txBody>
-          <a:bodyPr rtlCol="0" anchor="ctr"/>
-          <a:lstStyle/>
-          <a:p>
-            <a:pPr algn="ctr"/>
-          </a:p>
-        </p:txBody>
-      </p:sp>
-      <p:sp>
-        <p:nvSpPr>
-          <p:cNvPr id="15" name="TextBox 14"/>
+          <a:bodyPr rtlCol="0" anchor="ctr" wrap="square" lIns="25400" rIns="25400" tIns="25400" bIns="25400"/>
+          <a:lstStyle/>
+          <a:p>
+            <a:pPr algn="ctr" rtl="0">
+              <a:spcBef>
+                <a:spcPts val="0"/>
+              </a:spcBef>
+              <a:spcAft>
+                <a:spcPts val="0"/>
+              </a:spcAft>
+            </a:pPr>
+            <a:r>
+              <a:rPr sz="2600" b="1">
+                <a:solidFill>
+                  <a:srgbClr val="FFFFFF"/>
+                </a:solidFill>
+                <a:latin typeface="Arial"/>
+              </a:rPr>
+              <a:t>2</a:t>
+            </a:r>
+          </a:p>
+        </p:txBody>
+      </p:sp>
+      <p:sp>
+        <p:nvSpPr>
+          <p:cNvPr id="11" name="TextBox 10"/>
           <p:cNvSpPr txBox="1"/>
           <p:nvPr/>
         </p:nvSpPr>
         <p:spPr>
           <a:xfrm>
-            <a:off x="10698480" y="3465576"/>
-            <a:ext cx="685800" cy="685800"/>
-          </a:xfrm>
-          <a:prstGeom prst="rect">
-            <a:avLst/>
-          </a:prstGeom>
-          <a:noFill/>
-        </p:spPr>
-        <p:txBody>
-          <a:bodyPr wrap="square" anchor="ctr" lIns="50800" rIns="50800" tIns="25400" bIns="25400">
-            <a:spAutoFit/>
-          </a:bodyPr>
-          <a:lstStyle/>
-          <a:p>
-            <a:pPr algn="ctr">
-              <a:spcBef>
-                <a:spcPts val="0"/>
-              </a:spcBef>
-              <a:spcAft>
-                <a:spcPts val="0"/>
-              </a:spcAft>
-            </a:pPr>
-            <a:r>
-              <a:rPr sz="2600" b="1">
-                <a:solidFill>
-                  <a:srgbClr val="FFFFFF"/>
-                </a:solidFill>
-                <a:latin typeface="Arial"/>
-              </a:rPr>
-              <a:t>3</a:t>
-            </a:r>
-          </a:p>
-        </p:txBody>
-      </p:sp>
-      <p:sp>
-        <p:nvSpPr>
-          <p:cNvPr id="16" name="TextBox 15"/>
-          <p:cNvSpPr txBox="1"/>
-          <p:nvPr/>
-        </p:nvSpPr>
-        <p:spPr>
-          <a:xfrm>
-            <a:off x="548640" y="3447288"/>
-            <a:ext cx="9966960" cy="411480"/>
+            <a:off x="640080" y="2642615"/>
+            <a:ext cx="9921240" cy="411480"/>
           </a:xfrm>
           <a:prstGeom prst="rect">
             <a:avLst/>
@@ -6658,27 +6393,27 @@
               </a:spcAft>
             </a:pPr>
             <a:r>
-              <a:rPr sz="2000" b="1">
+              <a:rPr sz="2000" b="1" lang="he-IL">
                 <a:solidFill>
                   <a:srgbClr val="FFFFFF"/>
                 </a:solidFill>
                 <a:latin typeface="Arial"/>
               </a:rPr>
-              <a:t>השוואה + בחירה</a:t>
-            </a:r>
-          </a:p>
-        </p:txBody>
-      </p:sp>
-      <p:sp>
-        <p:nvSpPr>
-          <p:cNvPr id="17" name="TextBox 16"/>
+              <a:t>הגשת הצעה</a:t>
+            </a:r>
+          </a:p>
+        </p:txBody>
+      </p:sp>
+      <p:sp>
+        <p:nvSpPr>
+          <p:cNvPr id="12" name="TextBox 11"/>
           <p:cNvSpPr txBox="1"/>
           <p:nvPr/>
         </p:nvSpPr>
         <p:spPr>
           <a:xfrm>
-            <a:off x="548640" y="3849624"/>
-            <a:ext cx="9966960" cy="365760"/>
+            <a:off x="640080" y="3044951"/>
+            <a:ext cx="9921240" cy="365760"/>
           </a:xfrm>
           <a:prstGeom prst="rect">
             <a:avLst/>
@@ -6700,33 +6435,33 @@
               </a:spcAft>
             </a:pPr>
             <a:r>
-              <a:rPr sz="1400" b="0">
-                <a:solidFill>
-                  <a:srgbClr val="B9C7C0"/>
-                </a:solidFill>
-                <a:latin typeface="Arial"/>
-              </a:rPr>
-              <a:t>שולחן השוואה, מיון/סינון → בחירה אטומית: סוגרת את כל השאר בטרנזקציה אחת</a:t>
-            </a:r>
-          </a:p>
-        </p:txBody>
-      </p:sp>
-      <p:sp>
-        <p:nvSpPr>
-          <p:cNvPr id="18" name="Rectangle 17"/>
+              <a:rPr sz="1400" b="0" lang="he-IL">
+                <a:solidFill>
+                  <a:srgbClr val="D9E8E1"/>
+                </a:solidFill>
+                <a:latin typeface="Arial"/>
+              </a:rPr>
+              <a:t>עוזר בוחר עמדת תמחור — הצעה אטומה, לא רואה מתחרים</a:t>
+            </a:r>
+          </a:p>
+        </p:txBody>
+      </p:sp>
+      <p:sp>
+        <p:nvSpPr>
+          <p:cNvPr id="13" name="Rounded Rectangle 12"/>
           <p:cNvSpPr/>
           <p:nvPr/>
         </p:nvSpPr>
         <p:spPr>
           <a:xfrm>
-            <a:off x="10698480" y="4398264"/>
-            <a:ext cx="685800" cy="685800"/>
-          </a:xfrm>
-          <a:prstGeom prst="rect">
+            <a:off x="10744200" y="3575303"/>
+            <a:ext cx="658368" cy="658368"/>
+          </a:xfrm>
+          <a:prstGeom prst="roundRect">
             <a:avLst/>
           </a:prstGeom>
           <a:solidFill>
-            <a:srgbClr val="1A9D72"/>
+            <a:srgbClr val="1FA87A"/>
           </a:solidFill>
           <a:ln>
             <a:noFill/>
@@ -6748,65 +6483,39 @@
           </a:fontRef>
         </p:style>
         <p:txBody>
-          <a:bodyPr rtlCol="0" anchor="ctr"/>
-          <a:lstStyle/>
-          <a:p>
-            <a:pPr algn="ctr"/>
-          </a:p>
-        </p:txBody>
-      </p:sp>
-      <p:sp>
-        <p:nvSpPr>
-          <p:cNvPr id="19" name="TextBox 18"/>
+          <a:bodyPr rtlCol="0" anchor="ctr" wrap="square" lIns="25400" rIns="25400" tIns="25400" bIns="25400"/>
+          <a:lstStyle/>
+          <a:p>
+            <a:pPr algn="ctr" rtl="0">
+              <a:spcBef>
+                <a:spcPts val="0"/>
+              </a:spcBef>
+              <a:spcAft>
+                <a:spcPts val="0"/>
+              </a:spcAft>
+            </a:pPr>
+            <a:r>
+              <a:rPr sz="2600" b="1">
+                <a:solidFill>
+                  <a:srgbClr val="FFFFFF"/>
+                </a:solidFill>
+                <a:latin typeface="Arial"/>
+              </a:rPr>
+              <a:t>3</a:t>
+            </a:r>
+          </a:p>
+        </p:txBody>
+      </p:sp>
+      <p:sp>
+        <p:nvSpPr>
+          <p:cNvPr id="14" name="TextBox 13"/>
           <p:cNvSpPr txBox="1"/>
           <p:nvPr/>
         </p:nvSpPr>
         <p:spPr>
           <a:xfrm>
-            <a:off x="10698480" y="4398264"/>
-            <a:ext cx="685800" cy="685800"/>
-          </a:xfrm>
-          <a:prstGeom prst="rect">
-            <a:avLst/>
-          </a:prstGeom>
-          <a:noFill/>
-        </p:spPr>
-        <p:txBody>
-          <a:bodyPr wrap="square" anchor="ctr" lIns="50800" rIns="50800" tIns="25400" bIns="25400">
-            <a:spAutoFit/>
-          </a:bodyPr>
-          <a:lstStyle/>
-          <a:p>
-            <a:pPr algn="ctr">
-              <a:spcBef>
-                <a:spcPts val="0"/>
-              </a:spcBef>
-              <a:spcAft>
-                <a:spcPts val="0"/>
-              </a:spcAft>
-            </a:pPr>
-            <a:r>
-              <a:rPr sz="2600" b="1">
-                <a:solidFill>
-                  <a:srgbClr val="FFFFFF"/>
-                </a:solidFill>
-                <a:latin typeface="Arial"/>
-              </a:rPr>
-              <a:t>4</a:t>
-            </a:r>
-          </a:p>
-        </p:txBody>
-      </p:sp>
-      <p:sp>
-        <p:nvSpPr>
-          <p:cNvPr id="20" name="TextBox 19"/>
-          <p:cNvSpPr txBox="1"/>
-          <p:nvPr/>
-        </p:nvSpPr>
-        <p:spPr>
-          <a:xfrm>
-            <a:off x="548640" y="4379976"/>
-            <a:ext cx="9966960" cy="411480"/>
+            <a:off x="640080" y="3538727"/>
+            <a:ext cx="9921240" cy="411480"/>
           </a:xfrm>
           <a:prstGeom prst="rect">
             <a:avLst/>
@@ -6828,27 +6537,27 @@
               </a:spcAft>
             </a:pPr>
             <a:r>
-              <a:rPr sz="2000" b="1">
+              <a:rPr sz="2000" b="1" lang="he-IL">
                 <a:solidFill>
                   <a:srgbClr val="FFFFFF"/>
                 </a:solidFill>
                 <a:latin typeface="Arial"/>
               </a:rPr>
-              <a:t>סיום דו-צדדי</a:t>
-            </a:r>
-          </a:p>
-        </p:txBody>
-      </p:sp>
-      <p:sp>
-        <p:nvSpPr>
-          <p:cNvPr id="21" name="TextBox 20"/>
+              <a:t>השוואה + בחירה</a:t>
+            </a:r>
+          </a:p>
+        </p:txBody>
+      </p:sp>
+      <p:sp>
+        <p:nvSpPr>
+          <p:cNvPr id="15" name="TextBox 14"/>
           <p:cNvSpPr txBox="1"/>
           <p:nvPr/>
         </p:nvSpPr>
         <p:spPr>
           <a:xfrm>
-            <a:off x="548640" y="4782312"/>
-            <a:ext cx="9966960" cy="365760"/>
+            <a:off x="640080" y="3941063"/>
+            <a:ext cx="9921240" cy="365760"/>
           </a:xfrm>
           <a:prstGeom prst="rect">
             <a:avLst/>
@@ -6870,33 +6579,33 @@
               </a:spcAft>
             </a:pPr>
             <a:r>
-              <a:rPr sz="1400" b="0">
-                <a:solidFill>
-                  <a:srgbClr val="B9C7C0"/>
-                </a:solidFill>
-                <a:latin typeface="Arial"/>
-              </a:rPr>
-              <a:t>שני הצדדים מאשרים → רק אז "הושלמה". מנגנון ההוגנות</a:t>
-            </a:r>
-          </a:p>
-        </p:txBody>
-      </p:sp>
-      <p:sp>
-        <p:nvSpPr>
-          <p:cNvPr id="22" name="Rectangle 21"/>
+              <a:rPr sz="1400" b="0" lang="he-IL">
+                <a:solidFill>
+                  <a:srgbClr val="D9E8E1"/>
+                </a:solidFill>
+                <a:latin typeface="Arial"/>
+              </a:rPr>
+              <a:t>בחירה אטומית: סוגרת את כל השאר בטרנזקציה אחת</a:t>
+            </a:r>
+          </a:p>
+        </p:txBody>
+      </p:sp>
+      <p:sp>
+        <p:nvSpPr>
+          <p:cNvPr id="16" name="Rounded Rectangle 15"/>
           <p:cNvSpPr/>
           <p:nvPr/>
         </p:nvSpPr>
         <p:spPr>
           <a:xfrm>
-            <a:off x="10698480" y="5330952"/>
-            <a:ext cx="685800" cy="685800"/>
-          </a:xfrm>
-          <a:prstGeom prst="rect">
+            <a:off x="10744200" y="4471416"/>
+            <a:ext cx="658368" cy="658368"/>
+          </a:xfrm>
+          <a:prstGeom prst="roundRect">
             <a:avLst/>
           </a:prstGeom>
           <a:solidFill>
-            <a:srgbClr val="1A9D72"/>
+            <a:srgbClr val="1FA87A"/>
           </a:solidFill>
           <a:ln>
             <a:noFill/>
@@ -6918,65 +6627,39 @@
           </a:fontRef>
         </p:style>
         <p:txBody>
-          <a:bodyPr rtlCol="0" anchor="ctr"/>
-          <a:lstStyle/>
-          <a:p>
-            <a:pPr algn="ctr"/>
-          </a:p>
-        </p:txBody>
-      </p:sp>
-      <p:sp>
-        <p:nvSpPr>
-          <p:cNvPr id="23" name="TextBox 22"/>
+          <a:bodyPr rtlCol="0" anchor="ctr" wrap="square" lIns="25400" rIns="25400" tIns="25400" bIns="25400"/>
+          <a:lstStyle/>
+          <a:p>
+            <a:pPr algn="ctr" rtl="0">
+              <a:spcBef>
+                <a:spcPts val="0"/>
+              </a:spcBef>
+              <a:spcAft>
+                <a:spcPts val="0"/>
+              </a:spcAft>
+            </a:pPr>
+            <a:r>
+              <a:rPr sz="2600" b="1">
+                <a:solidFill>
+                  <a:srgbClr val="FFFFFF"/>
+                </a:solidFill>
+                <a:latin typeface="Arial"/>
+              </a:rPr>
+              <a:t>4</a:t>
+            </a:r>
+          </a:p>
+        </p:txBody>
+      </p:sp>
+      <p:sp>
+        <p:nvSpPr>
+          <p:cNvPr id="17" name="TextBox 16"/>
           <p:cNvSpPr txBox="1"/>
           <p:nvPr/>
         </p:nvSpPr>
         <p:spPr>
           <a:xfrm>
-            <a:off x="10698480" y="5330952"/>
-            <a:ext cx="685800" cy="685800"/>
-          </a:xfrm>
-          <a:prstGeom prst="rect">
-            <a:avLst/>
-          </a:prstGeom>
-          <a:noFill/>
-        </p:spPr>
-        <p:txBody>
-          <a:bodyPr wrap="square" anchor="ctr" lIns="50800" rIns="50800" tIns="25400" bIns="25400">
-            <a:spAutoFit/>
-          </a:bodyPr>
-          <a:lstStyle/>
-          <a:p>
-            <a:pPr algn="ctr">
-              <a:spcBef>
-                <a:spcPts val="0"/>
-              </a:spcBef>
-              <a:spcAft>
-                <a:spcPts val="0"/>
-              </a:spcAft>
-            </a:pPr>
-            <a:r>
-              <a:rPr sz="2600" b="1">
-                <a:solidFill>
-                  <a:srgbClr val="FFFFFF"/>
-                </a:solidFill>
-                <a:latin typeface="Arial"/>
-              </a:rPr>
-              <a:t>5</a:t>
-            </a:r>
-          </a:p>
-        </p:txBody>
-      </p:sp>
-      <p:sp>
-        <p:nvSpPr>
-          <p:cNvPr id="24" name="TextBox 23"/>
-          <p:cNvSpPr txBox="1"/>
-          <p:nvPr/>
-        </p:nvSpPr>
-        <p:spPr>
-          <a:xfrm>
-            <a:off x="548640" y="5312664"/>
-            <a:ext cx="9966960" cy="411480"/>
+            <a:off x="640080" y="4434840"/>
+            <a:ext cx="9921240" cy="411480"/>
           </a:xfrm>
           <a:prstGeom prst="rect">
             <a:avLst/>
@@ -6998,27 +6681,27 @@
               </a:spcAft>
             </a:pPr>
             <a:r>
-              <a:rPr sz="2000" b="1">
+              <a:rPr sz="2000" b="1" lang="he-IL">
                 <a:solidFill>
                   <a:srgbClr val="FFFFFF"/>
                 </a:solidFill>
                 <a:latin typeface="Arial"/>
               </a:rPr>
-              <a:t>דירוג</a:t>
-            </a:r>
-          </a:p>
-        </p:txBody>
-      </p:sp>
-      <p:sp>
-        <p:nvSpPr>
-          <p:cNvPr id="25" name="TextBox 24"/>
+              <a:t>סיום דו-צדדי</a:t>
+            </a:r>
+          </a:p>
+        </p:txBody>
+      </p:sp>
+      <p:sp>
+        <p:nvSpPr>
+          <p:cNvPr id="18" name="TextBox 17"/>
           <p:cNvSpPr txBox="1"/>
           <p:nvPr/>
         </p:nvSpPr>
         <p:spPr>
           <a:xfrm>
-            <a:off x="548640" y="5715000"/>
-            <a:ext cx="9966960" cy="365760"/>
+            <a:off x="640080" y="4837176"/>
+            <a:ext cx="9921240" cy="365760"/>
           </a:xfrm>
           <a:prstGeom prst="rect">
             <a:avLst/>
@@ -7040,13 +6723,157 @@
               </a:spcAft>
             </a:pPr>
             <a:r>
-              <a:rPr sz="1400" b="0">
-                <a:solidFill>
-                  <a:srgbClr val="B9C7C0"/>
-                </a:solidFill>
-                <a:latin typeface="Arial"/>
-              </a:rPr>
-              <a:t>המבקש מדרג 1–5 → עמוד מוניטין מתעדכן, בלי לחשוף מי דירג</a:t>
+              <a:rPr sz="1400" b="0" lang="he-IL">
+                <a:solidFill>
+                  <a:srgbClr val="D9E8E1"/>
+                </a:solidFill>
+                <a:latin typeface="Arial"/>
+              </a:rPr>
+              <a:t>שני הצדדים מאשרים → רק אז "הושלמה"</a:t>
+            </a:r>
+          </a:p>
+        </p:txBody>
+      </p:sp>
+      <p:sp>
+        <p:nvSpPr>
+          <p:cNvPr id="19" name="Rounded Rectangle 18"/>
+          <p:cNvSpPr/>
+          <p:nvPr/>
+        </p:nvSpPr>
+        <p:spPr>
+          <a:xfrm>
+            <a:off x="10744200" y="5367527"/>
+            <a:ext cx="658368" cy="658368"/>
+          </a:xfrm>
+          <a:prstGeom prst="roundRect">
+            <a:avLst/>
+          </a:prstGeom>
+          <a:solidFill>
+            <a:srgbClr val="1FA87A"/>
+          </a:solidFill>
+          <a:ln>
+            <a:noFill/>
+          </a:ln>
+          <a:effectLst/>
+        </p:spPr>
+        <p:style>
+          <a:lnRef idx="1">
+            <a:schemeClr val="accent1"/>
+          </a:lnRef>
+          <a:fillRef idx="3">
+            <a:schemeClr val="accent1"/>
+          </a:fillRef>
+          <a:effectRef idx="2">
+            <a:schemeClr val="accent1"/>
+          </a:effectRef>
+          <a:fontRef idx="minor">
+            <a:schemeClr val="lt1"/>
+          </a:fontRef>
+        </p:style>
+        <p:txBody>
+          <a:bodyPr rtlCol="0" anchor="ctr" wrap="square" lIns="25400" rIns="25400" tIns="25400" bIns="25400"/>
+          <a:lstStyle/>
+          <a:p>
+            <a:pPr algn="ctr" rtl="0">
+              <a:spcBef>
+                <a:spcPts val="0"/>
+              </a:spcBef>
+              <a:spcAft>
+                <a:spcPts val="0"/>
+              </a:spcAft>
+            </a:pPr>
+            <a:r>
+              <a:rPr sz="2600" b="1">
+                <a:solidFill>
+                  <a:srgbClr val="FFFFFF"/>
+                </a:solidFill>
+                <a:latin typeface="Arial"/>
+              </a:rPr>
+              <a:t>5</a:t>
+            </a:r>
+          </a:p>
+        </p:txBody>
+      </p:sp>
+      <p:sp>
+        <p:nvSpPr>
+          <p:cNvPr id="20" name="TextBox 19"/>
+          <p:cNvSpPr txBox="1"/>
+          <p:nvPr/>
+        </p:nvSpPr>
+        <p:spPr>
+          <a:xfrm>
+            <a:off x="640080" y="5330951"/>
+            <a:ext cx="9921240" cy="411480"/>
+          </a:xfrm>
+          <a:prstGeom prst="rect">
+            <a:avLst/>
+          </a:prstGeom>
+          <a:noFill/>
+        </p:spPr>
+        <p:txBody>
+          <a:bodyPr wrap="square" anchor="t" lIns="50800" rIns="50800" tIns="25400" bIns="25400">
+            <a:spAutoFit/>
+          </a:bodyPr>
+          <a:lstStyle/>
+          <a:p>
+            <a:pPr algn="r" rtl="1">
+              <a:spcBef>
+                <a:spcPts val="0"/>
+              </a:spcBef>
+              <a:spcAft>
+                <a:spcPts val="0"/>
+              </a:spcAft>
+            </a:pPr>
+            <a:r>
+              <a:rPr sz="2000" b="1" lang="he-IL">
+                <a:solidFill>
+                  <a:srgbClr val="FFFFFF"/>
+                </a:solidFill>
+                <a:latin typeface="Arial"/>
+              </a:rPr>
+              <a:t>דירוג</a:t>
+            </a:r>
+          </a:p>
+        </p:txBody>
+      </p:sp>
+      <p:sp>
+        <p:nvSpPr>
+          <p:cNvPr id="21" name="TextBox 20"/>
+          <p:cNvSpPr txBox="1"/>
+          <p:nvPr/>
+        </p:nvSpPr>
+        <p:spPr>
+          <a:xfrm>
+            <a:off x="640080" y="5733288"/>
+            <a:ext cx="9921240" cy="365760"/>
+          </a:xfrm>
+          <a:prstGeom prst="rect">
+            <a:avLst/>
+          </a:prstGeom>
+          <a:noFill/>
+        </p:spPr>
+        <p:txBody>
+          <a:bodyPr wrap="square" anchor="t" lIns="50800" rIns="50800" tIns="25400" bIns="25400">
+            <a:spAutoFit/>
+          </a:bodyPr>
+          <a:lstStyle/>
+          <a:p>
+            <a:pPr algn="r" rtl="1">
+              <a:spcBef>
+                <a:spcPts val="0"/>
+              </a:spcBef>
+              <a:spcAft>
+                <a:spcPts val="0"/>
+              </a:spcAft>
+            </a:pPr>
+            <a:r>
+              <a:rPr sz="1400" b="0" lang="he-IL">
+                <a:solidFill>
+                  <a:srgbClr val="D9E8E1"/>
+                </a:solidFill>
+                <a:latin typeface="Arial"/>
+              </a:rPr>
+              <a:t>המבקש מדרג → עמוד מוניטין מתעדכן</a:t>
             </a:r>
           </a:p>
         </p:txBody>
@@ -7065,7 +6892,7 @@
     <p:bg>
       <p:bgPr>
         <a:solidFill>
-          <a:srgbClr val="F6F5EF"/>
+          <a:srgbClr val="F7F6F1"/>
         </a:solidFill>
         <a:effectLst/>
       </p:bgPr>
@@ -7086,7 +6913,7 @@
         <p:spPr>
           <a:xfrm>
             <a:off x="0" y="0"/>
-            <a:ext cx="12191695" cy="118872"/>
+            <a:ext cx="12191695" cy="146304"/>
           </a:xfrm>
           <a:prstGeom prst="rect">
             <a:avLst/>
@@ -7129,8 +6956,8 @@
         </p:nvSpPr>
         <p:spPr>
           <a:xfrm>
-            <a:off x="457200" y="292608"/>
-            <a:ext cx="11247120" cy="365760"/>
+            <a:off x="548640" y="310896"/>
+            <a:ext cx="11064240" cy="365760"/>
           </a:xfrm>
           <a:prstGeom prst="rect">
             <a:avLst/>
@@ -7152,13 +6979,13 @@
               </a:spcAft>
             </a:pPr>
             <a:r>
-              <a:rPr sz="1200" b="1">
+              <a:rPr sz="1200" b="1" lang="he-IL">
                 <a:solidFill>
                   <a:srgbClr val="0F6B4F"/>
                 </a:solidFill>
                 <a:latin typeface="Arial"/>
               </a:rPr>
-              <a:t>§5–6 · איך המערכת בנויה</a:t>
+              <a:t>§5–6 · ארכיטקטורה</a:t>
             </a:r>
           </a:p>
         </p:txBody>
@@ -7171,8 +6998,8 @@
         </p:nvSpPr>
         <p:spPr>
           <a:xfrm>
-            <a:off x="457200" y="6446520"/>
-            <a:ext cx="1828800" cy="320040"/>
+            <a:off x="548640" y="6419088"/>
+            <a:ext cx="3657600" cy="320040"/>
           </a:xfrm>
           <a:prstGeom prst="rect">
             <a:avLst/>
@@ -7185,7 +7012,7 @@
           </a:bodyPr>
           <a:lstStyle/>
           <a:p>
-            <a:pPr algn="l">
+            <a:pPr algn="l" rtl="0">
               <a:spcBef>
                 <a:spcPts val="0"/>
               </a:spcBef>
@@ -7196,11 +7023,11 @@
             <a:r>
               <a:rPr sz="1000" b="0">
                 <a:solidFill>
-                  <a:srgbClr val="53635B"/>
-                </a:solidFill>
-                <a:latin typeface="Arial"/>
-              </a:rPr>
-              <a:t>iHelp · 6 / 16</a:t>
+                  <a:srgbClr val="5C6B63"/>
+                </a:solidFill>
+                <a:latin typeface="Arial"/>
+              </a:rPr>
+              <a:t>iHelp · 6 / 12</a:t>
             </a:r>
           </a:p>
         </p:txBody>
@@ -7213,8 +7040,8 @@
         </p:nvSpPr>
         <p:spPr>
           <a:xfrm>
-            <a:off x="457200" y="566928"/>
-            <a:ext cx="11247120" cy="822960"/>
+            <a:off x="548640" y="603504"/>
+            <a:ext cx="11064240" cy="914400"/>
           </a:xfrm>
           <a:prstGeom prst="rect">
             <a:avLst/>
@@ -7236,13 +7063,13 @@
               </a:spcAft>
             </a:pPr>
             <a:r>
-              <a:rPr sz="3200" b="1">
-                <a:solidFill>
-                  <a:srgbClr val="10231B"/>
-                </a:solidFill>
-                <a:latin typeface="Arial"/>
-              </a:rPr>
-              <a:t>ארכיטקטורה: המסד הוא הסמכות היחידה</a:t>
+              <a:rPr sz="3400" b="1" lang="he-IL">
+                <a:solidFill>
+                  <a:srgbClr val="0E1F18"/>
+                </a:solidFill>
+                <a:latin typeface="Arial"/>
+              </a:rPr>
+              <a:t>ארכיטקטורה: המסד הוא הסמכות</a:t>
             </a:r>
           </a:p>
         </p:txBody>
@@ -7255,14 +7082,14 @@
         </p:nvSpPr>
         <p:spPr>
           <a:xfrm>
-            <a:off x="457200" y="1371600"/>
-            <a:ext cx="11247120" cy="25400"/>
+            <a:off x="548640" y="1481328"/>
+            <a:ext cx="11064240" cy="31750"/>
           </a:xfrm>
           <a:prstGeom prst="rect">
             <a:avLst/>
           </a:prstGeom>
           <a:solidFill>
-            <a:srgbClr val="DFE0D6"/>
+            <a:srgbClr val="1FA87A"/>
           </a:solidFill>
           <a:ln>
             <a:noFill/>
@@ -7299,8 +7126,8 @@
         </p:nvSpPr>
         <p:spPr>
           <a:xfrm>
-            <a:off x="640080" y="1600200"/>
-            <a:ext cx="10881360" cy="4206240"/>
+            <a:off x="640080" y="1783080"/>
+            <a:ext cx="10881360" cy="3931920"/>
           </a:xfrm>
           <a:prstGeom prst="rect">
             <a:avLst/>
@@ -7308,7 +7135,7 @@
           <a:noFill/>
         </p:spPr>
         <p:txBody>
-          <a:bodyPr wrap="square">
+          <a:bodyPr wrap="square" lIns="50800" rIns="50800">
             <a:spAutoFit/>
           </a:bodyPr>
           <a:lstStyle/>
@@ -7318,26 +7145,26 @@
                 <a:spcPts val="0"/>
               </a:spcBef>
               <a:spcAft>
-                <a:spcPts val="1100"/>
-              </a:spcAft>
-            </a:pPr>
-            <a:r>
-              <a:rPr sz="1700" b="1">
+                <a:spcPts val="1600"/>
+              </a:spcAft>
+            </a:pPr>
+            <a:r>
+              <a:rPr sz="1800" lang="he-IL">
+                <a:solidFill>
+                  <a:srgbClr val="0E1F18"/>
+                </a:solidFill>
+                <a:latin typeface="Arial"/>
+              </a:rPr>
+              <a:t>שלוש שכבות: React · Next.js על Vercel · Supabase (Postgres + RLS, Auth, Storage).  </a:t>
+            </a:r>
+            <a:r>
+              <a:rPr sz="1400" lang="he-IL">
                 <a:solidFill>
                   <a:srgbClr val="0F6B4F"/>
                 </a:solidFill>
                 <a:latin typeface="Arial"/>
               </a:rPr>
-              <a:t>•  </a:t>
-            </a:r>
-            <a:r>
-              <a:rPr sz="1700">
-                <a:solidFill>
-                  <a:srgbClr val="10231B"/>
-                </a:solidFill>
-                <a:latin typeface="Arial"/>
-              </a:rPr>
-              <a:t>שלוש שכבות, מעט חלקים נעים: React בדפדפן · Next.js (App Router) על Vercel · Supabase (Postgres + RLS, Auth, Storage).</a:t>
+              <a:t>●</a:t>
             </a:r>
           </a:p>
           <a:p>
@@ -7346,26 +7173,26 @@
                 <a:spcPts val="0"/>
               </a:spcBef>
               <a:spcAft>
-                <a:spcPts val="1100"/>
-              </a:spcAft>
-            </a:pPr>
-            <a:r>
-              <a:rPr sz="1700" b="1">
+                <a:spcPts val="1600"/>
+              </a:spcAft>
+            </a:pPr>
+            <a:r>
+              <a:rPr sz="1800" lang="he-IL">
+                <a:solidFill>
+                  <a:srgbClr val="0E1F18"/>
+                </a:solidFill>
+                <a:latin typeface="Arial"/>
+              </a:rPr>
+              <a:t>קריאות = Server Components · כתיבות = Server Actions · אין שרת API נפרד.  </a:t>
+            </a:r>
+            <a:r>
+              <a:rPr sz="1400" lang="he-IL">
                 <a:solidFill>
                   <a:srgbClr val="0F6B4F"/>
                 </a:solidFill>
                 <a:latin typeface="Arial"/>
               </a:rPr>
-              <a:t>•  </a:t>
-            </a:r>
-            <a:r>
-              <a:rPr sz="1700">
-                <a:solidFill>
-                  <a:srgbClr val="10231B"/>
-                </a:solidFill>
-                <a:latin typeface="Arial"/>
-              </a:rPr>
-              <a:t>קריאות = Server Components · כתיבות = Server Actions · אין שרת API נפרד.</a:t>
+              <a:t>●</a:t>
             </a:r>
           </a:p>
           <a:p>
@@ -7374,26 +7201,26 @@
                 <a:spcPts val="0"/>
               </a:spcBef>
               <a:spcAft>
-                <a:spcPts val="1100"/>
-              </a:spcAft>
-            </a:pPr>
-            <a:r>
-              <a:rPr sz="1700" b="1">
+                <a:spcPts val="1600"/>
+              </a:spcAft>
+            </a:pPr>
+            <a:r>
+              <a:rPr sz="1800" lang="he-IL">
+                <a:solidFill>
+                  <a:srgbClr val="0E1F18"/>
+                </a:solidFill>
+                <a:latin typeface="Arial"/>
+              </a:rPr>
+              <a:t>כל הרשאה נאכפת ב-Postgres: RLS + 11 פונקציות SECURITY DEFINER + טריגרים.  </a:t>
+            </a:r>
+            <a:r>
+              <a:rPr sz="1400" lang="he-IL">
                 <a:solidFill>
                   <a:srgbClr val="0F6B4F"/>
                 </a:solidFill>
                 <a:latin typeface="Arial"/>
               </a:rPr>
-              <a:t>•  </a:t>
-            </a:r>
-            <a:r>
-              <a:rPr sz="1700">
-                <a:solidFill>
-                  <a:srgbClr val="10231B"/>
-                </a:solidFill>
-                <a:latin typeface="Arial"/>
-              </a:rPr>
-              <a:t>התזה: כל הרשאה נאכפת ב-Postgres — RLS + 11 פונקציות SECURITY DEFINER + טריגרים.</a:t>
+              <a:t>●</a:t>
             </a:r>
           </a:p>
           <a:p>
@@ -7402,74 +7229,46 @@
                 <a:spcPts val="0"/>
               </a:spcBef>
               <a:spcAft>
-                <a:spcPts val="1100"/>
-              </a:spcAft>
-            </a:pPr>
-            <a:r>
-              <a:rPr sz="1700" b="1">
+                <a:spcPts val="1600"/>
+              </a:spcAft>
+            </a:pPr>
+            <a:r>
+              <a:rPr sz="1800" lang="he-IL">
+                <a:solidFill>
+                  <a:srgbClr val="0E1F18"/>
+                </a:solidFill>
+                <a:latin typeface="Arial"/>
+              </a:rPr>
+              <a:t>האפליקציה לעולם לא משתמשת במפתח service-role.  </a:t>
+            </a:r>
+            <a:r>
+              <a:rPr sz="1400" lang="he-IL">
                 <a:solidFill>
                   <a:srgbClr val="0F6B4F"/>
                 </a:solidFill>
                 <a:latin typeface="Arial"/>
               </a:rPr>
-              <a:t>•  </a:t>
-            </a:r>
-            <a:r>
-              <a:rPr sz="1700">
-                <a:solidFill>
-                  <a:srgbClr val="10231B"/>
-                </a:solidFill>
-                <a:latin typeface="Arial"/>
-              </a:rPr>
-              <a:t>הממשק והקוד חוזרים על הבדיקות רק להודעה ידידותית — בקשה מזויפת עדיין נבלמת במסד.</a:t>
-            </a:r>
-          </a:p>
-          <a:p>
-            <a:pPr algn="r" rtl="1">
-              <a:spcBef>
-                <a:spcPts val="0"/>
-              </a:spcBef>
-              <a:spcAft>
-                <a:spcPts val="1100"/>
-              </a:spcAft>
-            </a:pPr>
-            <a:r>
-              <a:rPr sz="1700" b="1">
-                <a:solidFill>
-                  <a:srgbClr val="0F6B4F"/>
-                </a:solidFill>
-                <a:latin typeface="Arial"/>
-              </a:rPr>
-              <a:t>•  </a:t>
-            </a:r>
-            <a:r>
-              <a:rPr sz="1700">
-                <a:solidFill>
-                  <a:srgbClr val="10231B"/>
-                </a:solidFill>
-                <a:latin typeface="Arial"/>
-              </a:rPr>
-              <a:t>לכן האפליקציה לעולם לא משתמשת במפתח service-role.</a:t>
-            </a:r>
-          </a:p>
-        </p:txBody>
-      </p:sp>
-      <p:sp>
-        <p:nvSpPr>
-          <p:cNvPr id="8" name="Rectangle 7"/>
+              <a:t>●</a:t>
+            </a:r>
+          </a:p>
+        </p:txBody>
+      </p:sp>
+      <p:sp>
+        <p:nvSpPr>
+          <p:cNvPr id="8" name="Rounded Rectangle 7"/>
           <p:cNvSpPr/>
           <p:nvPr/>
         </p:nvSpPr>
         <p:spPr>
           <a:xfrm>
             <a:off x="640080" y="5623560"/>
-            <a:ext cx="10881360" cy="685800"/>
-          </a:xfrm>
-          <a:prstGeom prst="rect">
+            <a:ext cx="10881360" cy="731520"/>
+          </a:xfrm>
+          <a:prstGeom prst="roundRect">
             <a:avLst/>
           </a:prstGeom>
           <a:solidFill>
-            <a:srgbClr val="ECF3EF"/>
+            <a:srgbClr val="EAF2EE"/>
           </a:solidFill>
           <a:ln>
             <a:noFill/>
@@ -7506,8 +7305,8 @@
         </p:nvSpPr>
         <p:spPr>
           <a:xfrm>
-            <a:off x="868680" y="5705856"/>
-            <a:ext cx="10424160" cy="548640"/>
+            <a:off x="914400" y="5705856"/>
+            <a:ext cx="10332720" cy="566928"/>
           </a:xfrm>
           <a:prstGeom prst="rect">
             <a:avLst/>
@@ -7529,13 +7328,13 @@
               </a:spcAft>
             </a:pPr>
             <a:r>
-              <a:rPr sz="1400" b="1">
+              <a:rPr sz="1400" b="1" lang="he-IL">
                 <a:solidFill>
                   <a:srgbClr val="0F6B4F"/>
                 </a:solidFill>
                 <a:latin typeface="Arial"/>
               </a:rPr>
-              <a:t>ההחלטה שאני גאה בה: פיצול profiles/profiles_private — RLS היא ברמת שורה, לא עמודה.</a:t>
+              <a:t>ההחלטה המרכזית: פיצול profiles/profiles_private — RLS היא ברמת שורה.</a:t>
             </a:r>
           </a:p>
         </p:txBody>
@@ -7554,7 +7353,7 @@
     <p:bg>
       <p:bgPr>
         <a:solidFill>
-          <a:srgbClr val="F6F5EF"/>
+          <a:srgbClr val="F7F6F1"/>
         </a:solidFill>
         <a:effectLst/>
       </p:bgPr>
@@ -7575,7 +7374,7 @@
         <p:spPr>
           <a:xfrm>
             <a:off x="0" y="0"/>
-            <a:ext cx="12191695" cy="118872"/>
+            <a:ext cx="12191695" cy="146304"/>
           </a:xfrm>
           <a:prstGeom prst="rect">
             <a:avLst/>
@@ -7618,8 +7417,8 @@
         </p:nvSpPr>
         <p:spPr>
           <a:xfrm>
-            <a:off x="457200" y="292608"/>
-            <a:ext cx="11247120" cy="365760"/>
+            <a:off x="548640" y="310896"/>
+            <a:ext cx="11064240" cy="365760"/>
           </a:xfrm>
           <a:prstGeom prst="rect">
             <a:avLst/>
@@ -7641,13 +7440,13 @@
               </a:spcAft>
             </a:pPr>
             <a:r>
-              <a:rPr sz="1200" b="1">
+              <a:rPr sz="1200" b="1" lang="he-IL">
                 <a:solidFill>
                   <a:srgbClr val="0F6B4F"/>
                 </a:solidFill>
                 <a:latin typeface="Arial"/>
               </a:rPr>
-              <a:t>§7 · בסיס הנתונים</a:t>
+              <a:t>§7 · מסד הנתונים</a:t>
             </a:r>
           </a:p>
         </p:txBody>
@@ -7660,8 +7459,8 @@
         </p:nvSpPr>
         <p:spPr>
           <a:xfrm>
-            <a:off x="457200" y="6446520"/>
-            <a:ext cx="1828800" cy="320040"/>
+            <a:off x="548640" y="6419088"/>
+            <a:ext cx="3657600" cy="320040"/>
           </a:xfrm>
           <a:prstGeom prst="rect">
             <a:avLst/>
@@ -7674,7 +7473,7 @@
           </a:bodyPr>
           <a:lstStyle/>
           <a:p>
-            <a:pPr algn="l">
+            <a:pPr algn="l" rtl="0">
               <a:spcBef>
                 <a:spcPts val="0"/>
               </a:spcBef>
@@ -7685,11 +7484,11 @@
             <a:r>
               <a:rPr sz="1000" b="0">
                 <a:solidFill>
-                  <a:srgbClr val="53635B"/>
-                </a:solidFill>
-                <a:latin typeface="Arial"/>
-              </a:rPr>
-              <a:t>iHelp · 7 / 16</a:t>
+                  <a:srgbClr val="5C6B63"/>
+                </a:solidFill>
+                <a:latin typeface="Arial"/>
+              </a:rPr>
+              <a:t>iHelp · 7 / 12</a:t>
             </a:r>
           </a:p>
         </p:txBody>
@@ -7702,8 +7501,8 @@
         </p:nvSpPr>
         <p:spPr>
           <a:xfrm>
-            <a:off x="457200" y="566928"/>
-            <a:ext cx="11247120" cy="822960"/>
+            <a:off x="548640" y="603504"/>
+            <a:ext cx="11064240" cy="914400"/>
           </a:xfrm>
           <a:prstGeom prst="rect">
             <a:avLst/>
@@ -7725,9 +7524,9 @@
               </a:spcAft>
             </a:pPr>
             <a:r>
-              <a:rPr sz="3200" b="1">
-                <a:solidFill>
-                  <a:srgbClr val="10231B"/>
+              <a:rPr sz="3400" b="1" lang="he-IL">
+                <a:solidFill>
+                  <a:srgbClr val="0E1F18"/>
                 </a:solidFill>
                 <a:latin typeface="Arial"/>
               </a:rPr>
@@ -7744,14 +7543,14 @@
         </p:nvSpPr>
         <p:spPr>
           <a:xfrm>
-            <a:off x="457200" y="1371600"/>
-            <a:ext cx="11247120" cy="25400"/>
+            <a:off x="548640" y="1481328"/>
+            <a:ext cx="11064240" cy="31750"/>
           </a:xfrm>
           <a:prstGeom prst="rect">
             <a:avLst/>
           </a:prstGeom>
           <a:solidFill>
-            <a:srgbClr val="DFE0D6"/>
+            <a:srgbClr val="1FA87A"/>
           </a:solidFill>
           <a:ln>
             <a:noFill/>
@@ -7788,8 +7587,8 @@
         </p:nvSpPr>
         <p:spPr>
           <a:xfrm>
-            <a:off x="640080" y="1600200"/>
-            <a:ext cx="10881360" cy="4206240"/>
+            <a:off x="640080" y="1783080"/>
+            <a:ext cx="10881360" cy="3931920"/>
           </a:xfrm>
           <a:prstGeom prst="rect">
             <a:avLst/>
@@ -7797,7 +7596,7 @@
           <a:noFill/>
         </p:spPr>
         <p:txBody>
-          <a:bodyPr wrap="square">
+          <a:bodyPr wrap="square" lIns="50800" rIns="50800">
             <a:spAutoFit/>
           </a:bodyPr>
           <a:lstStyle/>
@@ -7807,26 +7606,26 @@
                 <a:spcPts val="0"/>
               </a:spcBef>
               <a:spcAft>
-                <a:spcPts val="1100"/>
-              </a:spcAft>
-            </a:pPr>
-            <a:r>
-              <a:rPr sz="1700" b="1">
+                <a:spcPts val="1700"/>
+              </a:spcAft>
+            </a:pPr>
+            <a:r>
+              <a:rPr sz="1900" lang="he-IL">
+                <a:solidFill>
+                  <a:srgbClr val="0E1F18"/>
+                </a:solidFill>
+                <a:latin typeface="Arial"/>
+              </a:rPr>
+              <a:t>7 טבלאות · 14 מיגרציות SQL — הן מקור האמת.  </a:t>
+            </a:r>
+            <a:r>
+              <a:rPr sz="1500" lang="he-IL">
                 <a:solidFill>
                   <a:srgbClr val="0F6B4F"/>
                 </a:solidFill>
                 <a:latin typeface="Arial"/>
               </a:rPr>
-              <a:t>•  </a:t>
-            </a:r>
-            <a:r>
-              <a:rPr sz="1700">
-                <a:solidFill>
-                  <a:srgbClr val="10231B"/>
-                </a:solidFill>
-                <a:latin typeface="Arial"/>
-              </a:rPr>
-              <a:t>7 טבלאות: profiles · profiles_private · verification_applications · help_requests · offers · request_photos · ratings.</a:t>
+              <a:t>●</a:t>
             </a:r>
           </a:p>
           <a:p>
@@ -7835,26 +7634,26 @@
                 <a:spcPts val="0"/>
               </a:spcBef>
               <a:spcAft>
-                <a:spcPts val="1100"/>
-              </a:spcAft>
-            </a:pPr>
-            <a:r>
-              <a:rPr sz="1700" b="1">
+                <a:spcPts val="1700"/>
+              </a:spcAft>
+            </a:pPr>
+            <a:r>
+              <a:rPr sz="1900" lang="he-IL">
+                <a:solidFill>
+                  <a:srgbClr val="0E1F18"/>
+                </a:solidFill>
+                <a:latin typeface="Arial"/>
+              </a:rPr>
+              <a:t>מכונת מצבים: open → has_offers → assigned → completed → rated.  </a:t>
+            </a:r>
+            <a:r>
+              <a:rPr sz="1500" lang="he-IL">
                 <a:solidFill>
                   <a:srgbClr val="0F6B4F"/>
                 </a:solidFill>
                 <a:latin typeface="Arial"/>
               </a:rPr>
-              <a:t>•  </a:t>
-            </a:r>
-            <a:r>
-              <a:rPr sz="1700">
-                <a:solidFill>
-                  <a:srgbClr val="10231B"/>
-                </a:solidFill>
-                <a:latin typeface="Arial"/>
-              </a:rPr>
-              <a:t>מכונת מצבים: open → has_offers → assigned → completed → rated (+ cancelled) — enum + חותמת זמן לכל מצב.</a:t>
+              <a:t>●</a:t>
             </a:r>
           </a:p>
           <a:p>
@@ -7863,26 +7662,26 @@
                 <a:spcPts val="0"/>
               </a:spcBef>
               <a:spcAft>
-                <a:spcPts val="1100"/>
-              </a:spcAft>
-            </a:pPr>
-            <a:r>
-              <a:rPr sz="1700" b="1">
+                <a:spcPts val="1700"/>
+              </a:spcAft>
+            </a:pPr>
+            <a:r>
+              <a:rPr sz="1900" lang="he-IL">
+                <a:solidFill>
+                  <a:srgbClr val="0E1F18"/>
+                </a:solidFill>
+                <a:latin typeface="Arial"/>
+              </a:rPr>
+              <a:t>enums לערכים סגורים → מצב לא-חוקי הופך לשגיאת טיפוס.  </a:t>
+            </a:r>
+            <a:r>
+              <a:rPr sz="1500" lang="he-IL">
                 <a:solidFill>
                   <a:srgbClr val="0F6B4F"/>
                 </a:solidFill>
                 <a:latin typeface="Arial"/>
               </a:rPr>
-              <a:t>•  </a:t>
-            </a:r>
-            <a:r>
-              <a:rPr sz="1700">
-                <a:solidFill>
-                  <a:srgbClr val="10231B"/>
-                </a:solidFill>
-                <a:latin typeface="Arial"/>
-              </a:rPr>
-              <a:t>enums לערכים סגורים → מצב לא-חוקי הופך לשגיאת טיפוס.</a:t>
+              <a:t>●</a:t>
             </a:r>
           </a:p>
           <a:p>
@@ -7891,74 +7690,46 @@
                 <a:spcPts val="0"/>
               </a:spcBef>
               <a:spcAft>
-                <a:spcPts val="1100"/>
-              </a:spcAft>
-            </a:pPr>
-            <a:r>
-              <a:rPr sz="1700" b="1">
+                <a:spcPts val="1700"/>
+              </a:spcAft>
+            </a:pPr>
+            <a:r>
+              <a:rPr sz="1900" lang="he-IL">
+                <a:solidFill>
+                  <a:srgbClr val="0E1F18"/>
+                </a:solidFill>
+                <a:latin typeface="Arial"/>
+              </a:rPr>
+              <a:t>אינדקס לכל שאילתה חמה · כל מדיניות RLS נושאת את הצדקתה.  </a:t>
+            </a:r>
+            <a:r>
+              <a:rPr sz="1500" lang="he-IL">
                 <a:solidFill>
                   <a:srgbClr val="0F6B4F"/>
                 </a:solidFill>
                 <a:latin typeface="Arial"/>
               </a:rPr>
-              <a:t>•  </a:t>
-            </a:r>
-            <a:r>
-              <a:rPr sz="1700">
-                <a:solidFill>
-                  <a:srgbClr val="10231B"/>
-                </a:solidFill>
-                <a:latin typeface="Arial"/>
-              </a:rPr>
-              <a:t>אינדקסים לכל נתיב שאילתה חם (כולל partial), וכל מדיניות RLS נושאת את הצדקת המוצר שלה.</a:t>
-            </a:r>
-          </a:p>
-          <a:p>
-            <a:pPr algn="r" rtl="1">
-              <a:spcBef>
-                <a:spcPts val="0"/>
-              </a:spcBef>
-              <a:spcAft>
-                <a:spcPts val="1100"/>
-              </a:spcAft>
-            </a:pPr>
-            <a:r>
-              <a:rPr sz="1700" b="1">
-                <a:solidFill>
-                  <a:srgbClr val="0F6B4F"/>
-                </a:solidFill>
-                <a:latin typeface="Arial"/>
-              </a:rPr>
-              <a:t>•  </a:t>
-            </a:r>
-            <a:r>
-              <a:rPr sz="1700">
-                <a:solidFill>
-                  <a:srgbClr val="10231B"/>
-                </a:solidFill>
-                <a:latin typeface="Arial"/>
-              </a:rPr>
-              <a:t>14 מיגרציות SQL — הן מקור האמת: הקוד סומך על המסד.</a:t>
-            </a:r>
-          </a:p>
-        </p:txBody>
-      </p:sp>
-      <p:sp>
-        <p:nvSpPr>
-          <p:cNvPr id="8" name="Rectangle 7"/>
+              <a:t>●</a:t>
+            </a:r>
+          </a:p>
+        </p:txBody>
+      </p:sp>
+      <p:sp>
+        <p:nvSpPr>
+          <p:cNvPr id="8" name="Rounded Rectangle 7"/>
           <p:cNvSpPr/>
           <p:nvPr/>
         </p:nvSpPr>
         <p:spPr>
           <a:xfrm>
             <a:off x="640080" y="5623560"/>
-            <a:ext cx="10881360" cy="685800"/>
-          </a:xfrm>
-          <a:prstGeom prst="rect">
+            <a:ext cx="10881360" cy="731520"/>
+          </a:xfrm>
+          <a:prstGeom prst="roundRect">
             <a:avLst/>
           </a:prstGeom>
           <a:solidFill>
-            <a:srgbClr val="ECF3EF"/>
+            <a:srgbClr val="EAF2EE"/>
           </a:solidFill>
           <a:ln>
             <a:noFill/>
@@ -7995,8 +7766,8 @@
         </p:nvSpPr>
         <p:spPr>
           <a:xfrm>
-            <a:off x="868680" y="5705856"/>
-            <a:ext cx="10424160" cy="548640"/>
+            <a:off x="914400" y="5705856"/>
+            <a:ext cx="10332720" cy="566928"/>
           </a:xfrm>
           <a:prstGeom prst="rect">
             <a:avLst/>
@@ -8018,13 +7789,13 @@
               </a:spcAft>
             </a:pPr>
             <a:r>
-              <a:rPr sz="1400" b="1">
+              <a:rPr sz="1400" b="1" lang="he-IL">
                 <a:solidFill>
                   <a:srgbClr val="0F6B4F"/>
                 </a:solidFill>
                 <a:latin typeface="Arial"/>
               </a:rPr>
-              <a:t>דוגמה: offers_select = הצעות אטומות — רק בעל ההצעה ובעל הבקשה קוראים אותה.</a:t>
+              <a:t>דוגמה: הצעות אטומות — רק בעל ההצעה ובעל הבקשה קוראים אותה.</a:t>
             </a:r>
           </a:p>
         </p:txBody>
@@ -8043,7 +7814,7 @@
     <p:bg>
       <p:bgPr>
         <a:solidFill>
-          <a:srgbClr val="F6F5EF"/>
+          <a:srgbClr val="F7F6F1"/>
         </a:solidFill>
         <a:effectLst/>
       </p:bgPr>
@@ -8064,7 +7835,7 @@
         <p:spPr>
           <a:xfrm>
             <a:off x="0" y="0"/>
-            <a:ext cx="12191695" cy="118872"/>
+            <a:ext cx="12191695" cy="146304"/>
           </a:xfrm>
           <a:prstGeom prst="rect">
             <a:avLst/>
@@ -8107,8 +7878,8 @@
         </p:nvSpPr>
         <p:spPr>
           <a:xfrm>
-            <a:off x="457200" y="292608"/>
-            <a:ext cx="11247120" cy="365760"/>
+            <a:off x="548640" y="310896"/>
+            <a:ext cx="11064240" cy="365760"/>
           </a:xfrm>
           <a:prstGeom prst="rect">
             <a:avLst/>
@@ -8130,7 +7901,7 @@
               </a:spcAft>
             </a:pPr>
             <a:r>
-              <a:rPr sz="1200" b="1">
+              <a:rPr sz="1200" b="1" lang="he-IL">
                 <a:solidFill>
                   <a:srgbClr val="0F6B4F"/>
                 </a:solidFill>
@@ -8149,8 +7920,8 @@
         </p:nvSpPr>
         <p:spPr>
           <a:xfrm>
-            <a:off x="457200" y="6446520"/>
-            <a:ext cx="1828800" cy="320040"/>
+            <a:off x="548640" y="6419088"/>
+            <a:ext cx="3657600" cy="320040"/>
           </a:xfrm>
           <a:prstGeom prst="rect">
             <a:avLst/>
@@ -8163,7 +7934,7 @@
           </a:bodyPr>
           <a:lstStyle/>
           <a:p>
-            <a:pPr algn="l">
+            <a:pPr algn="l" rtl="0">
               <a:spcBef>
                 <a:spcPts val="0"/>
               </a:spcBef>
@@ -8174,11 +7945,11 @@
             <a:r>
               <a:rPr sz="1000" b="0">
                 <a:solidFill>
-                  <a:srgbClr val="53635B"/>
-                </a:solidFill>
-                <a:latin typeface="Arial"/>
-              </a:rPr>
-              <a:t>iHelp · 8 / 16</a:t>
+                  <a:srgbClr val="5C6B63"/>
+                </a:solidFill>
+                <a:latin typeface="Arial"/>
+              </a:rPr>
+              <a:t>iHelp · 8 / 12</a:t>
             </a:r>
           </a:p>
         </p:txBody>
@@ -8191,8 +7962,8 @@
         </p:nvSpPr>
         <p:spPr>
           <a:xfrm>
-            <a:off x="457200" y="566928"/>
-            <a:ext cx="11247120" cy="822960"/>
+            <a:off x="548640" y="603504"/>
+            <a:ext cx="11064240" cy="914400"/>
           </a:xfrm>
           <a:prstGeom prst="rect">
             <a:avLst/>
@@ -8214,9 +7985,9 @@
               </a:spcAft>
             </a:pPr>
             <a:r>
-              <a:rPr sz="3200" b="1">
-                <a:solidFill>
-                  <a:srgbClr val="10231B"/>
+              <a:rPr sz="3400" b="1" lang="he-IL">
+                <a:solidFill>
+                  <a:srgbClr val="0E1F18"/>
                 </a:solidFill>
                 <a:latin typeface="Arial"/>
               </a:rPr>
@@ -8233,14 +8004,14 @@
         </p:nvSpPr>
         <p:spPr>
           <a:xfrm>
-            <a:off x="457200" y="1371600"/>
-            <a:ext cx="11247120" cy="25400"/>
+            <a:off x="548640" y="1481328"/>
+            <a:ext cx="11064240" cy="31750"/>
           </a:xfrm>
           <a:prstGeom prst="rect">
             <a:avLst/>
           </a:prstGeom>
           <a:solidFill>
-            <a:srgbClr val="DFE0D6"/>
+            <a:srgbClr val="1FA87A"/>
           </a:solidFill>
           <a:ln>
             <a:noFill/>
@@ -8277,8 +8048,8 @@
         </p:nvSpPr>
         <p:spPr>
           <a:xfrm>
-            <a:off x="640080" y="1600200"/>
-            <a:ext cx="10881360" cy="4206240"/>
+            <a:off x="640080" y="1783080"/>
+            <a:ext cx="10881360" cy="3931920"/>
           </a:xfrm>
           <a:prstGeom prst="rect">
             <a:avLst/>
@@ -8286,7 +8057,7 @@
           <a:noFill/>
         </p:spPr>
         <p:txBody>
-          <a:bodyPr wrap="square">
+          <a:bodyPr wrap="square" lIns="50800" rIns="50800">
             <a:spAutoFit/>
           </a:bodyPr>
           <a:lstStyle/>
@@ -8296,26 +8067,26 @@
                 <a:spcPts val="0"/>
               </a:spcBef>
               <a:spcAft>
-                <a:spcPts val="1100"/>
-              </a:spcAft>
-            </a:pPr>
-            <a:r>
-              <a:rPr sz="1700" b="1">
+                <a:spcPts val="1700"/>
+              </a:spcAft>
+            </a:pPr>
+            <a:r>
+              <a:rPr sz="1900" lang="he-IL">
+                <a:solidFill>
+                  <a:srgbClr val="0E1F18"/>
+                </a:solidFill>
+                <a:latin typeface="Arial"/>
+              </a:rPr>
+              <a:t>62 בדיקות אוטומטיות (61 Vitest + Playwright E2E) — כולן עוברות.  </a:t>
+            </a:r>
+            <a:r>
+              <a:rPr sz="1500" lang="he-IL">
                 <a:solidFill>
                   <a:srgbClr val="0F6B4F"/>
                 </a:solidFill>
                 <a:latin typeface="Arial"/>
               </a:rPr>
-              <a:t>•  </a:t>
-            </a:r>
-            <a:r>
-              <a:rPr sz="1700">
-                <a:solidFill>
-                  <a:srgbClr val="10231B"/>
-                </a:solidFill>
-                <a:latin typeface="Arial"/>
-              </a:rPr>
-              <a:t>62 בדיקות אוטומטיות (61 Vitest + Playwright E2E) — כולן עוברות.</a:t>
+              <a:t>●</a:t>
             </a:r>
           </a:p>
           <a:p>
@@ -8324,26 +8095,26 @@
                 <a:spcPts val="0"/>
               </a:spcBef>
               <a:spcAft>
-                <a:spcPts val="1100"/>
-              </a:spcAft>
-            </a:pPr>
-            <a:r>
-              <a:rPr sz="1700" b="1">
+                <a:spcPts val="1700"/>
+              </a:spcAft>
+            </a:pPr>
+            <a:r>
+              <a:rPr sz="1900" lang="he-IL">
+                <a:solidFill>
+                  <a:srgbClr val="0E1F18"/>
+                </a:solidFill>
+                <a:latin typeface="Arial"/>
+              </a:rPr>
+              <a:t>15 בדיקות הרשאה תוקפות את המסד כמשתמש הלא-נכון ומוודאות דחייה.  </a:t>
+            </a:r>
+            <a:r>
+              <a:rPr sz="1500" lang="he-IL">
                 <a:solidFill>
                   <a:srgbClr val="0F6B4F"/>
                 </a:solidFill>
                 <a:latin typeface="Arial"/>
               </a:rPr>
-              <a:t>•  </a:t>
-            </a:r>
-            <a:r>
-              <a:rPr sz="1700">
-                <a:solidFill>
-                  <a:srgbClr val="10231B"/>
-                </a:solidFill>
-                <a:latin typeface="Arial"/>
-              </a:rPr>
-              <a:t>המעניינות: 15 בדיקות הרשאה (P1–P15) שתוקפות את המסד כמשתמש הלא-נכון ומוודאות דחייה.</a:t>
+              <a:t>●</a:t>
             </a:r>
           </a:p>
           <a:p>
@@ -8352,26 +8123,26 @@
                 <a:spcPts val="0"/>
               </a:spcBef>
               <a:spcAft>
-                <a:spcPts val="1100"/>
-              </a:spcAft>
-            </a:pPr>
-            <a:r>
-              <a:rPr sz="1700" b="1">
+                <a:spcPts val="1700"/>
+              </a:spcAft>
+            </a:pPr>
+            <a:r>
+              <a:rPr sz="1900" lang="he-IL">
+                <a:solidFill>
+                  <a:srgbClr val="0E1F18"/>
+                </a:solidFill>
+                <a:latin typeface="Arial"/>
+              </a:rPr>
+              <a:t>בדיקת happy-path בלבד לא מוכיחה כלום — בודקים גם דחייה.  </a:t>
+            </a:r>
+            <a:r>
+              <a:rPr sz="1500" lang="he-IL">
                 <a:solidFill>
                   <a:srgbClr val="0F6B4F"/>
                 </a:solidFill>
                 <a:latin typeface="Arial"/>
               </a:rPr>
-              <a:t>•  </a:t>
-            </a:r>
-            <a:r>
-              <a:rPr sz="1700">
-                <a:solidFill>
-                  <a:srgbClr val="10231B"/>
-                </a:solidFill>
-                <a:latin typeface="Arial"/>
-              </a:rPr>
-              <a:t>בדיקת happy-path בלבד לא מוכיחה כלום — כל בדיקת הרשאה מוודאת גם דחייה.</a:t>
+              <a:t>●</a:t>
             </a:r>
           </a:p>
           <a:p>
@@ -8380,74 +8151,46 @@
                 <a:spcPts val="0"/>
               </a:spcBef>
               <a:spcAft>
-                <a:spcPts val="1100"/>
-              </a:spcAft>
-            </a:pPr>
-            <a:r>
-              <a:rPr sz="1700" b="1">
+                <a:spcPts val="1700"/>
+              </a:spcAft>
+            </a:pPr>
+            <a:r>
+              <a:rPr sz="1900" lang="he-IL">
+                <a:solidFill>
+                  <a:srgbClr val="0E1F18"/>
+                </a:solidFill>
+                <a:latin typeface="Arial"/>
+              </a:rPr>
+              <a:t>E2E מלא מריץ את כל הלולאה בשני דפדפנים נפרדים.  </a:t>
+            </a:r>
+            <a:r>
+              <a:rPr sz="1500" lang="he-IL">
                 <a:solidFill>
                   <a:srgbClr val="0F6B4F"/>
                 </a:solidFill>
                 <a:latin typeface="Arial"/>
               </a:rPr>
-              <a:t>•  </a:t>
-            </a:r>
-            <a:r>
-              <a:rPr sz="1700">
-                <a:solidFill>
-                  <a:srgbClr val="10231B"/>
-                </a:solidFill>
-                <a:latin typeface="Arial"/>
-              </a:rPr>
-              <a:t>בדיקות מסד (D1–D10): unique, CHECK, טריגרים · מקרי קצה (X1–X6): מרוצים, idempotency.</a:t>
-            </a:r>
-          </a:p>
-          <a:p>
-            <a:pPr algn="r" rtl="1">
-              <a:spcBef>
-                <a:spcPts val="0"/>
-              </a:spcBef>
-              <a:spcAft>
-                <a:spcPts val="1100"/>
-              </a:spcAft>
-            </a:pPr>
-            <a:r>
-              <a:rPr sz="1700" b="1">
-                <a:solidFill>
-                  <a:srgbClr val="0F6B4F"/>
-                </a:solidFill>
-                <a:latin typeface="Arial"/>
-              </a:rPr>
-              <a:t>•  </a:t>
-            </a:r>
-            <a:r>
-              <a:rPr sz="1700">
-                <a:solidFill>
-                  <a:srgbClr val="10231B"/>
-                </a:solidFill>
-                <a:latin typeface="Arial"/>
-              </a:rPr>
-              <a:t>E2E מלא ב-Playwright — מריץ את כל הלולאה בשני דפדפנים נפרדים.</a:t>
-            </a:r>
-          </a:p>
-        </p:txBody>
-      </p:sp>
-      <p:sp>
-        <p:nvSpPr>
-          <p:cNvPr id="8" name="Rectangle 7"/>
+              <a:t>●</a:t>
+            </a:r>
+          </a:p>
+        </p:txBody>
+      </p:sp>
+      <p:sp>
+        <p:nvSpPr>
+          <p:cNvPr id="8" name="Rounded Rectangle 7"/>
           <p:cNvSpPr/>
           <p:nvPr/>
         </p:nvSpPr>
         <p:spPr>
           <a:xfrm>
             <a:off x="640080" y="5623560"/>
-            <a:ext cx="10881360" cy="685800"/>
-          </a:xfrm>
-          <a:prstGeom prst="rect">
+            <a:ext cx="10881360" cy="731520"/>
+          </a:xfrm>
+          <a:prstGeom prst="roundRect">
             <a:avLst/>
           </a:prstGeom>
           <a:solidFill>
-            <a:srgbClr val="ECF3EF"/>
+            <a:srgbClr val="EAF2EE"/>
           </a:solidFill>
           <a:ln>
             <a:noFill/>
@@ -8484,8 +8227,8 @@
         </p:nvSpPr>
         <p:spPr>
           <a:xfrm>
-            <a:off x="868680" y="5705856"/>
-            <a:ext cx="10424160" cy="548640"/>
+            <a:off x="914400" y="5705856"/>
+            <a:ext cx="10332720" cy="566928"/>
           </a:xfrm>
           <a:prstGeom prst="rect">
             <a:avLst/>
@@ -8507,13 +8250,13 @@
               </a:spcAft>
             </a:pPr>
             <a:r>
-              <a:rPr sz="1400" b="1">
+              <a:rPr sz="1400" b="1" lang="he-IL">
                 <a:solidFill>
                   <a:srgbClr val="0F6B4F"/>
                 </a:solidFill>
                 <a:latin typeface="Arial"/>
               </a:rPr>
-              <a:t>הפילוסופיה: הבדיקות מאורגנות סביב טענת האבטחה — שהמסד אוכף כל כלל.</a:t>
+              <a:t>הבדיקות מאורגנות סביב טענת האבטחה: שהמסד אוכף כל כלל.</a:t>
             </a:r>
           </a:p>
         </p:txBody>
@@ -8532,7 +8275,7 @@
     <p:bg>
       <p:bgPr>
         <a:solidFill>
-          <a:srgbClr val="F6F5EF"/>
+          <a:srgbClr val="F7F6F1"/>
         </a:solidFill>
         <a:effectLst/>
       </p:bgPr>
@@ -8553,7 +8296,7 @@
         <p:spPr>
           <a:xfrm>
             <a:off x="0" y="0"/>
-            <a:ext cx="12191695" cy="118872"/>
+            <a:ext cx="12191695" cy="146304"/>
           </a:xfrm>
           <a:prstGeom prst="rect">
             <a:avLst/>
@@ -8596,8 +8339,8 @@
         </p:nvSpPr>
         <p:spPr>
           <a:xfrm>
-            <a:off x="457200" y="292608"/>
-            <a:ext cx="11247120" cy="365760"/>
+            <a:off x="548640" y="310896"/>
+            <a:ext cx="11064240" cy="365760"/>
           </a:xfrm>
           <a:prstGeom prst="rect">
             <a:avLst/>
@@ -8619,7 +8362,7 @@
               </a:spcAft>
             </a:pPr>
             <a:r>
-              <a:rPr sz="1200" b="1">
+              <a:rPr sz="1200" b="1" lang="he-IL">
                 <a:solidFill>
                   <a:srgbClr val="0F6B4F"/>
                 </a:solidFill>
@@ -8638,8 +8381,8 @@
         </p:nvSpPr>
         <p:spPr>
           <a:xfrm>
-            <a:off x="457200" y="6446520"/>
-            <a:ext cx="1828800" cy="320040"/>
+            <a:off x="548640" y="6419088"/>
+            <a:ext cx="3657600" cy="320040"/>
           </a:xfrm>
           <a:prstGeom prst="rect">
             <a:avLst/>
@@ -8652,7 +8395,7 @@
           </a:bodyPr>
           <a:lstStyle/>
           <a:p>
-            <a:pPr algn="l">
+            <a:pPr algn="l" rtl="0">
               <a:spcBef>
                 <a:spcPts val="0"/>
               </a:spcBef>
@@ -8663,11 +8406,11 @@
             <a:r>
               <a:rPr sz="1000" b="0">
                 <a:solidFill>
-                  <a:srgbClr val="53635B"/>
-                </a:solidFill>
-                <a:latin typeface="Arial"/>
-              </a:rPr>
-              <a:t>iHelp · 9 / 16</a:t>
+                  <a:srgbClr val="5C6B63"/>
+                </a:solidFill>
+                <a:latin typeface="Arial"/>
+              </a:rPr>
+              <a:t>iHelp · 9 / 12</a:t>
             </a:r>
           </a:p>
         </p:txBody>
@@ -8680,8 +8423,8 @@
         </p:nvSpPr>
         <p:spPr>
           <a:xfrm>
-            <a:off x="457200" y="566928"/>
-            <a:ext cx="11247120" cy="822960"/>
+            <a:off x="548640" y="603504"/>
+            <a:ext cx="11064240" cy="914400"/>
           </a:xfrm>
           <a:prstGeom prst="rect">
             <a:avLst/>
@@ -8703,9 +8446,9 @@
               </a:spcAft>
             </a:pPr>
             <a:r>
-              <a:rPr sz="3200" b="1">
-                <a:solidFill>
-                  <a:srgbClr val="10231B"/>
+              <a:rPr sz="3400" b="1" lang="he-IL">
+                <a:solidFill>
+                  <a:srgbClr val="0E1F18"/>
                 </a:solidFill>
                 <a:latin typeface="Arial"/>
               </a:rPr>
@@ -8722,14 +8465,14 @@
         </p:nvSpPr>
         <p:spPr>
           <a:xfrm>
-            <a:off x="457200" y="1371600"/>
-            <a:ext cx="11247120" cy="25400"/>
+            <a:off x="548640" y="1481328"/>
+            <a:ext cx="11064240" cy="31750"/>
           </a:xfrm>
           <a:prstGeom prst="rect">
             <a:avLst/>
           </a:prstGeom>
           <a:solidFill>
-            <a:srgbClr val="DFE0D6"/>
+            <a:srgbClr val="1FA87A"/>
           </a:solidFill>
           <a:ln>
             <a:noFill/>
@@ -8766,8 +8509,8 @@
         </p:nvSpPr>
         <p:spPr>
           <a:xfrm>
-            <a:off x="640080" y="1600200"/>
-            <a:ext cx="10881360" cy="4206240"/>
+            <a:off x="640080" y="1783080"/>
+            <a:ext cx="10881360" cy="3931920"/>
           </a:xfrm>
           <a:prstGeom prst="rect">
             <a:avLst/>
@@ -8775,7 +8518,7 @@
           <a:noFill/>
         </p:spPr>
         <p:txBody>
-          <a:bodyPr wrap="square">
+          <a:bodyPr wrap="square" lIns="50800" rIns="50800">
             <a:spAutoFit/>
           </a:bodyPr>
           <a:lstStyle/>
@@ -8785,26 +8528,26 @@
                 <a:spcPts val="0"/>
               </a:spcBef>
               <a:spcAft>
-                <a:spcPts val="1100"/>
-              </a:spcAft>
-            </a:pPr>
-            <a:r>
-              <a:rPr sz="1700" b="1">
+                <a:spcPts val="1700"/>
+              </a:spcAft>
+            </a:pPr>
+            <a:r>
+              <a:rPr sz="1900" lang="he-IL">
+                <a:solidFill>
+                  <a:srgbClr val="0E1F18"/>
+                </a:solidFill>
+                <a:latin typeface="Arial"/>
+              </a:rPr>
+              <a:t>מתוכנן לעשרות משתמשים ומאות בקשות — כל מנגנון פשוט ונכון.  </a:t>
+            </a:r>
+            <a:r>
+              <a:rPr sz="1500" lang="he-IL">
                 <a:solidFill>
                   <a:srgbClr val="0F6B4F"/>
                 </a:solidFill>
                 <a:latin typeface="Arial"/>
               </a:rPr>
-              <a:t>•  </a:t>
-            </a:r>
-            <a:r>
-              <a:rPr sz="1700">
-                <a:solidFill>
-                  <a:srgbClr val="10231B"/>
-                </a:solidFill>
-                <a:latin typeface="Arial"/>
-              </a:rPr>
-              <a:t>מתוכנן לאזור פיילוט: עשרות משתמשים, מאות בקשות — כל מנגנון פשוט ונכון בתוך המעטפת הזו.</a:t>
+              <a:t>●</a:t>
             </a:r>
           </a:p>
           <a:p>
@@ -8813,26 +8556,26 @@
                 <a:spcPts val="0"/>
               </a:spcBef>
               <a:spcAft>
-                <a:spcPts val="1100"/>
-              </a:spcAft>
-            </a:pPr>
-            <a:r>
-              <a:rPr sz="1700" b="1">
+                <a:spcPts val="1700"/>
+              </a:spcAft>
+            </a:pPr>
+            <a:r>
+              <a:rPr sz="1900" lang="he-IL">
+                <a:solidFill>
+                  <a:srgbClr val="0E1F18"/>
+                </a:solidFill>
+                <a:latin typeface="Arial"/>
+              </a:rPr>
+              <a:t>פיד מוגבל ל-200 + מיון Haversine ב-TypeScript + 12 לעמוד.  </a:t>
+            </a:r>
+            <a:r>
+              <a:rPr sz="1500" lang="he-IL">
                 <a:solidFill>
                   <a:srgbClr val="0F6B4F"/>
                 </a:solidFill>
                 <a:latin typeface="Arial"/>
               </a:rPr>
-              <a:t>•  </a:t>
-            </a:r>
-            <a:r>
-              <a:rPr sz="1700">
-                <a:solidFill>
-                  <a:srgbClr val="10231B"/>
-                </a:solidFill>
-                <a:latin typeface="Arial"/>
-              </a:rPr>
-              <a:t>הפיד מוגבל ל-200 שורות + מיון Haversine ב-TypeScript (בלי PostGIS) + 12 לעמוד via URL.</a:t>
+              <a:t>●</a:t>
             </a:r>
           </a:p>
           <a:p>
@@ -8841,26 +8584,26 @@
                 <a:spcPts val="0"/>
               </a:spcBef>
               <a:spcAft>
-                <a:spcPts val="1100"/>
-              </a:spcAft>
-            </a:pPr>
-            <a:r>
-              <a:rPr sz="1700" b="1">
+                <a:spcPts val="1700"/>
+              </a:spcAft>
+            </a:pPr>
+            <a:r>
+              <a:rPr sz="1900" lang="he-IL">
+                <a:solidFill>
+                  <a:srgbClr val="0E1F18"/>
+                </a:solidFill>
+                <a:latin typeface="Arial"/>
+              </a:rPr>
+              <a:t>אינדקס לכל שאילתה כבדה · קריאות בשרת · אין client cache.  </a:t>
+            </a:r>
+            <a:r>
+              <a:rPr sz="1500" lang="he-IL">
                 <a:solidFill>
                   <a:srgbClr val="0F6B4F"/>
                 </a:solidFill>
                 <a:latin typeface="Arial"/>
               </a:rPr>
-              <a:t>•  </a:t>
-            </a:r>
-            <a:r>
-              <a:rPr sz="1700">
-                <a:solidFill>
-                  <a:srgbClr val="10231B"/>
-                </a:solidFill>
-                <a:latin typeface="Arial"/>
-              </a:rPr>
-              <a:t>אינדקס לכל שאילתה כבדה · column lists לא * · תמונות נחתמות per-page.</a:t>
+              <a:t>●</a:t>
             </a:r>
           </a:p>
           <a:p>
@@ -8869,74 +8612,46 @@
                 <a:spcPts val="0"/>
               </a:spcBef>
               <a:spcAft>
-                <a:spcPts val="1100"/>
-              </a:spcAft>
-            </a:pPr>
-            <a:r>
-              <a:rPr sz="1700" b="1">
+                <a:spcPts val="1700"/>
+              </a:spcAft>
+            </a:pPr>
+            <a:r>
+              <a:rPr sz="1900" lang="he-IL">
+                <a:solidFill>
+                  <a:srgbClr val="0E1F18"/>
+                </a:solidFill>
+                <a:latin typeface="Arial"/>
+              </a:rPr>
+              <a:t>לכל מגבלה יש signal מפורש ויורש נקוב — כולם additive.  </a:t>
+            </a:r>
+            <a:r>
+              <a:rPr sz="1500" lang="he-IL">
                 <a:solidFill>
                   <a:srgbClr val="0F6B4F"/>
                 </a:solidFill>
                 <a:latin typeface="Arial"/>
               </a:rPr>
-              <a:t>•  </a:t>
-            </a:r>
-            <a:r>
-              <a:rPr sz="1700">
-                <a:solidFill>
-                  <a:srgbClr val="10231B"/>
-                </a:solidFill>
-                <a:latin typeface="Arial"/>
-              </a:rPr>
-              <a:t>כל הקריאות בשרת (RSC) · כתיבות round-trip יחיד · אין client cache.</a:t>
-            </a:r>
-          </a:p>
-          <a:p>
-            <a:pPr algn="r" rtl="1">
-              <a:spcBef>
-                <a:spcPts val="0"/>
-              </a:spcBef>
-              <a:spcAft>
-                <a:spcPts val="1100"/>
-              </a:spcAft>
-            </a:pPr>
-            <a:r>
-              <a:rPr sz="1700" b="1">
-                <a:solidFill>
-                  <a:srgbClr val="0F6B4F"/>
-                </a:solidFill>
-                <a:latin typeface="Arial"/>
-              </a:rPr>
-              <a:t>•  </a:t>
-            </a:r>
-            <a:r>
-              <a:rPr sz="1700">
-                <a:solidFill>
-                  <a:srgbClr val="10231B"/>
-                </a:solidFill>
-                <a:latin typeface="Arial"/>
-              </a:rPr>
-              <a:t>לכל מגבלה יש signal מפורש ויורש נקוב — כולם additive.</a:t>
-            </a:r>
-          </a:p>
-        </p:txBody>
-      </p:sp>
-      <p:sp>
-        <p:nvSpPr>
-          <p:cNvPr id="8" name="Rectangle 7"/>
+              <a:t>●</a:t>
+            </a:r>
+          </a:p>
+        </p:txBody>
+      </p:sp>
+      <p:sp>
+        <p:nvSpPr>
+          <p:cNvPr id="8" name="Rounded Rectangle 7"/>
           <p:cNvSpPr/>
           <p:nvPr/>
         </p:nvSpPr>
         <p:spPr>
           <a:xfrm>
             <a:off x="640080" y="5623560"/>
-            <a:ext cx="10881360" cy="685800"/>
-          </a:xfrm>
-          <a:prstGeom prst="rect">
+            <a:ext cx="10881360" cy="731520"/>
+          </a:xfrm>
+          <a:prstGeom prst="roundRect">
             <a:avLst/>
           </a:prstGeom>
           <a:solidFill>
-            <a:srgbClr val="ECF3EF"/>
+            <a:srgbClr val="EAF2EE"/>
           </a:solidFill>
           <a:ln>
             <a:noFill/>
@@ -8973,8 +8688,8 @@
         </p:nvSpPr>
         <p:spPr>
           <a:xfrm>
-            <a:off x="868680" y="5705856"/>
-            <a:ext cx="10424160" cy="548640"/>
+            <a:off x="914400" y="5705856"/>
+            <a:ext cx="10332720" cy="566928"/>
           </a:xfrm>
           <a:prstGeom prst="rect">
             <a:avLst/>
@@ -8996,13 +8711,13 @@
               </a:spcAft>
             </a:pPr>
             <a:r>
-              <a:rPr sz="1400" b="1">
+              <a:rPr sz="1400" b="1" lang="he-IL">
                 <a:solidFill>
                   <a:srgbClr val="0F6B4F"/>
                 </a:solidFill>
                 <a:latin typeface="Arial"/>
               </a:rPr>
-              <a:t>התובנה: מה שנשבר ראשון הוא תור האדמין האנושי, לא המסד — ואני אומר את זה בכנות.</a:t>
+              <a:t>מה שנשבר ראשון הוא תור האדמין האנושי, לא המסד — ואומרים זאת בכנות.</a:t>
             </a:r>
           </a:p>
         </p:txBody>

--- a/submission/he/iHelp-presentation.pptx
+++ b/submission/he/iHelp-presentation.pptx
@@ -3261,8 +3261,8 @@
         </p:nvSpPr>
         <p:spPr>
           <a:xfrm>
-            <a:off x="1371600" y="3794760"/>
-            <a:ext cx="9418320" cy="640080"/>
+            <a:off x="1188720" y="3794760"/>
+            <a:ext cx="9784080" cy="640080"/>
           </a:xfrm>
           <a:prstGeom prst="rect">
             <a:avLst/>
@@ -3290,7 +3290,7 @@
                 </a:solidFill>
                 <a:latin typeface="Arial"/>
               </a:rPr>
-              <a:t>שוק עזרה הפוך: מפרסמים בקשה אחת, ושכנים מאומתים מתחרים לעזור</a:t>
+              <a:t>שוק העזרה ההפוך: מפרסמים בקשה אחת, ושכנים מאומתים מתחרים על הזכות לעזור</a:t>
             </a:r>
           </a:p>
         </p:txBody>
@@ -3541,13 +3541,13 @@
               </a:spcAft>
             </a:pPr>
             <a:r>
-              <a:rPr sz="3400" b="1" lang="he-IL">
+              <a:rPr sz="3200" b="1" lang="he-IL">
                 <a:solidFill>
                   <a:srgbClr val="0E1F18"/>
                 </a:solidFill>
                 <a:latin typeface="Arial"/>
               </a:rPr>
-              <a:t>איך חשבנו על אבטחה</a:t>
+              <a:t>איך שמרנו על אבטחה</a:t>
             </a:r>
           </a:p>
         </p:txBody>
@@ -3560,7 +3560,7 @@
         </p:nvSpPr>
         <p:spPr>
           <a:xfrm>
-            <a:off x="548640" y="1481328"/>
+            <a:off x="548640" y="1463040"/>
             <a:ext cx="11064240" cy="31750"/>
           </a:xfrm>
           <a:prstGeom prst="rect">
@@ -3604,8 +3604,8 @@
         </p:nvSpPr>
         <p:spPr>
           <a:xfrm>
-            <a:off x="640080" y="1783080"/>
-            <a:ext cx="10881360" cy="3931920"/>
+            <a:off x="640080" y="1737360"/>
+            <a:ext cx="10881360" cy="3749039"/>
           </a:xfrm>
           <a:prstGeom prst="rect">
             <a:avLst/>
@@ -3623,7 +3623,7 @@
                 <a:spcPts val="0"/>
               </a:spcBef>
               <a:spcAft>
-                <a:spcPts val="1600"/>
+                <a:spcPts val="1500"/>
               </a:spcAft>
             </a:pPr>
             <a:r>
@@ -3633,10 +3633,10 @@
                 </a:solidFill>
                 <a:latin typeface="Arial"/>
               </a:rPr>
-              <a:t>ארבע שכבות אכיפה, רק האחרונה נאמנת — המסד.  </a:t>
-            </a:r>
-            <a:r>
-              <a:rPr sz="1400" lang="he-IL">
+              <a:t>ההתחברות מנוהלת על ידי Supabase — הסיסמאות מוצפנות, ואני אף פעם לא נוגע בהן ישירות.   </a:t>
+            </a:r>
+            <a:r>
+              <a:rPr sz="1300" lang="he-IL">
                 <a:solidFill>
                   <a:srgbClr val="0F6B4F"/>
                 </a:solidFill>
@@ -3651,7 +3651,7 @@
                 <a:spcPts val="0"/>
               </a:spcBef>
               <a:spcAft>
-                <a:spcPts val="1600"/>
+                <a:spcPts val="1500"/>
               </a:spcAft>
             </a:pPr>
             <a:r>
@@ -3661,10 +3661,10 @@
                 </a:solidFill>
                 <a:latin typeface="Arial"/>
               </a:rPr>
-              <a:t>Authentication: Supabase Auth (bcrypt), עוגיות HttpOnly, JWT בכל קריאה.  </a:t>
-            </a:r>
-            <a:r>
-              <a:rPr sz="1400" lang="he-IL">
+              <a:t>לכל משתמש יש 'כרטיס זיהוי' מוצפן (JWT) שנשלח בכל פעולה, כדי שהמסד ידע מי הוא.   </a:t>
+            </a:r>
+            <a:r>
+              <a:rPr sz="1300" lang="he-IL">
                 <a:solidFill>
                   <a:srgbClr val="0F6B4F"/>
                 </a:solidFill>
@@ -3679,7 +3679,7 @@
                 <a:spcPts val="0"/>
               </a:spcBef>
               <a:spcAft>
-                <a:spcPts val="1600"/>
+                <a:spcPts val="1500"/>
               </a:spcAft>
             </a:pPr>
             <a:r>
@@ -3689,10 +3689,10 @@
                 </a:solidFill>
                 <a:latin typeface="Arial"/>
               </a:rPr>
-              <a:t>מפתח anon פומבי בטוח כי RLS היא הסמכות · service-role באפס שורות קוד.  </a:t>
-            </a:r>
-            <a:r>
-              <a:rPr sz="1400" lang="he-IL">
+              <a:t>כל ההרשאות נאכפות במסד הנתונים. גם אם המפתח הציבורי של האתר ידלוף — הוא לא נותן שום גישה מעבר למשתמש רגיל.   </a:t>
+            </a:r>
+            <a:r>
+              <a:rPr sz="1300" lang="he-IL">
                 <a:solidFill>
                   <a:srgbClr val="0F6B4F"/>
                 </a:solidFill>
@@ -3707,7 +3707,7 @@
                 <a:spcPts val="0"/>
               </a:spcBef>
               <a:spcAft>
-                <a:spcPts val="1600"/>
+                <a:spcPts val="1500"/>
               </a:spcAft>
             </a:pPr>
             <a:r>
@@ -3717,10 +3717,10 @@
                 </a:solidFill>
                 <a:latin typeface="Arial"/>
               </a:rPr>
-              <a:t>XSS · CSRF · SQL injection — כולם מנוטרלים מבנית.  </a:t>
-            </a:r>
-            <a:r>
-              <a:rPr sz="1400" lang="he-IL">
+              <a:t>המערכת מוגנת מפני שלושת סוגי המתקפות הנפוצים באינטרנט: XSS, CSRF, ו-SQL injection.   </a:t>
+            </a:r>
+            <a:r>
+              <a:rPr sz="1300" lang="he-IL">
                 <a:solidFill>
                   <a:srgbClr val="0F6B4F"/>
                 </a:solidFill>
@@ -3739,8 +3739,8 @@
         </p:nvSpPr>
         <p:spPr>
           <a:xfrm>
-            <a:off x="640080" y="5623560"/>
-            <a:ext cx="10881360" cy="731520"/>
+            <a:off x="640080" y="5577840"/>
+            <a:ext cx="10881360" cy="777240"/>
           </a:xfrm>
           <a:prstGeom prst="roundRect">
             <a:avLst/>
@@ -3783,8 +3783,8 @@
         </p:nvSpPr>
         <p:spPr>
           <a:xfrm>
-            <a:off x="914400" y="5705856"/>
-            <a:ext cx="10332720" cy="566928"/>
+            <a:off x="914400" y="5650992"/>
+            <a:ext cx="10332720" cy="640080"/>
           </a:xfrm>
           <a:prstGeom prst="rect">
             <a:avLst/>
@@ -3806,13 +3806,13 @@
               </a:spcAft>
             </a:pPr>
             <a:r>
-              <a:rPr sz="1400" b="1" lang="he-IL">
+              <a:rPr sz="1500" b="1" lang="he-IL">
                 <a:solidFill>
                   <a:srgbClr val="0F6B4F"/>
                 </a:solidFill>
                 <a:latin typeface="Arial"/>
               </a:rPr>
-              <a:t>רשימת סיכונים כנה (R1–R10), כולל באג אמיתי שנתפס ותוקן.</a:t>
+              <a:t>אני מתעד בכנות גם את הסיכונים שנשארו ומה הייתי משפר — כי אבטחה זה תהליך, לא נקודה.</a:t>
             </a:r>
           </a:p>
         </p:txBody>
@@ -3924,7 +3924,7 @@
                 </a:solidFill>
                 <a:latin typeface="Arial"/>
               </a:rPr>
-              <a:t>§12 · שיפורים</a:t>
+              <a:t>§12 · שיפורים עתידיים</a:t>
             </a:r>
           </a:p>
         </p:txBody>
@@ -4002,13 +4002,13 @@
               </a:spcAft>
             </a:pPr>
             <a:r>
-              <a:rPr sz="3400" b="1" lang="he-IL">
+              <a:rPr sz="3200" b="1" lang="he-IL">
                 <a:solidFill>
                   <a:srgbClr val="0E1F18"/>
                 </a:solidFill>
                 <a:latin typeface="Arial"/>
               </a:rPr>
-              <a:t>מה היינו משפרים עם עוד זמן</a:t>
+              <a:t>מה הייתי מוסיף עם עוד זמן</a:t>
             </a:r>
           </a:p>
         </p:txBody>
@@ -4021,7 +4021,7 @@
         </p:nvSpPr>
         <p:spPr>
           <a:xfrm>
-            <a:off x="548640" y="1481328"/>
+            <a:off x="548640" y="1463040"/>
             <a:ext cx="11064240" cy="31750"/>
           </a:xfrm>
           <a:prstGeom prst="rect">
@@ -4065,8 +4065,8 @@
         </p:nvSpPr>
         <p:spPr>
           <a:xfrm>
-            <a:off x="640080" y="1783080"/>
-            <a:ext cx="10881360" cy="3931920"/>
+            <a:off x="640080" y="1737360"/>
+            <a:ext cx="10881360" cy="3749039"/>
           </a:xfrm>
           <a:prstGeom prst="rect">
             <a:avLst/>
@@ -4084,20 +4084,20 @@
                 <a:spcPts val="0"/>
               </a:spcBef>
               <a:spcAft>
-                <a:spcPts val="1800"/>
-              </a:spcAft>
-            </a:pPr>
-            <a:r>
-              <a:rPr sz="2000" lang="he-IL">
+                <a:spcPts val="1500"/>
+              </a:spcAft>
+            </a:pPr>
+            <a:r>
+              <a:rPr sz="1800" lang="he-IL">
                 <a:solidFill>
                   <a:srgbClr val="0E1F18"/>
                 </a:solidFill>
                 <a:latin typeface="Arial"/>
               </a:rPr>
-              <a:t>צ'אט בתוך האפליקציה בין הצדדים המשובצים.  </a:t>
-            </a:r>
-            <a:r>
-              <a:rPr sz="1600" lang="he-IL">
+              <a:t>צ'אט בתוך האפליקציה — היום הצדדים מחליפים מספרי טלפון ומתאמים בחוץ.   </a:t>
+            </a:r>
+            <a:r>
+              <a:rPr sz="1300" lang="he-IL">
                 <a:solidFill>
                   <a:srgbClr val="0F6B4F"/>
                 </a:solidFill>
@@ -4112,20 +4112,20 @@
                 <a:spcPts val="0"/>
               </a:spcBef>
               <a:spcAft>
-                <a:spcPts val="1800"/>
-              </a:spcAft>
-            </a:pPr>
-            <a:r>
-              <a:rPr sz="2000" lang="he-IL">
+                <a:spcPts val="1500"/>
+              </a:spcAft>
+            </a:pPr>
+            <a:r>
+              <a:rPr sz="1800" lang="he-IL">
                 <a:solidFill>
                   <a:srgbClr val="0E1F18"/>
                 </a:solidFill>
                 <a:latin typeface="Arial"/>
               </a:rPr>
-              <a:t>SMS OTP לאימות אמיתי של הטלפון.  </a:t>
-            </a:r>
-            <a:r>
-              <a:rPr sz="1600" lang="he-IL">
+              <a:t>אימות טלפון אמיתי דרך SMS — כדי לחזק את בדיקת הזהות.   </a:t>
+            </a:r>
+            <a:r>
+              <a:rPr sz="1300" lang="he-IL">
                 <a:solidFill>
                   <a:srgbClr val="0F6B4F"/>
                 </a:solidFill>
@@ -4140,20 +4140,20 @@
                 <a:spcPts val="0"/>
               </a:spcBef>
               <a:spcAft>
-                <a:spcPts val="1800"/>
-              </a:spcAft>
-            </a:pPr>
-            <a:r>
-              <a:rPr sz="2000" lang="he-IL">
+                <a:spcPts val="1500"/>
+              </a:spcAft>
+            </a:pPr>
+            <a:r>
+              <a:rPr sz="1800" lang="he-IL">
                 <a:solidFill>
                   <a:srgbClr val="0E1F18"/>
                 </a:solidFill>
                 <a:latin typeface="Arial"/>
               </a:rPr>
-              <a:t>התראות בתוך האפליקציה — בלי לרענן ידנית.  </a:t>
-            </a:r>
-            <a:r>
-              <a:rPr sz="1600" lang="he-IL">
+              <a:t>התראות — כדי שהמשתמש ידע שהגיעה הצעה חדשה בלי לרענן ידנית.   </a:t>
+            </a:r>
+            <a:r>
+              <a:rPr sz="1300" lang="he-IL">
                 <a:solidFill>
                   <a:srgbClr val="0F6B4F"/>
                 </a:solidFill>
@@ -4168,20 +4168,20 @@
                 <a:spcPts val="0"/>
               </a:spcBef>
               <a:spcAft>
-                <a:spcPts val="1800"/>
-              </a:spcAft>
-            </a:pPr>
-            <a:r>
-              <a:rPr sz="2000" lang="he-IL">
+                <a:spcPts val="1500"/>
+              </a:spcAft>
+            </a:pPr>
+            <a:r>
+              <a:rPr sz="1800" lang="he-IL">
                 <a:solidFill>
                   <a:srgbClr val="0E1F18"/>
                 </a:solidFill>
                 <a:latin typeface="Arial"/>
               </a:rPr>
-              <a:t>מוניטין גם לצד המבקש — לסגור את סימטריית האמון.  </a:t>
-            </a:r>
-            <a:r>
-              <a:rPr sz="1600" lang="he-IL">
+              <a:t>דירוג גם למבקשים — כדי שגם העוזרים ידעו למי הם באים לעזור.   </a:t>
+            </a:r>
+            <a:r>
+              <a:rPr sz="1300" lang="he-IL">
                 <a:solidFill>
                   <a:srgbClr val="0F6B4F"/>
                 </a:solidFill>
@@ -4200,8 +4200,8 @@
         </p:nvSpPr>
         <p:spPr>
           <a:xfrm>
-            <a:off x="640080" y="5623560"/>
-            <a:ext cx="10881360" cy="731520"/>
+            <a:off x="640080" y="5577840"/>
+            <a:ext cx="10881360" cy="777240"/>
           </a:xfrm>
           <a:prstGeom prst="roundRect">
             <a:avLst/>
@@ -4244,8 +4244,8 @@
         </p:nvSpPr>
         <p:spPr>
           <a:xfrm>
-            <a:off x="914400" y="5705856"/>
-            <a:ext cx="10332720" cy="566928"/>
+            <a:off x="914400" y="5650992"/>
+            <a:ext cx="10332720" cy="640080"/>
           </a:xfrm>
           <a:prstGeom prst="rect">
             <a:avLst/>
@@ -4267,13 +4267,13 @@
               </a:spcAft>
             </a:pPr>
             <a:r>
-              <a:rPr sz="1400" b="1" lang="he-IL">
+              <a:rPr sz="1500" b="1" lang="he-IL">
                 <a:solidFill>
                   <a:srgbClr val="0F6B4F"/>
                 </a:solidFill>
                 <a:latin typeface="Arial"/>
               </a:rPr>
-              <a:t>כל אלה היו קיצוצים מכוונים — MVP קטן, נקי ומאובטח.</a:t>
+              <a:t>כל אלה הושארו בחוץ בכוונה. העדפתי מוצר קטן, נקי ומאובטח על פני מוצר גדול ולא יציב.</a:t>
             </a:r>
           </a:p>
         </p:txBody>
@@ -4356,7 +4356,7 @@
         </p:nvSpPr>
         <p:spPr>
           <a:xfrm>
-            <a:off x="914400" y="1417320"/>
+            <a:off x="914400" y="1371600"/>
             <a:ext cx="10332720" cy="502920"/>
           </a:xfrm>
           <a:prstGeom prst="rect">
@@ -4385,7 +4385,7 @@
                 </a:solidFill>
                 <a:latin typeface="Arial"/>
               </a:rPr>
-              <a:t>סיכום</a:t>
+              <a:t>לסיכום</a:t>
             </a:r>
           </a:p>
         </p:txBody>
@@ -4398,7 +4398,7 @@
         </p:nvSpPr>
         <p:spPr>
           <a:xfrm>
-            <a:off x="1280160" y="2148840"/>
+            <a:off x="1280160" y="2103120"/>
             <a:ext cx="9601200" cy="2011680"/>
           </a:xfrm>
           <a:prstGeom prst="rect">
@@ -4421,13 +4421,13 @@
               </a:spcAft>
             </a:pPr>
             <a:r>
-              <a:rPr sz="2500" b="1" lang="he-IL">
+              <a:rPr sz="2300" b="1" lang="he-IL">
                 <a:solidFill>
                   <a:srgbClr val="FFFFFF"/>
                 </a:solidFill>
                 <a:latin typeface="Arial"/>
               </a:rPr>
-              <a:t>iHelp הופך את החיפוש אחרי עזרה — מפרסמים פעם אחת ושכנים מאומתים מתחרים לעזור לך — וכל שורה בו בנויה כך שמסד הנתונים עצמו אוכף את האמון.</a:t>
+              <a:t>iHelp הופך את החיפוש אחרי עזרה: מפרסמים פעם אחת, ושכנים מאומתים מתחרים לעזור לך. וכל שורה בו בנויה כך שמסד הנתונים עצמו אוכף את האמון.</a:t>
             </a:r>
           </a:p>
         </p:txBody>
@@ -4440,7 +4440,7 @@
         </p:nvSpPr>
         <p:spPr>
           <a:xfrm>
-            <a:off x="914400" y="4160520"/>
+            <a:off x="914400" y="4206240"/>
             <a:ext cx="10332720" cy="640080"/>
           </a:xfrm>
           <a:prstGeom prst="rect">
@@ -4530,7 +4530,7 @@
                 </a:solidFill>
                 <a:latin typeface="Arial"/>
               </a:rPr>
-              <a:t>תודה — שאלות?</a:t>
+              <a:t>תודה רבה — אשמח לשאלות</a:t>
             </a:r>
           </a:p>
         </p:txBody>
@@ -4642,7 +4642,7 @@
                 </a:solidFill>
                 <a:latin typeface="Arial"/>
               </a:rPr>
-              <a:t>§1–2 · הבעיה</a:t>
+              <a:t>§1–2 · הבעיה שאנחנו פותרים</a:t>
             </a:r>
           </a:p>
         </p:txBody>
@@ -4720,13 +4720,13 @@
               </a:spcAft>
             </a:pPr>
             <a:r>
-              <a:rPr sz="3400" b="1" lang="he-IL">
+              <a:rPr sz="3200" b="1" lang="he-IL">
                 <a:solidFill>
                   <a:srgbClr val="0E1F18"/>
                 </a:solidFill>
                 <a:latin typeface="Arial"/>
               </a:rPr>
-              <a:t>הבעיה: מציאת עזרה איטית וחד-כיוונית</a:t>
+              <a:t>הבעיה: קשה למצוא עזרה אמינה במהירות</a:t>
             </a:r>
           </a:p>
         </p:txBody>
@@ -4739,7 +4739,7 @@
         </p:nvSpPr>
         <p:spPr>
           <a:xfrm>
-            <a:off x="548640" y="1481328"/>
+            <a:off x="548640" y="1463040"/>
             <a:ext cx="11064240" cy="31750"/>
           </a:xfrm>
           <a:prstGeom prst="rect">
@@ -4783,8 +4783,8 @@
         </p:nvSpPr>
         <p:spPr>
           <a:xfrm>
-            <a:off x="640080" y="1783080"/>
-            <a:ext cx="10881360" cy="3931920"/>
+            <a:off x="640080" y="1737360"/>
+            <a:ext cx="10881360" cy="3749039"/>
           </a:xfrm>
           <a:prstGeom prst="rect">
             <a:avLst/>
@@ -4802,20 +4802,20 @@
                 <a:spcPts val="0"/>
               </a:spcBef>
               <a:spcAft>
-                <a:spcPts val="2000"/>
-              </a:spcAft>
-            </a:pPr>
-            <a:r>
-              <a:rPr sz="2000" lang="he-IL">
+                <a:spcPts val="1500"/>
+              </a:spcAft>
+            </a:pPr>
+            <a:r>
+              <a:rPr sz="1800" lang="he-IL">
                 <a:solidFill>
                   <a:srgbClr val="0E1F18"/>
                 </a:solidFill>
                 <a:latin typeface="Arial"/>
               </a:rPr>
-              <a:t>מחפשים, משווים ומתקשרים לספקים אחד-אחד — הספקים אפילו לא רואים שיש ביקוש.  </a:t>
-            </a:r>
-            <a:r>
-              <a:rPr sz="1600" lang="he-IL">
+              <a:t>כשצריך עזרה, מחפשים לבד: מתקשרים לספק אחרי ספק, משווים, ומחכים שיחזרו אליך. זה איטי ומתיש.   </a:t>
+            </a:r>
+            <a:r>
+              <a:rPr sz="1300" lang="he-IL">
                 <a:solidFill>
                   <a:srgbClr val="0F6B4F"/>
                 </a:solidFill>
@@ -4830,20 +4830,20 @@
                 <a:spcPts val="0"/>
               </a:spcBef>
               <a:spcAft>
-                <a:spcPts val="2000"/>
-              </a:spcAft>
-            </a:pPr>
-            <a:r>
-              <a:rPr sz="2000" lang="he-IL">
+                <a:spcPts val="1500"/>
+              </a:spcAft>
+            </a:pPr>
+            <a:r>
+              <a:rPr sz="1800" lang="he-IL">
                 <a:solidFill>
                   <a:srgbClr val="0E1F18"/>
                 </a:solidFill>
                 <a:latin typeface="Arial"/>
               </a:rPr>
-              <a:t>אמון יקר לבנייה, וצריך לפעול בשני הכיוונים — גם מבקש זדוני מסוכן לעוזר.  </a:t>
-            </a:r>
-            <a:r>
-              <a:rPr sz="1600" lang="he-IL">
+              <a:t>קשה לדעת למי לבטוח. כל אחד יכול לטעון שהוא איש מקצוע, ואין לאן לבדוק.   </a:t>
+            </a:r>
+            <a:r>
+              <a:rPr sz="1300" lang="he-IL">
                 <a:solidFill>
                   <a:srgbClr val="0F6B4F"/>
                 </a:solidFill>
@@ -4858,20 +4858,20 @@
                 <a:spcPts val="0"/>
               </a:spcBef>
               <a:spcAft>
-                <a:spcPts val="2000"/>
-              </a:spcAft>
-            </a:pPr>
-            <a:r>
-              <a:rPr sz="2000" lang="he-IL">
+                <a:spcPts val="1500"/>
+              </a:spcAft>
+            </a:pPr>
+            <a:r>
+              <a:rPr sz="1800" lang="he-IL">
                 <a:solidFill>
                   <a:srgbClr val="0E1F18"/>
                 </a:solidFill>
                 <a:latin typeface="Arial"/>
               </a:rPr>
-              <a:t>הזמינות אטומה — מי פנוי וקרוב עכשיו? אילו בקשות פתוחות בסביבה?  </a:t>
-            </a:r>
-            <a:r>
-              <a:rPr sz="1600" lang="he-IL">
+              <a:t>גם העוזר בסיכון: הוא מגיע לבית של אדם זר, בלי לדעת מי הזמין אותו.   </a:t>
+            </a:r>
+            <a:r>
+              <a:rPr sz="1300" lang="he-IL">
                 <a:solidFill>
                   <a:srgbClr val="0F6B4F"/>
                 </a:solidFill>
@@ -4886,20 +4886,20 @@
                 <a:spcPts val="0"/>
               </a:spcBef>
               <a:spcAft>
-                <a:spcPts val="2000"/>
-              </a:spcAft>
-            </a:pPr>
-            <a:r>
-              <a:rPr sz="2000" lang="he-IL">
+                <a:spcPts val="1500"/>
+              </a:spcAft>
+            </a:pPr>
+            <a:r>
+              <a:rPr sz="1800" lang="he-IL">
                 <a:solidFill>
                   <a:srgbClr val="0E1F18"/>
                 </a:solidFill>
                 <a:latin typeface="Arial"/>
               </a:rPr>
-              <a:t>משימות קטנות ומתאימות להתנדבות נופלות בין הכיסאות.  </a:t>
-            </a:r>
-            <a:r>
-              <a:rPr sz="1600" lang="he-IL">
+              <a:t>משימות קטנות — הסעה, עזרה בטופס, סחיבת רהיט — נופלות בין הכיסאות, כי אין ערוץ שמחבר אנשים.   </a:t>
+            </a:r>
+            <a:r>
+              <a:rPr sz="1300" lang="he-IL">
                 <a:solidFill>
                   <a:srgbClr val="0F6B4F"/>
                 </a:solidFill>
@@ -4918,8 +4918,8 @@
         </p:nvSpPr>
         <p:spPr>
           <a:xfrm>
-            <a:off x="640080" y="5623560"/>
-            <a:ext cx="10881360" cy="731520"/>
+            <a:off x="640080" y="5577840"/>
+            <a:ext cx="10881360" cy="777240"/>
           </a:xfrm>
           <a:prstGeom prst="roundRect">
             <a:avLst/>
@@ -4962,8 +4962,8 @@
         </p:nvSpPr>
         <p:spPr>
           <a:xfrm>
-            <a:off x="914400" y="5705856"/>
-            <a:ext cx="10332720" cy="566928"/>
+            <a:off x="914400" y="5650992"/>
+            <a:ext cx="10332720" cy="640080"/>
           </a:xfrm>
           <a:prstGeom prst="rect">
             <a:avLst/>
@@ -4985,13 +4985,13 @@
               </a:spcAft>
             </a:pPr>
             <a:r>
-              <a:rPr sz="1400" b="1" lang="he-IL">
+              <a:rPr sz="1500" b="1" lang="he-IL">
                 <a:solidFill>
                   <a:srgbClr val="0F6B4F"/>
                 </a:solidFill>
                 <a:latin typeface="Arial"/>
               </a:rPr>
-              <a:t>iHelp הופך את זה: הביקוש מתפרסם פעם אחת, וההיצע מגיע אליו.</a:t>
+              <a:t>iHelp הופך את הכיוון: במקום שתחפש עזרה, אתה מפרסם בקשה אחת — והעזרה מגיעה אליך.</a:t>
             </a:r>
           </a:p>
         </p:txBody>
@@ -5103,7 +5103,7 @@
                 </a:solidFill>
                 <a:latin typeface="Arial"/>
               </a:rPr>
-              <a:t>§1 · המוצר</a:t>
+              <a:t>§1 · מה המוצר עושה</a:t>
             </a:r>
           </a:p>
         </p:txBody>
@@ -5181,13 +5181,13 @@
               </a:spcAft>
             </a:pPr>
             <a:r>
-              <a:rPr sz="3400" b="1" lang="he-IL">
+              <a:rPr sz="3200" b="1" lang="he-IL">
                 <a:solidFill>
                   <a:srgbClr val="0E1F18"/>
                 </a:solidFill>
                 <a:latin typeface="Arial"/>
               </a:rPr>
-              <a:t>הפתרון: שוק עזרה הפוך</a:t>
+              <a:t>הפתרון: מפרסמים פעם אחת, ונעזרים</a:t>
             </a:r>
           </a:p>
         </p:txBody>
@@ -5200,7 +5200,7 @@
         </p:nvSpPr>
         <p:spPr>
           <a:xfrm>
-            <a:off x="548640" y="1481328"/>
+            <a:off x="548640" y="1463040"/>
             <a:ext cx="11064240" cy="31750"/>
           </a:xfrm>
           <a:prstGeom prst="rect">
@@ -5244,8 +5244,8 @@
         </p:nvSpPr>
         <p:spPr>
           <a:xfrm>
-            <a:off x="640080" y="1783080"/>
-            <a:ext cx="10881360" cy="3931920"/>
+            <a:off x="640080" y="1737360"/>
+            <a:ext cx="10881360" cy="3749039"/>
           </a:xfrm>
           <a:prstGeom prst="rect">
             <a:avLst/>
@@ -5263,20 +5263,20 @@
                 <a:spcPts val="0"/>
               </a:spcBef>
               <a:spcAft>
-                <a:spcPts val="1800"/>
-              </a:spcAft>
-            </a:pPr>
-            <a:r>
-              <a:rPr sz="2000" lang="he-IL">
+                <a:spcPts val="1500"/>
+              </a:spcAft>
+            </a:pPr>
+            <a:r>
+              <a:rPr sz="1800" lang="he-IL">
                 <a:solidFill>
                   <a:srgbClr val="0E1F18"/>
                 </a:solidFill>
                 <a:latin typeface="Arial"/>
               </a:rPr>
-              <a:t>מבקש מפרסם בקשה אחת — כותרת, תיאור, קטגוריה, תמונות, מיקום.  </a:t>
-            </a:r>
-            <a:r>
-              <a:rPr sz="1600" lang="he-IL">
+              <a:t>המבקש מפרסם בקשת עזרה אחת — עם כותרת, תיאור, קטגוריה ומיקום על המפה.   </a:t>
+            </a:r>
+            <a:r>
+              <a:rPr sz="1300" lang="he-IL">
                 <a:solidFill>
                   <a:srgbClr val="0F6B4F"/>
                 </a:solidFill>
@@ -5291,20 +5291,20 @@
                 <a:spcPts val="0"/>
               </a:spcBef>
               <a:spcAft>
-                <a:spcPts val="1800"/>
-              </a:spcAft>
-            </a:pPr>
-            <a:r>
-              <a:rPr sz="2000" lang="he-IL">
+                <a:spcPts val="1500"/>
+              </a:spcAft>
+            </a:pPr>
+            <a:r>
+              <a:rPr sz="1800" lang="he-IL">
                 <a:solidFill>
                   <a:srgbClr val="0E1F18"/>
                 </a:solidFill>
                 <a:latin typeface="Arial"/>
               </a:rPr>
-              <a:t>עוזרים מאומתים מתחרים בהצעות — התמחור שלהם: קבוע / התנדבות / לאחר העבודה.  </a:t>
-            </a:r>
-            <a:r>
-              <a:rPr sz="1600" lang="he-IL">
+              <a:t>עוזרים מאומתים באזור רואים את הבקשה, ומגישים הצעות. הם קובעים את המחיר: תשלום, התנדבות, או מחיר שייקבע בסוף.   </a:t>
+            </a:r>
+            <a:r>
+              <a:rPr sz="1300" lang="he-IL">
                 <a:solidFill>
                   <a:srgbClr val="0F6B4F"/>
                 </a:solidFill>
@@ -5319,20 +5319,20 @@
                 <a:spcPts val="0"/>
               </a:spcBef>
               <a:spcAft>
-                <a:spcPts val="1800"/>
-              </a:spcAft>
-            </a:pPr>
-            <a:r>
-              <a:rPr sz="2000" lang="he-IL">
+                <a:spcPts val="1500"/>
+              </a:spcAft>
+            </a:pPr>
+            <a:r>
+              <a:rPr sz="1800" lang="he-IL">
                 <a:solidFill>
                   <a:srgbClr val="0E1F18"/>
                 </a:solidFill>
                 <a:latin typeface="Arial"/>
               </a:rPr>
-              <a:t>המבקש משווה ובוחר הצעה אחת — כל השאר נסגרות אוטומטית.  </a:t>
-            </a:r>
-            <a:r>
-              <a:rPr sz="1600" lang="he-IL">
+              <a:t>המבקש רואה את כל ההצעות זו לצד זו, ובוחר אחת. כל שאר ההצעות נסגרות אוטומטית.   </a:t>
+            </a:r>
+            <a:r>
+              <a:rPr sz="1300" lang="he-IL">
                 <a:solidFill>
                   <a:srgbClr val="0F6B4F"/>
                 </a:solidFill>
@@ -5347,20 +5347,20 @@
                 <a:spcPts val="0"/>
               </a:spcBef>
               <a:spcAft>
-                <a:spcPts val="1800"/>
-              </a:spcAft>
-            </a:pPr>
-            <a:r>
-              <a:rPr sz="2000" lang="he-IL">
+                <a:spcPts val="1500"/>
+              </a:spcAft>
+            </a:pPr>
+            <a:r>
+              <a:rPr sz="1800" lang="he-IL">
                 <a:solidFill>
                   <a:srgbClr val="0E1F18"/>
                 </a:solidFill>
                 <a:latin typeface="Arial"/>
               </a:rPr>
-              <a:t>שני הצדדים מאשרים סיום, והמבקש מדרג את העוזר.  </a:t>
-            </a:r>
-            <a:r>
-              <a:rPr sz="1600" lang="he-IL">
+              <a:t>בסוף, שני הצדדים מאשרים שהעבודה בוצעה, והמבקש נותן דירוג לעוזר.   </a:t>
+            </a:r>
+            <a:r>
+              <a:rPr sz="1300" lang="he-IL">
                 <a:solidFill>
                   <a:srgbClr val="0F6B4F"/>
                 </a:solidFill>
@@ -5379,8 +5379,8 @@
         </p:nvSpPr>
         <p:spPr>
           <a:xfrm>
-            <a:off x="640080" y="5623560"/>
-            <a:ext cx="10881360" cy="731520"/>
+            <a:off x="640080" y="5577840"/>
+            <a:ext cx="10881360" cy="777240"/>
           </a:xfrm>
           <a:prstGeom prst="roundRect">
             <a:avLst/>
@@ -5423,8 +5423,8 @@
         </p:nvSpPr>
         <p:spPr>
           <a:xfrm>
-            <a:off x="914400" y="5705856"/>
-            <a:ext cx="10332720" cy="566928"/>
+            <a:off x="914400" y="5650992"/>
+            <a:ext cx="10332720" cy="640080"/>
           </a:xfrm>
           <a:prstGeom prst="rect">
             <a:avLst/>
@@ -5446,13 +5446,13 @@
               </a:spcAft>
             </a:pPr>
             <a:r>
-              <a:rPr sz="1400" b="1" lang="he-IL">
+              <a:rPr sz="1500" b="1" lang="he-IL">
                 <a:solidFill>
                   <a:srgbClr val="0F6B4F"/>
                 </a:solidFill>
                 <a:latin typeface="Arial"/>
               </a:rPr>
-              <a:t>ההיפוך הוא כל הרעיון — וכל כלל נאכף על ידי מסד הנתונים.</a:t>
+              <a:t>ההיפוך הזה הוא כל הרעיון — במקום שהביקוש ירדוף אחרי ההיצע, ההיצע מגיע לביקוש.</a:t>
             </a:r>
           </a:p>
         </p:txBody>
@@ -5564,7 +5564,7 @@
                 </a:solidFill>
                 <a:latin typeface="Arial"/>
               </a:rPr>
-              <a:t>§3–4 · משתמשים וערך</a:t>
+              <a:t>§3–4 · המשתמשים והערך העסקי</a:t>
             </a:r>
           </a:p>
         </p:txBody>
@@ -5642,13 +5642,13 @@
               </a:spcAft>
             </a:pPr>
             <a:r>
-              <a:rPr sz="3400" b="1" lang="he-IL">
+              <a:rPr sz="3200" b="1" lang="he-IL">
                 <a:solidFill>
                   <a:srgbClr val="0E1F18"/>
                 </a:solidFill>
                 <a:latin typeface="Arial"/>
               </a:rPr>
-              <a:t>משתמשים, לקוח, וערך עסקי</a:t>
+              <a:t>מי משתמש, ומאיפה מגיע הכסף</a:t>
             </a:r>
           </a:p>
         </p:txBody>
@@ -5661,7 +5661,7 @@
         </p:nvSpPr>
         <p:spPr>
           <a:xfrm>
-            <a:off x="548640" y="1481328"/>
+            <a:off x="548640" y="1463040"/>
             <a:ext cx="11064240" cy="31750"/>
           </a:xfrm>
           <a:prstGeom prst="rect">
@@ -5705,8 +5705,8 @@
         </p:nvSpPr>
         <p:spPr>
           <a:xfrm>
-            <a:off x="640080" y="1783080"/>
-            <a:ext cx="10881360" cy="3931920"/>
+            <a:off x="640080" y="1737360"/>
+            <a:ext cx="10881360" cy="3749039"/>
           </a:xfrm>
           <a:prstGeom prst="rect">
             <a:avLst/>
@@ -5724,20 +5724,20 @@
                 <a:spcPts val="0"/>
               </a:spcBef>
               <a:spcAft>
-                <a:spcPts val="1800"/>
-              </a:spcAft>
-            </a:pPr>
-            <a:r>
-              <a:rPr sz="2000" lang="he-IL">
+                <a:spcPts val="1500"/>
+              </a:spcAft>
+            </a:pPr>
+            <a:r>
+              <a:rPr sz="1800" lang="he-IL">
                 <a:solidFill>
                   <a:srgbClr val="0E1F18"/>
                 </a:solidFill>
                 <a:latin typeface="Arial"/>
               </a:rPr>
-              <a:t>חשבון אחד, כמה כובעים — ההרשאות לפי שורה, לא לפי חשבון.  </a:t>
-            </a:r>
-            <a:r>
-              <a:rPr sz="1600" lang="he-IL">
+              <a:t>יש סוג חשבון אחד. אותו אדם יכול לבקש עזרה בבוקר, ולעזור למישהו אחר בערב.   </a:t>
+            </a:r>
+            <a:r>
+              <a:rPr sz="1300" lang="he-IL">
                 <a:solidFill>
                   <a:srgbClr val="0F6B4F"/>
                 </a:solidFill>
@@ -5752,20 +5752,20 @@
                 <a:spcPts val="0"/>
               </a:spcBef>
               <a:spcAft>
-                <a:spcPts val="1800"/>
-              </a:spcAft>
-            </a:pPr>
-            <a:r>
-              <a:rPr sz="2000" lang="he-IL">
+                <a:spcPts val="1500"/>
+              </a:spcAft>
+            </a:pPr>
+            <a:r>
+              <a:rPr sz="1800" lang="he-IL">
                 <a:solidFill>
                   <a:srgbClr val="0E1F18"/>
                 </a:solidFill>
                 <a:latin typeface="Arial"/>
               </a:rPr>
-              <a:t>שלושה תפקידים: מבקש · עוזר מאומת (תג מקצועי אופציונלי) · מנהל.  </a:t>
-            </a:r>
-            <a:r>
-              <a:rPr sz="1600" lang="he-IL">
+              <a:t>שלושה תפקידים: מבקש עזרה, עוזר מאומת (עם אפשרות לתג 'מקצועי'), ומנהל שמאשר משתמשים.   </a:t>
+            </a:r>
+            <a:r>
+              <a:rPr sz="1300" lang="he-IL">
                 <a:solidFill>
                   <a:srgbClr val="0F6B4F"/>
                 </a:solidFill>
@@ -5780,20 +5780,20 @@
                 <a:spcPts val="0"/>
               </a:spcBef>
               <a:spcAft>
-                <a:spcPts val="1800"/>
-              </a:spcAft>
-            </a:pPr>
-            <a:r>
-              <a:rPr sz="2000" lang="he-IL">
+                <a:spcPts val="1500"/>
+              </a:spcAft>
+            </a:pPr>
+            <a:r>
+              <a:rPr sz="1800" lang="he-IL">
                 <a:solidFill>
                   <a:srgbClr val="0E1F18"/>
                 </a:solidFill>
                 <a:latin typeface="Arial"/>
               </a:rPr>
-              <a:t>הלקוח = העוזר המקצועי. iHelp הוא ערוץ lead-generation.  </a:t>
-            </a:r>
-            <a:r>
-              <a:rPr sz="1600" lang="he-IL">
+              <a:t>המבקשים לא משלמים — בכוונה. אם היינו גובים מהם, פחות אנשים היו מפרסמים בקשות, ואז אין למי לעזור.   </a:t>
+            </a:r>
+            <a:r>
+              <a:rPr sz="1300" lang="he-IL">
                 <a:solidFill>
                   <a:srgbClr val="0F6B4F"/>
                 </a:solidFill>
@@ -5808,20 +5808,20 @@
                 <a:spcPts val="0"/>
               </a:spcBef>
               <a:spcAft>
-                <a:spcPts val="1800"/>
-              </a:spcAft>
-            </a:pPr>
-            <a:r>
-              <a:rPr sz="2000" lang="he-IL">
+                <a:spcPts val="1500"/>
+              </a:spcAft>
+            </a:pPr>
+            <a:r>
+              <a:rPr sz="1800" lang="he-IL">
                 <a:solidFill>
                   <a:srgbClr val="0E1F18"/>
                 </a:solidFill>
                 <a:latin typeface="Arial"/>
               </a:rPr>
-              <a:t>מבקשים חינמיים בכוונה — חיוב הביקוש היה הורג את הנזילות.  </a:t>
-            </a:r>
-            <a:r>
-              <a:rPr sz="1600" lang="he-IL">
+              <a:t>הכסף מגיע מהעוזרים המקצועיים: iHelp מביא להם לקוחות קרובים שכבר צריכים שירות.   </a:t>
+            </a:r>
+            <a:r>
+              <a:rPr sz="1300" lang="he-IL">
                 <a:solidFill>
                   <a:srgbClr val="0F6B4F"/>
                 </a:solidFill>
@@ -5840,8 +5840,8 @@
         </p:nvSpPr>
         <p:spPr>
           <a:xfrm>
-            <a:off x="640080" y="5623560"/>
-            <a:ext cx="10881360" cy="731520"/>
+            <a:off x="640080" y="5577840"/>
+            <a:ext cx="10881360" cy="777240"/>
           </a:xfrm>
           <a:prstGeom prst="roundRect">
             <a:avLst/>
@@ -5884,8 +5884,8 @@
         </p:nvSpPr>
         <p:spPr>
           <a:xfrm>
-            <a:off x="914400" y="5705856"/>
-            <a:ext cx="10332720" cy="566928"/>
+            <a:off x="914400" y="5650992"/>
+            <a:ext cx="10332720" cy="640080"/>
           </a:xfrm>
           <a:prstGeom prst="rect">
             <a:avLst/>
@@ -5907,13 +5907,13 @@
               </a:spcAft>
             </a:pPr>
             <a:r>
-              <a:rPr sz="1400" b="1" lang="he-IL">
+              <a:rPr sz="1500" b="1" lang="he-IL">
                 <a:solidFill>
                   <a:srgbClr val="0F6B4F"/>
                 </a:solidFill>
                 <a:latin typeface="Arial"/>
               </a:rPr>
-              <a:t>אמון סימטרי: שני הצדדים עוברים אימות זהות לפני העסקה הראשונה.</a:t>
+              <a:t>כל משתמש — גם מבקש וגם עוזר — עובר אימות זהות לפני העסקה הראשונה. האמון הוא דו-כיווני.</a:t>
             </a:r>
           </a:p>
         </p:txBody>
@@ -6025,7 +6025,7 @@
                 </a:solidFill>
                 <a:latin typeface="Arial"/>
               </a:rPr>
-              <a:t>§8 · הדגמה</a:t>
+              <a:t>§8 · התהליכים המרכזיים</a:t>
             </a:r>
           </a:p>
         </p:txBody>
@@ -6103,13 +6103,13 @@
               </a:spcAft>
             </a:pPr>
             <a:r>
-              <a:rPr sz="3400" b="1" lang="he-IL">
+              <a:rPr sz="3000" b="1" lang="he-IL">
                 <a:solidFill>
                   <a:srgbClr val="FFFFFF"/>
                 </a:solidFill>
                 <a:latin typeface="Arial"/>
               </a:rPr>
-              <a:t>הדגמה חיה — לולאת הליבה</a:t>
+              <a:t>הדגמה חיה — כל המסע מהתחלה לסוף</a:t>
             </a:r>
           </a:p>
         </p:txBody>
@@ -6122,7 +6122,7 @@
         </p:nvSpPr>
         <p:spPr>
           <a:xfrm>
-            <a:off x="548640" y="1481328"/>
+            <a:off x="548640" y="1463040"/>
             <a:ext cx="11064240" cy="31750"/>
           </a:xfrm>
           <a:prstGeom prst="rect">
@@ -6226,7 +6226,7 @@
         </p:nvSpPr>
         <p:spPr>
           <a:xfrm>
-            <a:off x="640080" y="1746504"/>
+            <a:off x="640080" y="1728216"/>
             <a:ext cx="9921240" cy="411480"/>
           </a:xfrm>
           <a:prstGeom prst="rect">
@@ -6269,7 +6269,7 @@
         <p:spPr>
           <a:xfrm>
             <a:off x="640080" y="2148840"/>
-            <a:ext cx="9921240" cy="365760"/>
+            <a:ext cx="9921240" cy="384048"/>
           </a:xfrm>
           <a:prstGeom prst="rect">
             <a:avLst/>
@@ -6291,13 +6291,13 @@
               </a:spcAft>
             </a:pPr>
             <a:r>
-              <a:rPr sz="1400" b="0" lang="he-IL">
+              <a:rPr sz="1500" b="0" lang="he-IL">
                 <a:solidFill>
                   <a:srgbClr val="D9E8E1"/>
                 </a:solidFill>
                 <a:latin typeface="Arial"/>
               </a:rPr>
-              <a:t>כותרת, תיאור, תמונה, מיקום → סטטוס "פתוחה"</a:t>
+              <a:t>המבקש כותב מה הוא צריך, מוסיף מיקום, ומפרסם. הבקשה עולה לפיד כ"פתוחה".</a:t>
             </a:r>
           </a:p>
         </p:txBody>
@@ -6310,7 +6310,7 @@
         </p:nvSpPr>
         <p:spPr>
           <a:xfrm>
-            <a:off x="10744200" y="2679191"/>
+            <a:off x="10744200" y="2697480"/>
             <a:ext cx="658368" cy="658368"/>
           </a:xfrm>
           <a:prstGeom prst="roundRect">
@@ -6370,7 +6370,7 @@
         </p:nvSpPr>
         <p:spPr>
           <a:xfrm>
-            <a:off x="640080" y="2642615"/>
+            <a:off x="640080" y="2642616"/>
             <a:ext cx="9921240" cy="411480"/>
           </a:xfrm>
           <a:prstGeom prst="rect">
@@ -6412,8 +6412,8 @@
         </p:nvSpPr>
         <p:spPr>
           <a:xfrm>
-            <a:off x="640080" y="3044951"/>
-            <a:ext cx="9921240" cy="365760"/>
+            <a:off x="640080" y="3063240"/>
+            <a:ext cx="9921240" cy="384048"/>
           </a:xfrm>
           <a:prstGeom prst="rect">
             <a:avLst/>
@@ -6435,13 +6435,13 @@
               </a:spcAft>
             </a:pPr>
             <a:r>
-              <a:rPr sz="1400" b="0" lang="he-IL">
+              <a:rPr sz="1500" b="0" lang="he-IL">
                 <a:solidFill>
                   <a:srgbClr val="D9E8E1"/>
                 </a:solidFill>
                 <a:latin typeface="Arial"/>
               </a:rPr>
-              <a:t>עוזר בוחר עמדת תמחור — הצעה אטומה, לא רואה מתחרים</a:t>
+              <a:t>עוזר רואה את הבקשה, ומגיש הצעה עם מחיר. הוא לא רואה מה המתחרים הציעו.</a:t>
             </a:r>
           </a:p>
         </p:txBody>
@@ -6454,7 +6454,7 @@
         </p:nvSpPr>
         <p:spPr>
           <a:xfrm>
-            <a:off x="10744200" y="3575303"/>
+            <a:off x="10744200" y="3611880"/>
             <a:ext cx="658368" cy="658368"/>
           </a:xfrm>
           <a:prstGeom prst="roundRect">
@@ -6514,7 +6514,7 @@
         </p:nvSpPr>
         <p:spPr>
           <a:xfrm>
-            <a:off x="640080" y="3538727"/>
+            <a:off x="640080" y="3557016"/>
             <a:ext cx="9921240" cy="411480"/>
           </a:xfrm>
           <a:prstGeom prst="rect">
@@ -6543,7 +6543,7 @@
                 </a:solidFill>
                 <a:latin typeface="Arial"/>
               </a:rPr>
-              <a:t>השוואה + בחירה</a:t>
+              <a:t>השוואה ובחירה</a:t>
             </a:r>
           </a:p>
         </p:txBody>
@@ -6556,8 +6556,8 @@
         </p:nvSpPr>
         <p:spPr>
           <a:xfrm>
-            <a:off x="640080" y="3941063"/>
-            <a:ext cx="9921240" cy="365760"/>
+            <a:off x="640080" y="3977640"/>
+            <a:ext cx="9921240" cy="384048"/>
           </a:xfrm>
           <a:prstGeom prst="rect">
             <a:avLst/>
@@ -6579,13 +6579,13 @@
               </a:spcAft>
             </a:pPr>
             <a:r>
-              <a:rPr sz="1400" b="0" lang="he-IL">
+              <a:rPr sz="1500" b="0" lang="he-IL">
                 <a:solidFill>
                   <a:srgbClr val="D9E8E1"/>
                 </a:solidFill>
                 <a:latin typeface="Arial"/>
               </a:rPr>
-              <a:t>בחירה אטומית: סוגרת את כל השאר בטרנזקציה אחת</a:t>
+              <a:t>המבקש רואה את כל ההצעות יחד, ובוחר אחת. כל השאר נסגרות אוטומטית.</a:t>
             </a:r>
           </a:p>
         </p:txBody>
@@ -6598,7 +6598,7 @@
         </p:nvSpPr>
         <p:spPr>
           <a:xfrm>
-            <a:off x="10744200" y="4471416"/>
+            <a:off x="10744200" y="4526280"/>
             <a:ext cx="658368" cy="658368"/>
           </a:xfrm>
           <a:prstGeom prst="roundRect">
@@ -6658,7 +6658,7 @@
         </p:nvSpPr>
         <p:spPr>
           <a:xfrm>
-            <a:off x="640080" y="4434840"/>
+            <a:off x="640080" y="4471416"/>
             <a:ext cx="9921240" cy="411480"/>
           </a:xfrm>
           <a:prstGeom prst="rect">
@@ -6687,7 +6687,7 @@
                 </a:solidFill>
                 <a:latin typeface="Arial"/>
               </a:rPr>
-              <a:t>סיום דו-צדדי</a:t>
+              <a:t>אישור דו-צדדי</a:t>
             </a:r>
           </a:p>
         </p:txBody>
@@ -6700,8 +6700,8 @@
         </p:nvSpPr>
         <p:spPr>
           <a:xfrm>
-            <a:off x="640080" y="4837176"/>
-            <a:ext cx="9921240" cy="365760"/>
+            <a:off x="640080" y="4892040"/>
+            <a:ext cx="9921240" cy="384048"/>
           </a:xfrm>
           <a:prstGeom prst="rect">
             <a:avLst/>
@@ -6723,13 +6723,13 @@
               </a:spcAft>
             </a:pPr>
             <a:r>
-              <a:rPr sz="1400" b="0" lang="he-IL">
+              <a:rPr sz="1500" b="0" lang="he-IL">
                 <a:solidFill>
                   <a:srgbClr val="D9E8E1"/>
                 </a:solidFill>
                 <a:latin typeface="Arial"/>
               </a:rPr>
-              <a:t>שני הצדדים מאשרים → רק אז "הושלמה"</a:t>
+              <a:t>שני הצדדים מאשרים שהעבודה בוצעה — רק אז הבקשה נסגרת.</a:t>
             </a:r>
           </a:p>
         </p:txBody>
@@ -6742,7 +6742,7 @@
         </p:nvSpPr>
         <p:spPr>
           <a:xfrm>
-            <a:off x="10744200" y="5367527"/>
+            <a:off x="10744200" y="5440680"/>
             <a:ext cx="658368" cy="658368"/>
           </a:xfrm>
           <a:prstGeom prst="roundRect">
@@ -6802,7 +6802,7 @@
         </p:nvSpPr>
         <p:spPr>
           <a:xfrm>
-            <a:off x="640080" y="5330951"/>
+            <a:off x="640080" y="5385816"/>
             <a:ext cx="9921240" cy="411480"/>
           </a:xfrm>
           <a:prstGeom prst="rect">
@@ -6844,8 +6844,8 @@
         </p:nvSpPr>
         <p:spPr>
           <a:xfrm>
-            <a:off x="640080" y="5733288"/>
-            <a:ext cx="9921240" cy="365760"/>
+            <a:off x="640080" y="5806440"/>
+            <a:ext cx="9921240" cy="384048"/>
           </a:xfrm>
           <a:prstGeom prst="rect">
             <a:avLst/>
@@ -6867,13 +6867,13 @@
               </a:spcAft>
             </a:pPr>
             <a:r>
-              <a:rPr sz="1400" b="0" lang="he-IL">
+              <a:rPr sz="1500" b="0" lang="he-IL">
                 <a:solidFill>
                   <a:srgbClr val="D9E8E1"/>
                 </a:solidFill>
                 <a:latin typeface="Arial"/>
               </a:rPr>
-              <a:t>המבקש מדרג → עמוד מוניטין מתעדכן</a:t>
+              <a:t>המבקש נותן לעוזר דירוג, שנשמר בפרופיל הציבורי שלו.</a:t>
             </a:r>
           </a:p>
         </p:txBody>
@@ -6985,7 +6985,7 @@
                 </a:solidFill>
                 <a:latin typeface="Arial"/>
               </a:rPr>
-              <a:t>§5–6 · ארכיטקטורה</a:t>
+              <a:t>§5–6 · איך המערכת בנויה</a:t>
             </a:r>
           </a:p>
         </p:txBody>
@@ -7063,13 +7063,13 @@
               </a:spcAft>
             </a:pPr>
             <a:r>
-              <a:rPr sz="3400" b="1" lang="he-IL">
+              <a:rPr sz="3200" b="1" lang="he-IL">
                 <a:solidFill>
                   <a:srgbClr val="0E1F18"/>
                 </a:solidFill>
                 <a:latin typeface="Arial"/>
               </a:rPr>
-              <a:t>ארכיטקטורה: המסד הוא הסמכות</a:t>
+              <a:t>הארכיטקטורה: מסד הנתונים הוא הבוס</a:t>
             </a:r>
           </a:p>
         </p:txBody>
@@ -7082,7 +7082,7 @@
         </p:nvSpPr>
         <p:spPr>
           <a:xfrm>
-            <a:off x="548640" y="1481328"/>
+            <a:off x="548640" y="1463040"/>
             <a:ext cx="11064240" cy="31750"/>
           </a:xfrm>
           <a:prstGeom prst="rect">
@@ -7126,8 +7126,8 @@
         </p:nvSpPr>
         <p:spPr>
           <a:xfrm>
-            <a:off x="640080" y="1783080"/>
-            <a:ext cx="10881360" cy="3931920"/>
+            <a:off x="640080" y="1737360"/>
+            <a:ext cx="10881360" cy="3749039"/>
           </a:xfrm>
           <a:prstGeom prst="rect">
             <a:avLst/>
@@ -7145,7 +7145,7 @@
                 <a:spcPts val="0"/>
               </a:spcBef>
               <a:spcAft>
-                <a:spcPts val="1600"/>
+                <a:spcPts val="1500"/>
               </a:spcAft>
             </a:pPr>
             <a:r>
@@ -7155,10 +7155,10 @@
                 </a:solidFill>
                 <a:latin typeface="Arial"/>
               </a:rPr>
-              <a:t>שלוש שכבות: React · Next.js על Vercel · Supabase (Postgres + RLS, Auth, Storage).  </a:t>
-            </a:r>
-            <a:r>
-              <a:rPr sz="1400" lang="he-IL">
+              <a:t>המערכת בנויה משלושה חלקים: הדפדפן שהמשתמש רואה, שרת Next.js שרץ בענן (Vercel), ומסד נתונים Supabase.   </a:t>
+            </a:r>
+            <a:r>
+              <a:rPr sz="1300" lang="he-IL">
                 <a:solidFill>
                   <a:srgbClr val="0F6B4F"/>
                 </a:solidFill>
@@ -7173,7 +7173,7 @@
                 <a:spcPts val="0"/>
               </a:spcBef>
               <a:spcAft>
-                <a:spcPts val="1600"/>
+                <a:spcPts val="1500"/>
               </a:spcAft>
             </a:pPr>
             <a:r>
@@ -7183,10 +7183,10 @@
                 </a:solidFill>
                 <a:latin typeface="Arial"/>
               </a:rPr>
-              <a:t>קריאות = Server Components · כתיבות = Server Actions · אין שרת API נפרד.  </a:t>
-            </a:r>
-            <a:r>
-              <a:rPr sz="1400" lang="he-IL">
+              <a:t>הרעיון המרכזי: כל כלל של 'מי מותר לו לעשות מה' נאכף בתוך מסד הנתונים עצמו — לא בקוד של האתר.   </a:t>
+            </a:r>
+            <a:r>
+              <a:rPr sz="1300" lang="he-IL">
                 <a:solidFill>
                   <a:srgbClr val="0F6B4F"/>
                 </a:solidFill>
@@ -7201,7 +7201,7 @@
                 <a:spcPts val="0"/>
               </a:spcBef>
               <a:spcAft>
-                <a:spcPts val="1600"/>
+                <a:spcPts val="1500"/>
               </a:spcAft>
             </a:pPr>
             <a:r>
@@ -7211,10 +7211,10 @@
                 </a:solidFill>
                 <a:latin typeface="Arial"/>
               </a:rPr>
-              <a:t>כל הרשאה נאכפת ב-Postgres: RLS + 11 פונקציות SECURITY DEFINER + טריגרים.  </a:t>
-            </a:r>
-            <a:r>
-              <a:rPr sz="1400" lang="he-IL">
+              <a:t>למה זה חשוב? כי גם אם מישהו ינסה לעקוף את האתר ולפנות ישירות למסד — המסד יסרב לו.   </a:t>
+            </a:r>
+            <a:r>
+              <a:rPr sz="1300" lang="he-IL">
                 <a:solidFill>
                   <a:srgbClr val="0F6B4F"/>
                 </a:solidFill>
@@ -7229,7 +7229,7 @@
                 <a:spcPts val="0"/>
               </a:spcBef>
               <a:spcAft>
-                <a:spcPts val="1600"/>
+                <a:spcPts val="1500"/>
               </a:spcAft>
             </a:pPr>
             <a:r>
@@ -7239,10 +7239,10 @@
                 </a:solidFill>
                 <a:latin typeface="Arial"/>
               </a:rPr>
-              <a:t>האפליקציה לעולם לא משתמשת במפתח service-role.  </a:t>
-            </a:r>
-            <a:r>
-              <a:rPr sz="1400" lang="he-IL">
+              <a:t>הקוד של האתר רק מראה הודעות ידידותיות. האבטחה האמיתית יושבת שכבה אחת עמוק יותר, במסד.   </a:t>
+            </a:r>
+            <a:r>
+              <a:rPr sz="1300" lang="he-IL">
                 <a:solidFill>
                   <a:srgbClr val="0F6B4F"/>
                 </a:solidFill>
@@ -7261,8 +7261,8 @@
         </p:nvSpPr>
         <p:spPr>
           <a:xfrm>
-            <a:off x="640080" y="5623560"/>
-            <a:ext cx="10881360" cy="731520"/>
+            <a:off x="640080" y="5577840"/>
+            <a:ext cx="10881360" cy="777240"/>
           </a:xfrm>
           <a:prstGeom prst="roundRect">
             <a:avLst/>
@@ -7305,8 +7305,8 @@
         </p:nvSpPr>
         <p:spPr>
           <a:xfrm>
-            <a:off x="914400" y="5705856"/>
-            <a:ext cx="10332720" cy="566928"/>
+            <a:off x="914400" y="5650992"/>
+            <a:ext cx="10332720" cy="640080"/>
           </a:xfrm>
           <a:prstGeom prst="rect">
             <a:avLst/>
@@ -7328,13 +7328,13 @@
               </a:spcAft>
             </a:pPr>
             <a:r>
-              <a:rPr sz="1400" b="1" lang="he-IL">
+              <a:rPr sz="1500" b="1" lang="he-IL">
                 <a:solidFill>
                   <a:srgbClr val="0F6B4F"/>
                 </a:solidFill>
                 <a:latin typeface="Arial"/>
               </a:rPr>
-              <a:t>ההחלטה המרכזית: פיצול profiles/profiles_private — RLS היא ברמת שורה.</a:t>
+              <a:t>ההחלטה שאני הכי גאה בה: הפרדתי מידע פרטי (טלפון, מיקום) לטבלה נפרדת, שרק בעליה יכול לקרוא.</a:t>
             </a:r>
           </a:p>
         </p:txBody>
@@ -7524,13 +7524,13 @@
               </a:spcAft>
             </a:pPr>
             <a:r>
-              <a:rPr sz="3400" b="1" lang="he-IL">
+              <a:rPr sz="3200" b="1" lang="he-IL">
                 <a:solidFill>
                   <a:srgbClr val="0E1F18"/>
                 </a:solidFill>
                 <a:latin typeface="Arial"/>
               </a:rPr>
-              <a:t>מסד הנתונים</a:t>
+              <a:t>איך בנוי מסד הנתונים</a:t>
             </a:r>
           </a:p>
         </p:txBody>
@@ -7543,7 +7543,7 @@
         </p:nvSpPr>
         <p:spPr>
           <a:xfrm>
-            <a:off x="548640" y="1481328"/>
+            <a:off x="548640" y="1463040"/>
             <a:ext cx="11064240" cy="31750"/>
           </a:xfrm>
           <a:prstGeom prst="rect">
@@ -7587,8 +7587,8 @@
         </p:nvSpPr>
         <p:spPr>
           <a:xfrm>
-            <a:off x="640080" y="1783080"/>
-            <a:ext cx="10881360" cy="3931920"/>
+            <a:off x="640080" y="1737360"/>
+            <a:ext cx="10881360" cy="3749039"/>
           </a:xfrm>
           <a:prstGeom prst="rect">
             <a:avLst/>
@@ -7606,20 +7606,20 @@
                 <a:spcPts val="0"/>
               </a:spcBef>
               <a:spcAft>
-                <a:spcPts val="1700"/>
-              </a:spcAft>
-            </a:pPr>
-            <a:r>
-              <a:rPr sz="1900" lang="he-IL">
+                <a:spcPts val="1500"/>
+              </a:spcAft>
+            </a:pPr>
+            <a:r>
+              <a:rPr sz="1800" lang="he-IL">
                 <a:solidFill>
                   <a:srgbClr val="0E1F18"/>
                 </a:solidFill>
                 <a:latin typeface="Arial"/>
               </a:rPr>
-              <a:t>7 טבלאות · 14 מיגרציות SQL — הן מקור האמת.  </a:t>
-            </a:r>
-            <a:r>
-              <a:rPr sz="1500" lang="he-IL">
+              <a:t>יש 7 טבלאות: משתמשים, בקשות, הצעות, דירוגים, אימותים ועוד. הכול מקושר ביניהם.   </a:t>
+            </a:r>
+            <a:r>
+              <a:rPr sz="1300" lang="he-IL">
                 <a:solidFill>
                   <a:srgbClr val="0F6B4F"/>
                 </a:solidFill>
@@ -7634,20 +7634,20 @@
                 <a:spcPts val="0"/>
               </a:spcBef>
               <a:spcAft>
-                <a:spcPts val="1700"/>
-              </a:spcAft>
-            </a:pPr>
-            <a:r>
-              <a:rPr sz="1900" lang="he-IL">
+                <a:spcPts val="1500"/>
+              </a:spcAft>
+            </a:pPr>
+            <a:r>
+              <a:rPr sz="1800" lang="he-IL">
                 <a:solidFill>
                   <a:srgbClr val="0E1F18"/>
                 </a:solidFill>
                 <a:latin typeface="Arial"/>
               </a:rPr>
-              <a:t>מכונת מצבים: open → has_offers → assigned → completed → rated.  </a:t>
-            </a:r>
-            <a:r>
-              <a:rPr sz="1500" lang="he-IL">
+              <a:t>לכל בקשה יש 'מסלול חיים' קבוע: פתוחה ← יש הצעות ← שובצה ← הושלמה ← דורגה.   </a:t>
+            </a:r>
+            <a:r>
+              <a:rPr sz="1300" lang="he-IL">
                 <a:solidFill>
                   <a:srgbClr val="0F6B4F"/>
                 </a:solidFill>
@@ -7662,20 +7662,20 @@
                 <a:spcPts val="0"/>
               </a:spcBef>
               <a:spcAft>
-                <a:spcPts val="1700"/>
-              </a:spcAft>
-            </a:pPr>
-            <a:r>
-              <a:rPr sz="1900" lang="he-IL">
+                <a:spcPts val="1500"/>
+              </a:spcAft>
+            </a:pPr>
+            <a:r>
+              <a:rPr sz="1800" lang="he-IL">
                 <a:solidFill>
                   <a:srgbClr val="0E1F18"/>
                 </a:solidFill>
                 <a:latin typeface="Arial"/>
               </a:rPr>
-              <a:t>enums לערכים סגורים → מצב לא-חוקי הופך לשגיאת טיפוס.  </a:t>
-            </a:r>
-            <a:r>
-              <a:rPr sz="1500" lang="he-IL">
+              <a:t>המסלול הזה נאכף במסד — אי אפשר לדלג שלב או לחזור אחורה בצורה לא חוקית.   </a:t>
+            </a:r>
+            <a:r>
+              <a:rPr sz="1300" lang="he-IL">
                 <a:solidFill>
                   <a:srgbClr val="0F6B4F"/>
                 </a:solidFill>
@@ -7690,20 +7690,20 @@
                 <a:spcPts val="0"/>
               </a:spcBef>
               <a:spcAft>
-                <a:spcPts val="1700"/>
-              </a:spcAft>
-            </a:pPr>
-            <a:r>
-              <a:rPr sz="1900" lang="he-IL">
+                <a:spcPts val="1500"/>
+              </a:spcAft>
+            </a:pPr>
+            <a:r>
+              <a:rPr sz="1800" lang="he-IL">
                 <a:solidFill>
                   <a:srgbClr val="0E1F18"/>
                 </a:solidFill>
                 <a:latin typeface="Arial"/>
               </a:rPr>
-              <a:t>אינדקס לכל שאילתה חמה · כל מדיניות RLS נושאת את הצדקתה.  </a:t>
-            </a:r>
-            <a:r>
-              <a:rPr sz="1500" lang="he-IL">
+              <a:t>כל כלל הרשאה במסד מלווה בהערה שמסבירה בדיוק איזה חוק מוצרי הוא שומר.   </a:t>
+            </a:r>
+            <a:r>
+              <a:rPr sz="1300" lang="he-IL">
                 <a:solidFill>
                   <a:srgbClr val="0F6B4F"/>
                 </a:solidFill>
@@ -7722,8 +7722,8 @@
         </p:nvSpPr>
         <p:spPr>
           <a:xfrm>
-            <a:off x="640080" y="5623560"/>
-            <a:ext cx="10881360" cy="731520"/>
+            <a:off x="640080" y="5577840"/>
+            <a:ext cx="10881360" cy="777240"/>
           </a:xfrm>
           <a:prstGeom prst="roundRect">
             <a:avLst/>
@@ -7766,8 +7766,8 @@
         </p:nvSpPr>
         <p:spPr>
           <a:xfrm>
-            <a:off x="914400" y="5705856"/>
-            <a:ext cx="10332720" cy="566928"/>
+            <a:off x="914400" y="5650992"/>
+            <a:ext cx="10332720" cy="640080"/>
           </a:xfrm>
           <a:prstGeom prst="rect">
             <a:avLst/>
@@ -7789,13 +7789,13 @@
               </a:spcAft>
             </a:pPr>
             <a:r>
-              <a:rPr sz="1400" b="1" lang="he-IL">
+              <a:rPr sz="1500" b="1" lang="he-IL">
                 <a:solidFill>
                   <a:srgbClr val="0F6B4F"/>
                 </a:solidFill>
                 <a:latin typeface="Arial"/>
               </a:rPr>
-              <a:t>דוגמה: הצעות אטומות — רק בעל ההצעה ובעל הבקשה קוראים אותה.</a:t>
+              <a:t>דוגמה: הצעה של עוזר גלויה רק לו ולמבקש. שום עוזר אחר לא רואה כמה המתחרים הציעו.</a:t>
             </a:r>
           </a:p>
         </p:txBody>
@@ -7907,7 +7907,7 @@
                 </a:solidFill>
                 <a:latin typeface="Arial"/>
               </a:rPr>
-              <a:t>§9 · בדיקות</a:t>
+              <a:t>§9 · הבדיקות</a:t>
             </a:r>
           </a:p>
         </p:txBody>
@@ -7985,13 +7985,13 @@
               </a:spcAft>
             </a:pPr>
             <a:r>
-              <a:rPr sz="3400" b="1" lang="he-IL">
+              <a:rPr sz="3200" b="1" lang="he-IL">
                 <a:solidFill>
                   <a:srgbClr val="0E1F18"/>
                 </a:solidFill>
                 <a:latin typeface="Arial"/>
               </a:rPr>
-              <a:t>בדיקות: מוכיחים שהמסד אומר "לא"</a:t>
+              <a:t>הבדיקות: מוכיחים שהמערכת באמת מאובטחת</a:t>
             </a:r>
           </a:p>
         </p:txBody>
@@ -8004,7 +8004,7 @@
         </p:nvSpPr>
         <p:spPr>
           <a:xfrm>
-            <a:off x="548640" y="1481328"/>
+            <a:off x="548640" y="1463040"/>
             <a:ext cx="11064240" cy="31750"/>
           </a:xfrm>
           <a:prstGeom prst="rect">
@@ -8048,8 +8048,8 @@
         </p:nvSpPr>
         <p:spPr>
           <a:xfrm>
-            <a:off x="640080" y="1783080"/>
-            <a:ext cx="10881360" cy="3931920"/>
+            <a:off x="640080" y="1737360"/>
+            <a:ext cx="10881360" cy="3749039"/>
           </a:xfrm>
           <a:prstGeom prst="rect">
             <a:avLst/>
@@ -8067,20 +8067,20 @@
                 <a:spcPts val="0"/>
               </a:spcBef>
               <a:spcAft>
-                <a:spcPts val="1700"/>
-              </a:spcAft>
-            </a:pPr>
-            <a:r>
-              <a:rPr sz="1900" lang="he-IL">
+                <a:spcPts val="1500"/>
+              </a:spcAft>
+            </a:pPr>
+            <a:r>
+              <a:rPr sz="1800" lang="he-IL">
                 <a:solidFill>
                   <a:srgbClr val="0E1F18"/>
                 </a:solidFill>
                 <a:latin typeface="Arial"/>
               </a:rPr>
-              <a:t>62 בדיקות אוטומטיות (61 Vitest + Playwright E2E) — כולן עוברות.  </a:t>
-            </a:r>
-            <a:r>
-              <a:rPr sz="1500" lang="he-IL">
+              <a:t>כתבתי 62 בדיקות אוטומטיות שרצות על המערכת, וכולן עוברות.   </a:t>
+            </a:r>
+            <a:r>
+              <a:rPr sz="1300" lang="he-IL">
                 <a:solidFill>
                   <a:srgbClr val="0F6B4F"/>
                 </a:solidFill>
@@ -8095,20 +8095,20 @@
                 <a:spcPts val="0"/>
               </a:spcBef>
               <a:spcAft>
-                <a:spcPts val="1700"/>
-              </a:spcAft>
-            </a:pPr>
-            <a:r>
-              <a:rPr sz="1900" lang="he-IL">
+                <a:spcPts val="1500"/>
+              </a:spcAft>
+            </a:pPr>
+            <a:r>
+              <a:rPr sz="1800" lang="he-IL">
                 <a:solidFill>
                   <a:srgbClr val="0E1F18"/>
                 </a:solidFill>
                 <a:latin typeface="Arial"/>
               </a:rPr>
-              <a:t>15 בדיקות הרשאה תוקפות את המסד כמשתמש הלא-נכון ומוודאות דחייה.  </a:t>
-            </a:r>
-            <a:r>
-              <a:rPr sz="1500" lang="he-IL">
+              <a:t>הבדיקות המעניינות ביותר מנסות לפרוץ: הן מתחזות למשתמש לא-מורשה ומנסות פעולה אסורה.   </a:t>
+            </a:r>
+            <a:r>
+              <a:rPr sz="1300" lang="he-IL">
                 <a:solidFill>
                   <a:srgbClr val="0F6B4F"/>
                 </a:solidFill>
@@ -8123,20 +8123,20 @@
                 <a:spcPts val="0"/>
               </a:spcBef>
               <a:spcAft>
-                <a:spcPts val="1700"/>
-              </a:spcAft>
-            </a:pPr>
-            <a:r>
-              <a:rPr sz="1900" lang="he-IL">
+                <a:spcPts val="1500"/>
+              </a:spcAft>
+            </a:pPr>
+            <a:r>
+              <a:rPr sz="1800" lang="he-IL">
                 <a:solidFill>
                   <a:srgbClr val="0E1F18"/>
                 </a:solidFill>
                 <a:latin typeface="Arial"/>
               </a:rPr>
-              <a:t>בדיקת happy-path בלבד לא מוכיחה כלום — בודקים גם דחייה.  </a:t>
-            </a:r>
-            <a:r>
-              <a:rPr sz="1500" lang="he-IL">
+              <a:t>בדיקה שרק בודקת שהכול עובד לא מספיקה — אני בודק גם שהמערכת חוסמת את מי שאסור לו.   </a:t>
+            </a:r>
+            <a:r>
+              <a:rPr sz="1300" lang="he-IL">
                 <a:solidFill>
                   <a:srgbClr val="0F6B4F"/>
                 </a:solidFill>
@@ -8151,20 +8151,20 @@
                 <a:spcPts val="0"/>
               </a:spcBef>
               <a:spcAft>
-                <a:spcPts val="1700"/>
-              </a:spcAft>
-            </a:pPr>
-            <a:r>
-              <a:rPr sz="1900" lang="he-IL">
+                <a:spcPts val="1500"/>
+              </a:spcAft>
+            </a:pPr>
+            <a:r>
+              <a:rPr sz="1800" lang="he-IL">
                 <a:solidFill>
                   <a:srgbClr val="0E1F18"/>
                 </a:solidFill>
                 <a:latin typeface="Arial"/>
               </a:rPr>
-              <a:t>E2E מלא מריץ את כל הלולאה בשני דפדפנים נפרדים.  </a:t>
-            </a:r>
-            <a:r>
-              <a:rPr sz="1500" lang="he-IL">
+              <a:t>יש גם בדיקה שמריצה את כל המסע — פרסום, הצעה, בחירה, סיום — בשני דפדפנים במקביל, כמו משתמשים אמיתיים.   </a:t>
+            </a:r>
+            <a:r>
+              <a:rPr sz="1300" lang="he-IL">
                 <a:solidFill>
                   <a:srgbClr val="0F6B4F"/>
                 </a:solidFill>
@@ -8183,8 +8183,8 @@
         </p:nvSpPr>
         <p:spPr>
           <a:xfrm>
-            <a:off x="640080" y="5623560"/>
-            <a:ext cx="10881360" cy="731520"/>
+            <a:off x="640080" y="5577840"/>
+            <a:ext cx="10881360" cy="777240"/>
           </a:xfrm>
           <a:prstGeom prst="roundRect">
             <a:avLst/>
@@ -8227,8 +8227,8 @@
         </p:nvSpPr>
         <p:spPr>
           <a:xfrm>
-            <a:off x="914400" y="5705856"/>
-            <a:ext cx="10332720" cy="566928"/>
+            <a:off x="914400" y="5650992"/>
+            <a:ext cx="10332720" cy="640080"/>
           </a:xfrm>
           <a:prstGeom prst="rect">
             <a:avLst/>
@@ -8250,13 +8250,13 @@
               </a:spcAft>
             </a:pPr>
             <a:r>
-              <a:rPr sz="1400" b="1" lang="he-IL">
+              <a:rPr sz="1500" b="1" lang="he-IL">
                 <a:solidFill>
                   <a:srgbClr val="0F6B4F"/>
                 </a:solidFill>
                 <a:latin typeface="Arial"/>
               </a:rPr>
-              <a:t>הבדיקות מאורגנות סביב טענת האבטחה: שהמסד אוכף כל כלל.</a:t>
+              <a:t>כל הבדיקות בנויות סביב הטענה המרכזית: שמסד הנתונים אוכף כל כלל, גם נגד מי שמנסה לרמות.</a:t>
             </a:r>
           </a:p>
         </p:txBody>
@@ -8368,7 +8368,7 @@
                 </a:solidFill>
                 <a:latin typeface="Arial"/>
               </a:rPr>
-              <a:t>§10 · סקייל</a:t>
+              <a:t>§10 · סקייל — צמיחה</a:t>
             </a:r>
           </a:p>
         </p:txBody>
@@ -8446,13 +8446,13 @@
               </a:spcAft>
             </a:pPr>
             <a:r>
-              <a:rPr sz="3400" b="1" lang="he-IL">
+              <a:rPr sz="3200" b="1" lang="he-IL">
                 <a:solidFill>
                   <a:srgbClr val="0E1F18"/>
                 </a:solidFill>
                 <a:latin typeface="Arial"/>
               </a:rPr>
-              <a:t>איך חשבנו על סקייל</a:t>
+              <a:t>איך המערכת תתמודד עם הרבה משתמשים</a:t>
             </a:r>
           </a:p>
         </p:txBody>
@@ -8465,7 +8465,7 @@
         </p:nvSpPr>
         <p:spPr>
           <a:xfrm>
-            <a:off x="548640" y="1481328"/>
+            <a:off x="548640" y="1463040"/>
             <a:ext cx="11064240" cy="31750"/>
           </a:xfrm>
           <a:prstGeom prst="rect">
@@ -8509,8 +8509,8 @@
         </p:nvSpPr>
         <p:spPr>
           <a:xfrm>
-            <a:off x="640080" y="1783080"/>
-            <a:ext cx="10881360" cy="3931920"/>
+            <a:off x="640080" y="1645920"/>
+            <a:ext cx="10881360" cy="640080"/>
           </a:xfrm>
           <a:prstGeom prst="rect">
             <a:avLst/>
@@ -8518,7 +8518,7 @@
           <a:noFill/>
         </p:spPr>
         <p:txBody>
-          <a:bodyPr wrap="square" lIns="50800" rIns="50800">
+          <a:bodyPr wrap="square" anchor="t" lIns="50800" rIns="50800" tIns="25400" bIns="25400">
             <a:spAutoFit/>
           </a:bodyPr>
           <a:lstStyle/>
@@ -8528,110 +8528,17 @@
                 <a:spcPts val="0"/>
               </a:spcBef>
               <a:spcAft>
-                <a:spcPts val="1700"/>
-              </a:spcAft>
-            </a:pPr>
-            <a:r>
-              <a:rPr sz="1900" lang="he-IL">
+                <a:spcPts val="0"/>
+              </a:spcAft>
+            </a:pPr>
+            <a:r>
+              <a:rPr sz="1700" b="0" lang="he-IL">
                 <a:solidFill>
                   <a:srgbClr val="0E1F18"/>
                 </a:solidFill>
                 <a:latin typeface="Arial"/>
               </a:rPr>
-              <a:t>מתוכנן לעשרות משתמשים ומאות בקשות — כל מנגנון פשוט ונכון.  </a:t>
-            </a:r>
-            <a:r>
-              <a:rPr sz="1500" lang="he-IL">
-                <a:solidFill>
-                  <a:srgbClr val="0F6B4F"/>
-                </a:solidFill>
-                <a:latin typeface="Arial"/>
-              </a:rPr>
-              <a:t>●</a:t>
-            </a:r>
-          </a:p>
-          <a:p>
-            <a:pPr algn="r" rtl="1">
-              <a:spcBef>
-                <a:spcPts val="0"/>
-              </a:spcBef>
-              <a:spcAft>
-                <a:spcPts val="1700"/>
-              </a:spcAft>
-            </a:pPr>
-            <a:r>
-              <a:rPr sz="1900" lang="he-IL">
-                <a:solidFill>
-                  <a:srgbClr val="0E1F18"/>
-                </a:solidFill>
-                <a:latin typeface="Arial"/>
-              </a:rPr>
-              <a:t>פיד מוגבל ל-200 + מיון Haversine ב-TypeScript + 12 לעמוד.  </a:t>
-            </a:r>
-            <a:r>
-              <a:rPr sz="1500" lang="he-IL">
-                <a:solidFill>
-                  <a:srgbClr val="0F6B4F"/>
-                </a:solidFill>
-                <a:latin typeface="Arial"/>
-              </a:rPr>
-              <a:t>●</a:t>
-            </a:r>
-          </a:p>
-          <a:p>
-            <a:pPr algn="r" rtl="1">
-              <a:spcBef>
-                <a:spcPts val="0"/>
-              </a:spcBef>
-              <a:spcAft>
-                <a:spcPts val="1700"/>
-              </a:spcAft>
-            </a:pPr>
-            <a:r>
-              <a:rPr sz="1900" lang="he-IL">
-                <a:solidFill>
-                  <a:srgbClr val="0E1F18"/>
-                </a:solidFill>
-                <a:latin typeface="Arial"/>
-              </a:rPr>
-              <a:t>אינדקס לכל שאילתה כבדה · קריאות בשרת · אין client cache.  </a:t>
-            </a:r>
-            <a:r>
-              <a:rPr sz="1500" lang="he-IL">
-                <a:solidFill>
-                  <a:srgbClr val="0F6B4F"/>
-                </a:solidFill>
-                <a:latin typeface="Arial"/>
-              </a:rPr>
-              <a:t>●</a:t>
-            </a:r>
-          </a:p>
-          <a:p>
-            <a:pPr algn="r" rtl="1">
-              <a:spcBef>
-                <a:spcPts val="0"/>
-              </a:spcBef>
-              <a:spcAft>
-                <a:spcPts val="1700"/>
-              </a:spcAft>
-            </a:pPr>
-            <a:r>
-              <a:rPr sz="1900" lang="he-IL">
-                <a:solidFill>
-                  <a:srgbClr val="0E1F18"/>
-                </a:solidFill>
-                <a:latin typeface="Arial"/>
-              </a:rPr>
-              <a:t>לכל מגבלה יש signal מפורש ויורש נקוב — כולם additive.  </a:t>
-            </a:r>
-            <a:r>
-              <a:rPr sz="1500" lang="he-IL">
-                <a:solidFill>
-                  <a:srgbClr val="0F6B4F"/>
-                </a:solidFill>
-                <a:latin typeface="Arial"/>
-              </a:rPr>
-              <a:t>●</a:t>
+              <a:t>"סקייל" זה השאלה: מה יקרה כשבמקום 10 משתמשים יהיו 10,000? האם האתר יישאר מהיר?</a:t>
             </a:r>
           </a:p>
         </p:txBody>
@@ -8644,14 +8551,14 @@
         </p:nvSpPr>
         <p:spPr>
           <a:xfrm>
-            <a:off x="640080" y="5623560"/>
-            <a:ext cx="10881360" cy="731520"/>
+            <a:off x="6263640" y="2514600"/>
+            <a:ext cx="5257800" cy="548640"/>
           </a:xfrm>
           <a:prstGeom prst="roundRect">
             <a:avLst/>
           </a:prstGeom>
           <a:solidFill>
-            <a:srgbClr val="EAF2EE"/>
+            <a:srgbClr val="0F6B4F"/>
           </a:solidFill>
           <a:ln>
             <a:noFill/>
@@ -8688,8 +8595,8 @@
         </p:nvSpPr>
         <p:spPr>
           <a:xfrm>
-            <a:off x="914400" y="5705856"/>
-            <a:ext cx="10332720" cy="566928"/>
+            <a:off x="6263640" y="2578608"/>
+            <a:ext cx="5257800" cy="420624"/>
           </a:xfrm>
           <a:prstGeom prst="rect">
             <a:avLst/>
@@ -8702,22 +8609,322 @@
           </a:bodyPr>
           <a:lstStyle/>
           <a:p>
+            <a:pPr algn="ctr" rtl="1">
+              <a:spcBef>
+                <a:spcPts val="0"/>
+              </a:spcBef>
+              <a:spcAft>
+                <a:spcPts val="0"/>
+              </a:spcAft>
+            </a:pPr>
+            <a:r>
+              <a:rPr sz="1700" b="1" lang="he-IL">
+                <a:solidFill>
+                  <a:srgbClr val="FFFFFF"/>
+                </a:solidFill>
+                <a:latin typeface="Arial"/>
+              </a:rPr>
+              <a:t>מה כבר בנוי לצמיחה</a:t>
+            </a:r>
+          </a:p>
+        </p:txBody>
+      </p:sp>
+      <p:sp>
+        <p:nvSpPr>
+          <p:cNvPr id="10" name="TextBox 9"/>
+          <p:cNvSpPr txBox="1"/>
+          <p:nvPr/>
+        </p:nvSpPr>
+        <p:spPr>
+          <a:xfrm>
+            <a:off x="6263640" y="3291840"/>
+            <a:ext cx="5257800" cy="2743200"/>
+          </a:xfrm>
+          <a:prstGeom prst="rect">
+            <a:avLst/>
+          </a:prstGeom>
+          <a:noFill/>
+        </p:spPr>
+        <p:txBody>
+          <a:bodyPr wrap="square" lIns="50800" rIns="50800">
+            <a:spAutoFit/>
+          </a:bodyPr>
+          <a:lstStyle/>
+          <a:p>
             <a:pPr algn="r" rtl="1">
               <a:spcBef>
                 <a:spcPts val="0"/>
               </a:spcBef>
               <a:spcAft>
-                <a:spcPts val="0"/>
-              </a:spcAft>
-            </a:pPr>
-            <a:r>
-              <a:rPr sz="1400" b="1" lang="he-IL">
+                <a:spcPts val="1300"/>
+              </a:spcAft>
+            </a:pPr>
+            <a:r>
+              <a:rPr sz="1500" lang="he-IL">
+                <a:solidFill>
+                  <a:srgbClr val="0E1F18"/>
+                </a:solidFill>
+                <a:latin typeface="Arial"/>
+              </a:rPr>
+              <a:t>הפיד מביא רק 200 בקשות בכל פעם, לא את כולן — כדי שלא ייתקע.   </a:t>
+            </a:r>
+            <a:r>
+              <a:rPr sz="1000" lang="he-IL">
                 <a:solidFill>
                   <a:srgbClr val="0F6B4F"/>
                 </a:solidFill>
                 <a:latin typeface="Arial"/>
               </a:rPr>
-              <a:t>מה שנשבר ראשון הוא תור האדמין האנושי, לא המסד — ואומרים זאת בכנות.</a:t>
+              <a:t>●</a:t>
+            </a:r>
+          </a:p>
+          <a:p>
+            <a:pPr algn="r" rtl="1">
+              <a:spcBef>
+                <a:spcPts val="0"/>
+              </a:spcBef>
+              <a:spcAft>
+                <a:spcPts val="1300"/>
+              </a:spcAft>
+            </a:pPr>
+            <a:r>
+              <a:rPr sz="1500" lang="he-IL">
+                <a:solidFill>
+                  <a:srgbClr val="0E1F18"/>
+                </a:solidFill>
+                <a:latin typeface="Arial"/>
+              </a:rPr>
+              <a:t>מציגים 12 בקשות בעמוד, עם דפדוף — לא הכול בבת אחת.   </a:t>
+            </a:r>
+            <a:r>
+              <a:rPr sz="1000" lang="he-IL">
+                <a:solidFill>
+                  <a:srgbClr val="0F6B4F"/>
+                </a:solidFill>
+                <a:latin typeface="Arial"/>
+              </a:rPr>
+              <a:t>●</a:t>
+            </a:r>
+          </a:p>
+          <a:p>
+            <a:pPr algn="r" rtl="1">
+              <a:spcBef>
+                <a:spcPts val="0"/>
+              </a:spcBef>
+              <a:spcAft>
+                <a:spcPts val="1300"/>
+              </a:spcAft>
+            </a:pPr>
+            <a:r>
+              <a:rPr sz="1500" lang="he-IL">
+                <a:solidFill>
+                  <a:srgbClr val="0E1F18"/>
+                </a:solidFill>
+                <a:latin typeface="Arial"/>
+              </a:rPr>
+              <a:t>יש 'אינדקסים' במסד — כמו סדר אלפביתי בספר טלפונים, שמאפשר למצוא מהר.   </a:t>
+            </a:r>
+            <a:r>
+              <a:rPr sz="1000" lang="he-IL">
+                <a:solidFill>
+                  <a:srgbClr val="0F6B4F"/>
+                </a:solidFill>
+                <a:latin typeface="Arial"/>
+              </a:rPr>
+              <a:t>●</a:t>
+            </a:r>
+          </a:p>
+        </p:txBody>
+      </p:sp>
+      <p:sp>
+        <p:nvSpPr>
+          <p:cNvPr id="11" name="Rounded Rectangle 10"/>
+          <p:cNvSpPr/>
+          <p:nvPr/>
+        </p:nvSpPr>
+        <p:spPr>
+          <a:xfrm>
+            <a:off x="640080" y="2514600"/>
+            <a:ext cx="5257800" cy="548640"/>
+          </a:xfrm>
+          <a:prstGeom prst="roundRect">
+            <a:avLst/>
+          </a:prstGeom>
+          <a:solidFill>
+            <a:srgbClr val="8A9890"/>
+          </a:solidFill>
+          <a:ln>
+            <a:noFill/>
+          </a:ln>
+          <a:effectLst/>
+        </p:spPr>
+        <p:style>
+          <a:lnRef idx="1">
+            <a:schemeClr val="accent1"/>
+          </a:lnRef>
+          <a:fillRef idx="3">
+            <a:schemeClr val="accent1"/>
+          </a:fillRef>
+          <a:effectRef idx="2">
+            <a:schemeClr val="accent1"/>
+          </a:effectRef>
+          <a:fontRef idx="minor">
+            <a:schemeClr val="lt1"/>
+          </a:fontRef>
+        </p:style>
+        <p:txBody>
+          <a:bodyPr rtlCol="0" anchor="ctr"/>
+          <a:lstStyle/>
+          <a:p>
+            <a:pPr algn="ctr"/>
+          </a:p>
+        </p:txBody>
+      </p:sp>
+      <p:sp>
+        <p:nvSpPr>
+          <p:cNvPr id="12" name="TextBox 11"/>
+          <p:cNvSpPr txBox="1"/>
+          <p:nvPr/>
+        </p:nvSpPr>
+        <p:spPr>
+          <a:xfrm>
+            <a:off x="640080" y="2578608"/>
+            <a:ext cx="5257800" cy="420624"/>
+          </a:xfrm>
+          <a:prstGeom prst="rect">
+            <a:avLst/>
+          </a:prstGeom>
+          <a:noFill/>
+        </p:spPr>
+        <p:txBody>
+          <a:bodyPr wrap="square" anchor="ctr" lIns="50800" rIns="50800" tIns="25400" bIns="25400">
+            <a:spAutoFit/>
+          </a:bodyPr>
+          <a:lstStyle/>
+          <a:p>
+            <a:pPr algn="ctr" rtl="1">
+              <a:spcBef>
+                <a:spcPts val="0"/>
+              </a:spcBef>
+              <a:spcAft>
+                <a:spcPts val="0"/>
+              </a:spcAft>
+            </a:pPr>
+            <a:r>
+              <a:rPr sz="1700" b="1" lang="he-IL">
+                <a:solidFill>
+                  <a:srgbClr val="FFFFFF"/>
+                </a:solidFill>
+                <a:latin typeface="Arial"/>
+              </a:rPr>
+              <a:t>מה אשפר כשנגדל</a:t>
+            </a:r>
+          </a:p>
+        </p:txBody>
+      </p:sp>
+      <p:sp>
+        <p:nvSpPr>
+          <p:cNvPr id="13" name="TextBox 12"/>
+          <p:cNvSpPr txBox="1"/>
+          <p:nvPr/>
+        </p:nvSpPr>
+        <p:spPr>
+          <a:xfrm>
+            <a:off x="640080" y="3291840"/>
+            <a:ext cx="5257800" cy="2743200"/>
+          </a:xfrm>
+          <a:prstGeom prst="rect">
+            <a:avLst/>
+          </a:prstGeom>
+          <a:noFill/>
+        </p:spPr>
+        <p:txBody>
+          <a:bodyPr wrap="square" lIns="50800" rIns="50800">
+            <a:spAutoFit/>
+          </a:bodyPr>
+          <a:lstStyle/>
+          <a:p>
+            <a:pPr algn="r" rtl="1">
+              <a:spcBef>
+                <a:spcPts val="0"/>
+              </a:spcBef>
+              <a:spcAft>
+                <a:spcPts val="1300"/>
+              </a:spcAft>
+            </a:pPr>
+            <a:r>
+              <a:rPr sz="1500" lang="he-IL">
+                <a:solidFill>
+                  <a:srgbClr val="0E1F18"/>
+                </a:solidFill>
+                <a:latin typeface="Arial"/>
+              </a:rPr>
+              <a:t>חישוב המרחק יעבור למסד עצמו, כדי לתמוך במיליוני בקשות.   </a:t>
+            </a:r>
+            <a:r>
+              <a:rPr sz="1000" lang="he-IL">
+                <a:solidFill>
+                  <a:srgbClr val="0F6B4F"/>
+                </a:solidFill>
+                <a:latin typeface="Arial"/>
+              </a:rPr>
+              <a:t>●</a:t>
+            </a:r>
+          </a:p>
+          <a:p>
+            <a:pPr algn="r" rtl="1">
+              <a:spcBef>
+                <a:spcPts val="0"/>
+              </a:spcBef>
+              <a:spcAft>
+                <a:spcPts val="1300"/>
+              </a:spcAft>
+            </a:pPr>
+            <a:r>
+              <a:rPr sz="1500" lang="he-IL">
+                <a:solidFill>
+                  <a:srgbClr val="0E1F18"/>
+                </a:solidFill>
+                <a:latin typeface="Arial"/>
+              </a:rPr>
+              <a:t>אימות אוטומטי (SMS) במקום מנהל שמאשר ידנית כל משתמש.   </a:t>
+            </a:r>
+            <a:r>
+              <a:rPr sz="1000" lang="he-IL">
+                <a:solidFill>
+                  <a:srgbClr val="0F6B4F"/>
+                </a:solidFill>
+                <a:latin typeface="Arial"/>
+              </a:rPr>
+              <a:t>●</a:t>
+            </a:r>
+          </a:p>
+          <a:p>
+            <a:pPr algn="r" rtl="1">
+              <a:spcBef>
+                <a:spcPts val="0"/>
+              </a:spcBef>
+              <a:spcAft>
+                <a:spcPts val="1300"/>
+              </a:spcAft>
+            </a:pPr>
+            <a:r>
+              <a:rPr sz="1500" lang="he-IL">
+                <a:solidFill>
+                  <a:srgbClr val="0E1F18"/>
+                </a:solidFill>
+                <a:latin typeface="Arial"/>
+              </a:rPr>
+              <a:t>כי מה שיישבר ראשון זה לא המחשב — זה האדם שמאשר ידנית.   </a:t>
+            </a:r>
+            <a:r>
+              <a:rPr sz="1000" lang="he-IL">
+                <a:solidFill>
+                  <a:srgbClr val="0F6B4F"/>
+                </a:solidFill>
+                <a:latin typeface="Arial"/>
+              </a:rPr>
+              <a:t>●</a:t>
             </a:r>
           </a:p>
         </p:txBody>
